--- a/presentation/SUBMISSION_2_PITCH_DECK.pptx
+++ b/presentation/SUBMISSION_2_PITCH_DECK.pptx
@@ -2,20 +2,20 @@
 <file path=ppt/presentation.xml><?xml version="1.0" encoding="utf-8"?>
 <p:presentation xmlns:p="http://schemas.openxmlformats.org/presentationml/2006/main">
   <p:sldMasterIdLst>
-    <p:sldMasterId xmlns:r="http://schemas.openxmlformats.org/officeDocument/2006/relationships" id="2147483648" r:id="R39d11b4ff8644499"/>
+    <p:sldMasterId xmlns:r="http://schemas.openxmlformats.org/officeDocument/2006/relationships" id="2147483648" r:id="Ree50c98a7d55444e"/>
   </p:sldMasterIdLst>
   <p:notesMasterIdLst>
-    <p:notesMasterId xmlns:r="http://schemas.openxmlformats.org/officeDocument/2006/relationships" r:id="R500aab01b8264fe1"/>
+    <p:notesMasterId xmlns:r="http://schemas.openxmlformats.org/officeDocument/2006/relationships" r:id="R9860d9db30964a02"/>
   </p:notesMasterIdLst>
   <p:sldIdLst>
-    <p:sldId xmlns:r="http://schemas.openxmlformats.org/officeDocument/2006/relationships" id="256" r:id="R47df23589f314daa"/>
-    <p:sldId xmlns:r="http://schemas.openxmlformats.org/officeDocument/2006/relationships" id="257" r:id="R9cd6d0f9af734f44"/>
-    <p:sldId xmlns:r="http://schemas.openxmlformats.org/officeDocument/2006/relationships" id="258" r:id="Ra50b15a28ed34e8c"/>
-    <p:sldId xmlns:r="http://schemas.openxmlformats.org/officeDocument/2006/relationships" id="259" r:id="Ra7d9a4f0b75148d7"/>
-    <p:sldId xmlns:r="http://schemas.openxmlformats.org/officeDocument/2006/relationships" id="260" r:id="Rb05511278a264c8c"/>
-    <p:sldId xmlns:r="http://schemas.openxmlformats.org/officeDocument/2006/relationships" id="261" r:id="R55b85b030b574f1f"/>
-    <p:sldId xmlns:r="http://schemas.openxmlformats.org/officeDocument/2006/relationships" id="262" r:id="Rbec4538a0e984a66"/>
-    <p:sldId xmlns:r="http://schemas.openxmlformats.org/officeDocument/2006/relationships" id="263" r:id="R7b0c575e366343df"/>
+    <p:sldId xmlns:r="http://schemas.openxmlformats.org/officeDocument/2006/relationships" id="256" r:id="R60b77592d0b3485f"/>
+    <p:sldId xmlns:r="http://schemas.openxmlformats.org/officeDocument/2006/relationships" id="257" r:id="Re5c7d2fa96d045ce"/>
+    <p:sldId xmlns:r="http://schemas.openxmlformats.org/officeDocument/2006/relationships" id="258" r:id="Reaed449dce53414d"/>
+    <p:sldId xmlns:r="http://schemas.openxmlformats.org/officeDocument/2006/relationships" id="259" r:id="R570817c42d864b3f"/>
+    <p:sldId xmlns:r="http://schemas.openxmlformats.org/officeDocument/2006/relationships" id="260" r:id="R5c7e80cd9f5b4180"/>
+    <p:sldId xmlns:r="http://schemas.openxmlformats.org/officeDocument/2006/relationships" id="261" r:id="R9eff55b0fdef4598"/>
+    <p:sldId xmlns:r="http://schemas.openxmlformats.org/officeDocument/2006/relationships" id="262" r:id="R05b765997ee04883"/>
+    <p:sldId xmlns:r="http://schemas.openxmlformats.org/officeDocument/2006/relationships" id="263" r:id="Rf82f87b294b24ffe"/>
   </p:sldIdLst>
   <p:sldSz cx="12192000" cy="6858000"/>
   <p:notesSz cx="6858000" cy="9144000"/>
@@ -1024,7 +1024,7 @@
   </p:cSld>
   <p:clrMap bg1="lt1" tx1="dk1" bg2="lt2" tx2="dk2" accent1="accent1" accent2="accent2" accent3="accent3" accent4="accent4" accent5="accent5" accent6="accent6" hlink="hlink" folHlink="folHlink"/>
   <p:sldLayoutIdLst>
-    <p:sldLayoutId xmlns:r="http://schemas.openxmlformats.org/officeDocument/2006/relationships" id="2147483649" r:id="R45c915a53f604272"/>
+    <p:sldLayoutId xmlns:r="http://schemas.openxmlformats.org/officeDocument/2006/relationships" id="2147483649" r:id="Rfdd493355370452c"/>
   </p:sldLayoutIdLst>
   <p:txStyles>
     <p:titleStyle>
@@ -1323,7 +1323,7 @@
           <p:cNvPr id="1" name="">
             <a:extLst xmlns:a="http://schemas.openxmlformats.org/drawingml/2006/main">
               <a:ext uri="{FF2B5EF4-FFF2-40B4-BE49-F238E27FC236}">
-                <a16:creationId xmlns:a16="http://schemas.microsoft.com/office/drawing/2014/main" id="{6118E27C-5D0D-43C7-AE93-1C34C7B9BAD1}"/>
+                <a16:creationId xmlns:a16="http://schemas.microsoft.com/office/drawing/2014/main" id="{BBA8666B-107D-4CD9-A8A7-60AC92B82472}"/>
               </a:ext>
             </a:extLst>
           </p:cNvPr>
@@ -1358,7 +1358,7 @@
           <p:cNvPr id="2" name="">
             <a:extLst xmlns:a="http://schemas.openxmlformats.org/drawingml/2006/main">
               <a:ext uri="{FF2B5EF4-FFF2-40B4-BE49-F238E27FC236}">
-                <a16:creationId xmlns:a16="http://schemas.microsoft.com/office/drawing/2014/main" id="{0FAD22AA-EDB5-4723-A09F-FFD61229B867}"/>
+                <a16:creationId xmlns:a16="http://schemas.microsoft.com/office/drawing/2014/main" id="{31B557BA-7956-4B1C-B350-5F1F26E3145B}"/>
               </a:ext>
             </a:extLst>
           </p:cNvPr>
@@ -1391,7 +1391,7 @@
           <p:cNvPr id="3" name="">
             <a:extLst xmlns:a="http://schemas.openxmlformats.org/drawingml/2006/main">
               <a:ext uri="{FF2B5EF4-FFF2-40B4-BE49-F238E27FC236}">
-                <a16:creationId xmlns:a16="http://schemas.microsoft.com/office/drawing/2014/main" id="{79676555-0A9A-47F0-AA21-3FD4DF3BECE9}"/>
+                <a16:creationId xmlns:a16="http://schemas.microsoft.com/office/drawing/2014/main" id="{F8EF9451-658A-48B7-B14F-D4617D592AF2}"/>
               </a:ext>
             </a:extLst>
           </p:cNvPr>
@@ -1424,7 +1424,7 @@
           <p:cNvPr id="4" name="">
             <a:extLst xmlns:a="http://schemas.openxmlformats.org/drawingml/2006/main">
               <a:ext uri="{FF2B5EF4-FFF2-40B4-BE49-F238E27FC236}">
-                <a16:creationId xmlns:a16="http://schemas.microsoft.com/office/drawing/2014/main" id="{0323C266-723B-413C-9BF5-7A11CFCA15E9}"/>
+                <a16:creationId xmlns:a16="http://schemas.microsoft.com/office/drawing/2014/main" id="{E59C6E19-AAD7-4AFF-908E-2A86661C47CD}"/>
               </a:ext>
             </a:extLst>
           </p:cNvPr>
@@ -1488,7 +1488,7 @@
           <p:cNvPr id="5" name="">
             <a:extLst xmlns:a="http://schemas.openxmlformats.org/drawingml/2006/main">
               <a:ext uri="{FF2B5EF4-FFF2-40B4-BE49-F238E27FC236}">
-                <a16:creationId xmlns:a16="http://schemas.microsoft.com/office/drawing/2014/main" id="{BE5F3EB3-DA5B-473F-82BF-FEE2EC5D45E4}"/>
+                <a16:creationId xmlns:a16="http://schemas.microsoft.com/office/drawing/2014/main" id="{A6132437-BFB6-4DC4-B10E-1B8E40650B5A}"/>
               </a:ext>
             </a:extLst>
           </p:cNvPr>
@@ -1521,7 +1521,7 @@
           <p:cNvPr id="6" name="">
             <a:extLst xmlns:a="http://schemas.openxmlformats.org/drawingml/2006/main">
               <a:ext uri="{FF2B5EF4-FFF2-40B4-BE49-F238E27FC236}">
-                <a16:creationId xmlns:a16="http://schemas.microsoft.com/office/drawing/2014/main" id="{86144662-A6A4-4698-8B31-CB72596F363D}"/>
+                <a16:creationId xmlns:a16="http://schemas.microsoft.com/office/drawing/2014/main" id="{76529619-3437-47C3-BB0E-C45FEF9245A8}"/>
               </a:ext>
             </a:extLst>
           </p:cNvPr>
@@ -1585,7 +1585,7 @@
           <p:cNvPr id="7" name="">
             <a:extLst xmlns:a="http://schemas.openxmlformats.org/drawingml/2006/main">
               <a:ext uri="{FF2B5EF4-FFF2-40B4-BE49-F238E27FC236}">
-                <a16:creationId xmlns:a16="http://schemas.microsoft.com/office/drawing/2014/main" id="{D59C6253-CD95-497C-B70E-3D1E7BC5A8E2}"/>
+                <a16:creationId xmlns:a16="http://schemas.microsoft.com/office/drawing/2014/main" id="{B79869CB-BE49-4A5F-A980-E26670E38B2C}"/>
               </a:ext>
             </a:extLst>
           </p:cNvPr>
@@ -1649,7 +1649,7 @@
           <p:cNvPr id="8" name="">
             <a:extLst xmlns:a="http://schemas.openxmlformats.org/drawingml/2006/main">
               <a:ext uri="{FF2B5EF4-FFF2-40B4-BE49-F238E27FC236}">
-                <a16:creationId xmlns:a16="http://schemas.microsoft.com/office/drawing/2014/main" id="{246A0C0D-BE89-441E-8A59-113872D06DDE}"/>
+                <a16:creationId xmlns:a16="http://schemas.microsoft.com/office/drawing/2014/main" id="{12CC8B9B-F64A-4D86-A1B0-81FD239EDAA5}"/>
               </a:ext>
             </a:extLst>
           </p:cNvPr>
@@ -1713,7 +1713,7 @@
           <p:cNvPr id="9" name="">
             <a:extLst xmlns:a="http://schemas.openxmlformats.org/drawingml/2006/main">
               <a:ext uri="{FF2B5EF4-FFF2-40B4-BE49-F238E27FC236}">
-                <a16:creationId xmlns:a16="http://schemas.microsoft.com/office/drawing/2014/main" id="{CD35A5A7-4AF2-4ADC-8699-25822FDE23BB}"/>
+                <a16:creationId xmlns:a16="http://schemas.microsoft.com/office/drawing/2014/main" id="{FED1B0D9-8A0E-446E-AFD1-563E123675E5}"/>
               </a:ext>
             </a:extLst>
           </p:cNvPr>
@@ -1746,7 +1746,7 @@
           <p:cNvPr id="10" name="">
             <a:extLst xmlns:a="http://schemas.openxmlformats.org/drawingml/2006/main">
               <a:ext uri="{FF2B5EF4-FFF2-40B4-BE49-F238E27FC236}">
-                <a16:creationId xmlns:a16="http://schemas.microsoft.com/office/drawing/2014/main" id="{C0B72FFC-D12E-46A4-9F6C-11FA0E8A7AE7}"/>
+                <a16:creationId xmlns:a16="http://schemas.microsoft.com/office/drawing/2014/main" id="{0A863114-8970-4E40-95CD-B95188244E38}"/>
               </a:ext>
             </a:extLst>
           </p:cNvPr>
@@ -1810,7 +1810,7 @@
           <p:cNvPr id="11" name="">
             <a:extLst xmlns:a="http://schemas.openxmlformats.org/drawingml/2006/main">
               <a:ext uri="{FF2B5EF4-FFF2-40B4-BE49-F238E27FC236}">
-                <a16:creationId xmlns:a16="http://schemas.microsoft.com/office/drawing/2014/main" id="{B05EB942-11BC-44F1-B345-7CE1505BCBB6}"/>
+                <a16:creationId xmlns:a16="http://schemas.microsoft.com/office/drawing/2014/main" id="{C0C71B0C-1589-4902-AC57-470E1BB39E23}"/>
               </a:ext>
             </a:extLst>
           </p:cNvPr>
@@ -1874,7 +1874,7 @@
           <p:cNvPr id="12" name="">
             <a:extLst xmlns:a="http://schemas.openxmlformats.org/drawingml/2006/main">
               <a:ext uri="{FF2B5EF4-FFF2-40B4-BE49-F238E27FC236}">
-                <a16:creationId xmlns:a16="http://schemas.microsoft.com/office/drawing/2014/main" id="{B403BCDD-CBBD-48B1-A254-EA0130690E74}"/>
+                <a16:creationId xmlns:a16="http://schemas.microsoft.com/office/drawing/2014/main" id="{19A699D7-081F-4835-BEF9-8AEB784F30EF}"/>
               </a:ext>
             </a:extLst>
           </p:cNvPr>
@@ -1938,7 +1938,7 @@
           <p:cNvPr id="13" name="">
             <a:extLst xmlns:a="http://schemas.openxmlformats.org/drawingml/2006/main">
               <a:ext uri="{FF2B5EF4-FFF2-40B4-BE49-F238E27FC236}">
-                <a16:creationId xmlns:a16="http://schemas.microsoft.com/office/drawing/2014/main" id="{684B5B18-4AFB-4087-B74E-B1DD8030242A}"/>
+                <a16:creationId xmlns:a16="http://schemas.microsoft.com/office/drawing/2014/main" id="{3AEDA392-F437-4979-93C7-57409B58CDE1}"/>
               </a:ext>
             </a:extLst>
           </p:cNvPr>
@@ -1971,7 +1971,7 @@
           <p:cNvPr id="14" name="">
             <a:extLst xmlns:a="http://schemas.openxmlformats.org/drawingml/2006/main">
               <a:ext uri="{FF2B5EF4-FFF2-40B4-BE49-F238E27FC236}">
-                <a16:creationId xmlns:a16="http://schemas.microsoft.com/office/drawing/2014/main" id="{F3E6AC3F-07DC-4913-A6C1-E768DFFA8C70}"/>
+                <a16:creationId xmlns:a16="http://schemas.microsoft.com/office/drawing/2014/main" id="{DF17D406-DE64-4FF7-BE7C-4C64CA56354F}"/>
               </a:ext>
             </a:extLst>
           </p:cNvPr>
@@ -2035,7 +2035,7 @@
           <p:cNvPr id="15" name="">
             <a:extLst xmlns:a="http://schemas.openxmlformats.org/drawingml/2006/main">
               <a:ext uri="{FF2B5EF4-FFF2-40B4-BE49-F238E27FC236}">
-                <a16:creationId xmlns:a16="http://schemas.microsoft.com/office/drawing/2014/main" id="{E3F7C0E7-963B-4FC7-AC81-3D51532F2B92}"/>
+                <a16:creationId xmlns:a16="http://schemas.microsoft.com/office/drawing/2014/main" id="{11CAE186-6F52-429D-A370-B71153475F6E}"/>
               </a:ext>
             </a:extLst>
           </p:cNvPr>
@@ -2099,7 +2099,7 @@
           <p:cNvPr id="16" name="">
             <a:extLst xmlns:a="http://schemas.openxmlformats.org/drawingml/2006/main">
               <a:ext uri="{FF2B5EF4-FFF2-40B4-BE49-F238E27FC236}">
-                <a16:creationId xmlns:a16="http://schemas.microsoft.com/office/drawing/2014/main" id="{09FAD8AC-9464-4753-8318-6FDABAD977FC}"/>
+                <a16:creationId xmlns:a16="http://schemas.microsoft.com/office/drawing/2014/main" id="{9616B1E6-8F02-4F9F-9007-455410A4F465}"/>
               </a:ext>
             </a:extLst>
           </p:cNvPr>
@@ -2163,7 +2163,7 @@
           <p:cNvPr id="17" name="">
             <a:extLst xmlns:a="http://schemas.openxmlformats.org/drawingml/2006/main">
               <a:ext uri="{FF2B5EF4-FFF2-40B4-BE49-F238E27FC236}">
-                <a16:creationId xmlns:a16="http://schemas.microsoft.com/office/drawing/2014/main" id="{AC29DED8-A847-4FFE-9851-70365BE7A871}"/>
+                <a16:creationId xmlns:a16="http://schemas.microsoft.com/office/drawing/2014/main" id="{A8E24CC8-01C1-439B-9722-93E361B7A8CD}"/>
               </a:ext>
             </a:extLst>
           </p:cNvPr>
@@ -2196,7 +2196,7 @@
           <p:cNvPr id="18" name="">
             <a:extLst xmlns:a="http://schemas.openxmlformats.org/drawingml/2006/main">
               <a:ext uri="{FF2B5EF4-FFF2-40B4-BE49-F238E27FC236}">
-                <a16:creationId xmlns:a16="http://schemas.microsoft.com/office/drawing/2014/main" id="{986308DC-729F-400F-B374-AB44FB3BAE70}"/>
+                <a16:creationId xmlns:a16="http://schemas.microsoft.com/office/drawing/2014/main" id="{47A3608A-C0FF-4095-B1F9-48CFF656BFED}"/>
               </a:ext>
             </a:extLst>
           </p:cNvPr>
@@ -2260,7 +2260,7 @@
           <p:cNvPr id="19" name="">
             <a:extLst xmlns:a="http://schemas.openxmlformats.org/drawingml/2006/main">
               <a:ext uri="{FF2B5EF4-FFF2-40B4-BE49-F238E27FC236}">
-                <a16:creationId xmlns:a16="http://schemas.microsoft.com/office/drawing/2014/main" id="{A2175695-7A6B-41B6-B970-EE49C33AEE6F}"/>
+                <a16:creationId xmlns:a16="http://schemas.microsoft.com/office/drawing/2014/main" id="{69AA1F59-2191-4A66-9379-1433C6DB278B}"/>
               </a:ext>
             </a:extLst>
           </p:cNvPr>
@@ -2324,7 +2324,7 @@
           <p:cNvPr id="20" name="">
             <a:extLst xmlns:a="http://schemas.openxmlformats.org/drawingml/2006/main">
               <a:ext uri="{FF2B5EF4-FFF2-40B4-BE49-F238E27FC236}">
-                <a16:creationId xmlns:a16="http://schemas.microsoft.com/office/drawing/2014/main" id="{ED59CBF0-71A4-4D5B-A5E4-F7AAFE7EC57E}"/>
+                <a16:creationId xmlns:a16="http://schemas.microsoft.com/office/drawing/2014/main" id="{CF335EF7-06A8-4C38-BFD4-8A45B0AE46AF}"/>
               </a:ext>
             </a:extLst>
           </p:cNvPr>
@@ -2388,7 +2388,7 @@
           <p:cNvPr id="21" name="">
             <a:extLst xmlns:a="http://schemas.openxmlformats.org/drawingml/2006/main">
               <a:ext uri="{FF2B5EF4-FFF2-40B4-BE49-F238E27FC236}">
-                <a16:creationId xmlns:a16="http://schemas.microsoft.com/office/drawing/2014/main" id="{7EE39785-7562-422F-AD11-DA4A16A1E52E}"/>
+                <a16:creationId xmlns:a16="http://schemas.microsoft.com/office/drawing/2014/main" id="{22EA123A-F9FC-41FF-A855-51E2F022D833}"/>
               </a:ext>
             </a:extLst>
           </p:cNvPr>
@@ -2421,7 +2421,7 @@
           <p:cNvPr id="22" name="">
             <a:extLst xmlns:a="http://schemas.openxmlformats.org/drawingml/2006/main">
               <a:ext uri="{FF2B5EF4-FFF2-40B4-BE49-F238E27FC236}">
-                <a16:creationId xmlns:a16="http://schemas.microsoft.com/office/drawing/2014/main" id="{80A19ACE-5C22-4DB3-9AA6-619B4B4B4911}"/>
+                <a16:creationId xmlns:a16="http://schemas.microsoft.com/office/drawing/2014/main" id="{96E5D6B9-BB07-4E04-B79F-40351F65D04D}"/>
               </a:ext>
             </a:extLst>
           </p:cNvPr>
@@ -2485,7 +2485,7 @@
           <p:cNvPr id="23" name="">
             <a:extLst xmlns:a="http://schemas.openxmlformats.org/drawingml/2006/main">
               <a:ext uri="{FF2B5EF4-FFF2-40B4-BE49-F238E27FC236}">
-                <a16:creationId xmlns:a16="http://schemas.microsoft.com/office/drawing/2014/main" id="{18E8A524-0A32-4D8D-B654-E283A1F32748}"/>
+                <a16:creationId xmlns:a16="http://schemas.microsoft.com/office/drawing/2014/main" id="{03C4A88B-443A-4FAF-9AD8-EE2D11F56022}"/>
               </a:ext>
             </a:extLst>
           </p:cNvPr>
@@ -2549,7 +2549,7 @@
           <p:cNvPr id="24" name="">
             <a:extLst xmlns:a="http://schemas.openxmlformats.org/drawingml/2006/main">
               <a:ext uri="{FF2B5EF4-FFF2-40B4-BE49-F238E27FC236}">
-                <a16:creationId xmlns:a16="http://schemas.microsoft.com/office/drawing/2014/main" id="{F5B373E2-028B-484F-89C3-5B55D0E0E15D}"/>
+                <a16:creationId xmlns:a16="http://schemas.microsoft.com/office/drawing/2014/main" id="{52560C42-8DE5-4706-976B-75A96EA666D8}"/>
               </a:ext>
             </a:extLst>
           </p:cNvPr>
@@ -2613,7 +2613,7 @@
           <p:cNvPr id="25" name="">
             <a:extLst xmlns:a="http://schemas.openxmlformats.org/drawingml/2006/main">
               <a:ext uri="{FF2B5EF4-FFF2-40B4-BE49-F238E27FC236}">
-                <a16:creationId xmlns:a16="http://schemas.microsoft.com/office/drawing/2014/main" id="{258084A8-51D3-4F66-B169-87D1CE039367}"/>
+                <a16:creationId xmlns:a16="http://schemas.microsoft.com/office/drawing/2014/main" id="{6E072F38-9D38-45E5-AE9E-6E0F0D0DEC63}"/>
               </a:ext>
             </a:extLst>
           </p:cNvPr>
@@ -2646,7 +2646,7 @@
           <p:cNvPr id="26" name="">
             <a:extLst xmlns:a="http://schemas.openxmlformats.org/drawingml/2006/main">
               <a:ext uri="{FF2B5EF4-FFF2-40B4-BE49-F238E27FC236}">
-                <a16:creationId xmlns:a16="http://schemas.microsoft.com/office/drawing/2014/main" id="{18E10754-2099-42B7-BACA-2DE14FD7525F}"/>
+                <a16:creationId xmlns:a16="http://schemas.microsoft.com/office/drawing/2014/main" id="{1F088CAA-FCA1-4100-BD56-79253778ACC9}"/>
               </a:ext>
             </a:extLst>
           </p:cNvPr>
@@ -2710,7 +2710,7 @@
           <p:cNvPr id="27" name="">
             <a:extLst xmlns:a="http://schemas.openxmlformats.org/drawingml/2006/main">
               <a:ext uri="{FF2B5EF4-FFF2-40B4-BE49-F238E27FC236}">
-                <a16:creationId xmlns:a16="http://schemas.microsoft.com/office/drawing/2014/main" id="{A641DF62-E7A1-488F-9C97-B46002D5C5EB}"/>
+                <a16:creationId xmlns:a16="http://schemas.microsoft.com/office/drawing/2014/main" id="{53882782-9708-4489-A49C-AB7C08FE0458}"/>
               </a:ext>
             </a:extLst>
           </p:cNvPr>
@@ -2743,7 +2743,7 @@
           <p:cNvPr id="28" name="">
             <a:extLst xmlns:a="http://schemas.openxmlformats.org/drawingml/2006/main">
               <a:ext uri="{FF2B5EF4-FFF2-40B4-BE49-F238E27FC236}">
-                <a16:creationId xmlns:a16="http://schemas.microsoft.com/office/drawing/2014/main" id="{18507B81-1A99-44EF-914C-B61342B6972F}"/>
+                <a16:creationId xmlns:a16="http://schemas.microsoft.com/office/drawing/2014/main" id="{1238D82D-41BD-4857-BD27-85DFC29A39F3}"/>
               </a:ext>
             </a:extLst>
           </p:cNvPr>
@@ -2807,7 +2807,7 @@
           <p:cNvPr id="29" name="">
             <a:extLst xmlns:a="http://schemas.openxmlformats.org/drawingml/2006/main">
               <a:ext uri="{FF2B5EF4-FFF2-40B4-BE49-F238E27FC236}">
-                <a16:creationId xmlns:a16="http://schemas.microsoft.com/office/drawing/2014/main" id="{33DB1568-D1AC-4EB2-B746-9A7E5FD7C322}"/>
+                <a16:creationId xmlns:a16="http://schemas.microsoft.com/office/drawing/2014/main" id="{FAA4DC9A-0D1C-4182-80E7-B05678025DBC}"/>
               </a:ext>
             </a:extLst>
           </p:cNvPr>
@@ -2840,7 +2840,7 @@
           <p:cNvPr id="30" name="">
             <a:extLst xmlns:a="http://schemas.openxmlformats.org/drawingml/2006/main">
               <a:ext uri="{FF2B5EF4-FFF2-40B4-BE49-F238E27FC236}">
-                <a16:creationId xmlns:a16="http://schemas.microsoft.com/office/drawing/2014/main" id="{89411724-51B4-4847-8313-8392FDBBE214}"/>
+                <a16:creationId xmlns:a16="http://schemas.microsoft.com/office/drawing/2014/main" id="{6E101BF0-90DB-4D8A-A591-12B2176B203C}"/>
               </a:ext>
             </a:extLst>
           </p:cNvPr>
@@ -2904,7 +2904,7 @@
           <p:cNvPr id="31" name="">
             <a:extLst xmlns:a="http://schemas.openxmlformats.org/drawingml/2006/main">
               <a:ext uri="{FF2B5EF4-FFF2-40B4-BE49-F238E27FC236}">
-                <a16:creationId xmlns:a16="http://schemas.microsoft.com/office/drawing/2014/main" id="{F6A4C183-5497-4048-B6BD-8FA771E328C5}"/>
+                <a16:creationId xmlns:a16="http://schemas.microsoft.com/office/drawing/2014/main" id="{217E391E-C3B7-490C-A10E-60890B004D7F}"/>
               </a:ext>
             </a:extLst>
           </p:cNvPr>
@@ -2937,7 +2937,7 @@
           <p:cNvPr id="32" name="">
             <a:extLst xmlns:a="http://schemas.openxmlformats.org/drawingml/2006/main">
               <a:ext uri="{FF2B5EF4-FFF2-40B4-BE49-F238E27FC236}">
-                <a16:creationId xmlns:a16="http://schemas.microsoft.com/office/drawing/2014/main" id="{1AA66351-6FDF-44B1-9E10-3B7C0D384B48}"/>
+                <a16:creationId xmlns:a16="http://schemas.microsoft.com/office/drawing/2014/main" id="{AF086242-AE60-4163-BEEE-763A1390592C}"/>
               </a:ext>
             </a:extLst>
           </p:cNvPr>
@@ -3001,7 +3001,7 @@
           <p:cNvPr id="33" name="">
             <a:extLst xmlns:a="http://schemas.openxmlformats.org/drawingml/2006/main">
               <a:ext uri="{FF2B5EF4-FFF2-40B4-BE49-F238E27FC236}">
-                <a16:creationId xmlns:a16="http://schemas.microsoft.com/office/drawing/2014/main" id="{B8F38BDB-29C0-4B87-A25F-1E9C17CE321F}"/>
+                <a16:creationId xmlns:a16="http://schemas.microsoft.com/office/drawing/2014/main" id="{6E23FF2D-6A8E-4C1A-9375-EAE6D8AAC9E5}"/>
               </a:ext>
             </a:extLst>
           </p:cNvPr>
@@ -3034,7 +3034,7 @@
           <p:cNvPr id="34" name="">
             <a:extLst xmlns:a="http://schemas.openxmlformats.org/drawingml/2006/main">
               <a:ext uri="{FF2B5EF4-FFF2-40B4-BE49-F238E27FC236}">
-                <a16:creationId xmlns:a16="http://schemas.microsoft.com/office/drawing/2014/main" id="{818C74E4-2146-496E-9DE6-B9CCBEA7A814}"/>
+                <a16:creationId xmlns:a16="http://schemas.microsoft.com/office/drawing/2014/main" id="{6B344F6F-999C-4B55-A5C5-76745D7BD7DA}"/>
               </a:ext>
             </a:extLst>
           </p:cNvPr>
@@ -3098,7 +3098,7 @@
           <p:cNvPr id="35" name="">
             <a:extLst xmlns:a="http://schemas.openxmlformats.org/drawingml/2006/main">
               <a:ext uri="{FF2B5EF4-FFF2-40B4-BE49-F238E27FC236}">
-                <a16:creationId xmlns:a16="http://schemas.microsoft.com/office/drawing/2014/main" id="{04E61833-F88E-4106-9F6E-3E6453623BE3}"/>
+                <a16:creationId xmlns:a16="http://schemas.microsoft.com/office/drawing/2014/main" id="{9A62E902-B9A6-4BE4-8318-D4C4DF7B4570}"/>
               </a:ext>
             </a:extLst>
           </p:cNvPr>
@@ -3131,7 +3131,7 @@
           <p:cNvPr id="36" name="">
             <a:extLst xmlns:a="http://schemas.openxmlformats.org/drawingml/2006/main">
               <a:ext uri="{FF2B5EF4-FFF2-40B4-BE49-F238E27FC236}">
-                <a16:creationId xmlns:a16="http://schemas.microsoft.com/office/drawing/2014/main" id="{5F32C953-A3DC-478A-8C4F-8D6F69BCDA4B}"/>
+                <a16:creationId xmlns:a16="http://schemas.microsoft.com/office/drawing/2014/main" id="{D21FA11F-8FB7-4320-94C9-0C3055FE43CC}"/>
               </a:ext>
             </a:extLst>
           </p:cNvPr>
@@ -3195,7 +3195,7 @@
           <p:cNvPr id="37" name="">
             <a:extLst xmlns:a="http://schemas.openxmlformats.org/drawingml/2006/main">
               <a:ext uri="{FF2B5EF4-FFF2-40B4-BE49-F238E27FC236}">
-                <a16:creationId xmlns:a16="http://schemas.microsoft.com/office/drawing/2014/main" id="{D961ED90-8D52-455C-9FEC-4C1CDD73F2D6}"/>
+                <a16:creationId xmlns:a16="http://schemas.microsoft.com/office/drawing/2014/main" id="{5E160885-E888-46D1-AC71-241C55235967}"/>
               </a:ext>
             </a:extLst>
           </p:cNvPr>
@@ -3257,7 +3257,7 @@
     </p:spTree>
     <p:extLst>
       <p:ext uri="{BB962C8B-B14F-4D97-AF65-F5344CB8AC3E}">
-        <p14:creationId xmlns:p14="http://schemas.microsoft.com/office/powerpoint/2010/main" val="1585216762"/>
+        <p14:creationId xmlns:p14="http://schemas.microsoft.com/office/powerpoint/2010/main" val="997894032"/>
       </p:ext>
     </p:extLst>
   </p:cSld>
@@ -3281,7 +3281,7 @@
           <p:cNvPr id="1" name="">
             <a:extLst xmlns:a="http://schemas.openxmlformats.org/drawingml/2006/main">
               <a:ext uri="{FF2B5EF4-FFF2-40B4-BE49-F238E27FC236}">
-                <a16:creationId xmlns:a16="http://schemas.microsoft.com/office/drawing/2014/main" id="{4FB5A922-6FF3-43AA-A3B9-20AE641AEFC0}"/>
+                <a16:creationId xmlns:a16="http://schemas.microsoft.com/office/drawing/2014/main" id="{B569130C-6479-4E14-AC23-ECCD2D1A38B7}"/>
               </a:ext>
             </a:extLst>
           </p:cNvPr>
@@ -3316,7 +3316,7 @@
           <p:cNvPr id="2" name="">
             <a:extLst xmlns:a="http://schemas.openxmlformats.org/drawingml/2006/main">
               <a:ext uri="{FF2B5EF4-FFF2-40B4-BE49-F238E27FC236}">
-                <a16:creationId xmlns:a16="http://schemas.microsoft.com/office/drawing/2014/main" id="{7012AC61-239C-4362-B838-FA9D721B34BD}"/>
+                <a16:creationId xmlns:a16="http://schemas.microsoft.com/office/drawing/2014/main" id="{BAE15585-C1F8-4838-B27F-1EC36E5C7ED4}"/>
               </a:ext>
             </a:extLst>
           </p:cNvPr>
@@ -3380,7 +3380,7 @@
           <p:cNvPr id="3" name="">
             <a:extLst xmlns:a="http://schemas.openxmlformats.org/drawingml/2006/main">
               <a:ext uri="{FF2B5EF4-FFF2-40B4-BE49-F238E27FC236}">
-                <a16:creationId xmlns:a16="http://schemas.microsoft.com/office/drawing/2014/main" id="{DCA0DD0D-A622-4EAD-A379-5FE9AC2C5528}"/>
+                <a16:creationId xmlns:a16="http://schemas.microsoft.com/office/drawing/2014/main" id="{A099BD19-E2CA-440C-BFE2-7595B993FE37}"/>
               </a:ext>
             </a:extLst>
           </p:cNvPr>
@@ -3444,7 +3444,7 @@
           <p:cNvPr id="4" name="">
             <a:extLst xmlns:a="http://schemas.openxmlformats.org/drawingml/2006/main">
               <a:ext uri="{FF2B5EF4-FFF2-40B4-BE49-F238E27FC236}">
-                <a16:creationId xmlns:a16="http://schemas.microsoft.com/office/drawing/2014/main" id="{518CFADF-F71B-485B-85AA-B0D9310C4FC6}"/>
+                <a16:creationId xmlns:a16="http://schemas.microsoft.com/office/drawing/2014/main" id="{BFBD749A-07CF-48D9-9CA2-B3937962F9D9}"/>
               </a:ext>
             </a:extLst>
           </p:cNvPr>
@@ -3477,7 +3477,7 @@
           <p:cNvPr id="5" name="">
             <a:extLst xmlns:a="http://schemas.openxmlformats.org/drawingml/2006/main">
               <a:ext uri="{FF2B5EF4-FFF2-40B4-BE49-F238E27FC236}">
-                <a16:creationId xmlns:a16="http://schemas.microsoft.com/office/drawing/2014/main" id="{65A5F7E9-0B03-48C0-BB16-A190F1962B4E}"/>
+                <a16:creationId xmlns:a16="http://schemas.microsoft.com/office/drawing/2014/main" id="{C9F46658-F376-4685-AD83-D89F57D299CC}"/>
               </a:ext>
             </a:extLst>
           </p:cNvPr>
@@ -3510,7 +3510,7 @@
           <p:cNvPr id="6" name="">
             <a:extLst xmlns:a="http://schemas.openxmlformats.org/drawingml/2006/main">
               <a:ext uri="{FF2B5EF4-FFF2-40B4-BE49-F238E27FC236}">
-                <a16:creationId xmlns:a16="http://schemas.microsoft.com/office/drawing/2014/main" id="{FD38AEBC-7244-4EFC-90C2-5712C0AD54EE}"/>
+                <a16:creationId xmlns:a16="http://schemas.microsoft.com/office/drawing/2014/main" id="{6D30E776-1FCA-4A2B-858B-D4BEA855B06D}"/>
               </a:ext>
             </a:extLst>
           </p:cNvPr>
@@ -3597,7 +3597,7 @@
           <p:cNvPr id="7" name="">
             <a:extLst xmlns:a="http://schemas.openxmlformats.org/drawingml/2006/main">
               <a:ext uri="{FF2B5EF4-FFF2-40B4-BE49-F238E27FC236}">
-                <a16:creationId xmlns:a16="http://schemas.microsoft.com/office/drawing/2014/main" id="{318807C8-616D-4FBE-927D-0CDCE1C4AF60}"/>
+                <a16:creationId xmlns:a16="http://schemas.microsoft.com/office/drawing/2014/main" id="{9993B08E-83E5-4D1D-B210-2B6862BEF2D3}"/>
               </a:ext>
             </a:extLst>
           </p:cNvPr>
@@ -3630,7 +3630,7 @@
           <p:cNvPr id="8" name="">
             <a:extLst xmlns:a="http://schemas.openxmlformats.org/drawingml/2006/main">
               <a:ext uri="{FF2B5EF4-FFF2-40B4-BE49-F238E27FC236}">
-                <a16:creationId xmlns:a16="http://schemas.microsoft.com/office/drawing/2014/main" id="{21E9C8CC-754E-41CA-8002-7D8ABFCF6E57}"/>
+                <a16:creationId xmlns:a16="http://schemas.microsoft.com/office/drawing/2014/main" id="{0B264248-7D7F-4624-95E1-68BDA1A06D42}"/>
               </a:ext>
             </a:extLst>
           </p:cNvPr>
@@ -3663,7 +3663,7 @@
           <p:cNvPr id="9" name="">
             <a:extLst xmlns:a="http://schemas.openxmlformats.org/drawingml/2006/main">
               <a:ext uri="{FF2B5EF4-FFF2-40B4-BE49-F238E27FC236}">
-                <a16:creationId xmlns:a16="http://schemas.microsoft.com/office/drawing/2014/main" id="{DDC6421E-C88A-4328-9B75-DD2CA4AA12E0}"/>
+                <a16:creationId xmlns:a16="http://schemas.microsoft.com/office/drawing/2014/main" id="{F488476A-748A-43FE-A9D2-5E27BD6F3C67}"/>
               </a:ext>
             </a:extLst>
           </p:cNvPr>
@@ -3696,7 +3696,7 @@
           <p:cNvPr id="10" name="">
             <a:extLst xmlns:a="http://schemas.openxmlformats.org/drawingml/2006/main">
               <a:ext uri="{FF2B5EF4-FFF2-40B4-BE49-F238E27FC236}">
-                <a16:creationId xmlns:a16="http://schemas.microsoft.com/office/drawing/2014/main" id="{EB1C4CF7-F6C3-4B03-897F-86A1FAB4D825}"/>
+                <a16:creationId xmlns:a16="http://schemas.microsoft.com/office/drawing/2014/main" id="{52819943-AB20-4355-9E76-0EF4950AA07F}"/>
               </a:ext>
             </a:extLst>
           </p:cNvPr>
@@ -3806,7 +3806,7 @@
           <p:cNvPr id="11" name="">
             <a:extLst xmlns:a="http://schemas.openxmlformats.org/drawingml/2006/main">
               <a:ext uri="{FF2B5EF4-FFF2-40B4-BE49-F238E27FC236}">
-                <a16:creationId xmlns:a16="http://schemas.microsoft.com/office/drawing/2014/main" id="{1DEC74AC-5A96-4186-9FE6-1D73A82E1B79}"/>
+                <a16:creationId xmlns:a16="http://schemas.microsoft.com/office/drawing/2014/main" id="{C10A18D0-F574-47F5-B927-2FEDCA170F42}"/>
               </a:ext>
             </a:extLst>
           </p:cNvPr>
@@ -3839,7 +3839,7 @@
           <p:cNvPr id="12" name="">
             <a:extLst xmlns:a="http://schemas.openxmlformats.org/drawingml/2006/main">
               <a:ext uri="{FF2B5EF4-FFF2-40B4-BE49-F238E27FC236}">
-                <a16:creationId xmlns:a16="http://schemas.microsoft.com/office/drawing/2014/main" id="{F43ECA54-A6EA-4481-B87B-044043AD9290}"/>
+                <a16:creationId xmlns:a16="http://schemas.microsoft.com/office/drawing/2014/main" id="{2634FA0A-5C29-4918-9C56-510BA6DEF28A}"/>
               </a:ext>
             </a:extLst>
           </p:cNvPr>
@@ -3949,7 +3949,7 @@
           <p:cNvPr id="13" name="">
             <a:extLst xmlns:a="http://schemas.openxmlformats.org/drawingml/2006/main">
               <a:ext uri="{FF2B5EF4-FFF2-40B4-BE49-F238E27FC236}">
-                <a16:creationId xmlns:a16="http://schemas.microsoft.com/office/drawing/2014/main" id="{35174082-7DA2-49BF-AB1E-322FF5441965}"/>
+                <a16:creationId xmlns:a16="http://schemas.microsoft.com/office/drawing/2014/main" id="{E30964D6-2CD5-4107-AC01-2214763C1FDA}"/>
               </a:ext>
             </a:extLst>
           </p:cNvPr>
@@ -3982,7 +3982,7 @@
           <p:cNvPr id="14" name="">
             <a:extLst xmlns:a="http://schemas.openxmlformats.org/drawingml/2006/main">
               <a:ext uri="{FF2B5EF4-FFF2-40B4-BE49-F238E27FC236}">
-                <a16:creationId xmlns:a16="http://schemas.microsoft.com/office/drawing/2014/main" id="{67D51B02-74BE-4943-A1CE-3EEF5A0BFD9A}"/>
+                <a16:creationId xmlns:a16="http://schemas.microsoft.com/office/drawing/2014/main" id="{D62901C0-8AC5-4E3A-86E4-5001F3AB8A08}"/>
               </a:ext>
             </a:extLst>
           </p:cNvPr>
@@ -4092,7 +4092,7 @@
           <p:cNvPr id="15" name="">
             <a:extLst xmlns:a="http://schemas.openxmlformats.org/drawingml/2006/main">
               <a:ext uri="{FF2B5EF4-FFF2-40B4-BE49-F238E27FC236}">
-                <a16:creationId xmlns:a16="http://schemas.microsoft.com/office/drawing/2014/main" id="{18B63CFE-4C76-43FE-9BC3-E8718A999AB0}"/>
+                <a16:creationId xmlns:a16="http://schemas.microsoft.com/office/drawing/2014/main" id="{533FAFD4-1354-4981-BD5F-3BEAB2161BBD}"/>
               </a:ext>
             </a:extLst>
           </p:cNvPr>
@@ -4125,7 +4125,7 @@
           <p:cNvPr id="16" name="">
             <a:extLst xmlns:a="http://schemas.openxmlformats.org/drawingml/2006/main">
               <a:ext uri="{FF2B5EF4-FFF2-40B4-BE49-F238E27FC236}">
-                <a16:creationId xmlns:a16="http://schemas.microsoft.com/office/drawing/2014/main" id="{9F8E2EF3-2B3B-404B-9BA8-574A4E7B3FA6}"/>
+                <a16:creationId xmlns:a16="http://schemas.microsoft.com/office/drawing/2014/main" id="{368AE33E-B6B0-4223-8951-FD6F21C02095}"/>
               </a:ext>
             </a:extLst>
           </p:cNvPr>
@@ -4158,7 +4158,7 @@
           <p:cNvPr id="17" name="">
             <a:extLst xmlns:a="http://schemas.openxmlformats.org/drawingml/2006/main">
               <a:ext uri="{FF2B5EF4-FFF2-40B4-BE49-F238E27FC236}">
-                <a16:creationId xmlns:a16="http://schemas.microsoft.com/office/drawing/2014/main" id="{BC21E6A4-6DEF-479E-9589-E1F65E39B84C}"/>
+                <a16:creationId xmlns:a16="http://schemas.microsoft.com/office/drawing/2014/main" id="{E1411FDE-3B23-47DB-B5BD-4CEAA8A6E61D}"/>
               </a:ext>
             </a:extLst>
           </p:cNvPr>
@@ -4191,7 +4191,7 @@
           <p:cNvPr id="18" name="">
             <a:extLst xmlns:a="http://schemas.openxmlformats.org/drawingml/2006/main">
               <a:ext uri="{FF2B5EF4-FFF2-40B4-BE49-F238E27FC236}">
-                <a16:creationId xmlns:a16="http://schemas.microsoft.com/office/drawing/2014/main" id="{3597AA84-8DBF-4FE8-AD76-426FCC86AC05}"/>
+                <a16:creationId xmlns:a16="http://schemas.microsoft.com/office/drawing/2014/main" id="{843121AE-E59D-412C-8D22-6FB32487E665}"/>
               </a:ext>
             </a:extLst>
           </p:cNvPr>
@@ -4255,7 +4255,7 @@
           <p:cNvPr id="19" name="">
             <a:extLst xmlns:a="http://schemas.openxmlformats.org/drawingml/2006/main">
               <a:ext uri="{FF2B5EF4-FFF2-40B4-BE49-F238E27FC236}">
-                <a16:creationId xmlns:a16="http://schemas.microsoft.com/office/drawing/2014/main" id="{661030AA-3C6D-4233-9190-C457CF73D531}"/>
+                <a16:creationId xmlns:a16="http://schemas.microsoft.com/office/drawing/2014/main" id="{7854C59F-5F83-4073-B6A1-6654323F2814}"/>
               </a:ext>
             </a:extLst>
           </p:cNvPr>
@@ -4319,7 +4319,7 @@
           <p:cNvPr id="20" name="">
             <a:extLst xmlns:a="http://schemas.openxmlformats.org/drawingml/2006/main">
               <a:ext uri="{FF2B5EF4-FFF2-40B4-BE49-F238E27FC236}">
-                <a16:creationId xmlns:a16="http://schemas.microsoft.com/office/drawing/2014/main" id="{CBD4C642-5F89-4762-8F7C-DF263605ED79}"/>
+                <a16:creationId xmlns:a16="http://schemas.microsoft.com/office/drawing/2014/main" id="{9853CDDD-ABBE-4136-96BF-4A8FCA6C70D8}"/>
               </a:ext>
             </a:extLst>
           </p:cNvPr>
@@ -4383,7 +4383,7 @@
           <p:cNvPr id="21" name="">
             <a:extLst xmlns:a="http://schemas.openxmlformats.org/drawingml/2006/main">
               <a:ext uri="{FF2B5EF4-FFF2-40B4-BE49-F238E27FC236}">
-                <a16:creationId xmlns:a16="http://schemas.microsoft.com/office/drawing/2014/main" id="{0A19A1C8-DF4F-471C-B5D0-6F1835ECBCA1}"/>
+                <a16:creationId xmlns:a16="http://schemas.microsoft.com/office/drawing/2014/main" id="{E65C6805-83B3-4B3B-8A06-C48BB0792AA3}"/>
               </a:ext>
             </a:extLst>
           </p:cNvPr>
@@ -4445,7 +4445,7 @@
     </p:spTree>
     <p:extLst>
       <p:ext uri="{BB962C8B-B14F-4D97-AF65-F5344CB8AC3E}">
-        <p14:creationId xmlns:p14="http://schemas.microsoft.com/office/powerpoint/2010/main" val="130070484"/>
+        <p14:creationId xmlns:p14="http://schemas.microsoft.com/office/powerpoint/2010/main" val="2060172494"/>
       </p:ext>
     </p:extLst>
   </p:cSld>
@@ -4469,7 +4469,7 @@
           <p:cNvPr id="1" name="">
             <a:extLst xmlns:a="http://schemas.openxmlformats.org/drawingml/2006/main">
               <a:ext uri="{FF2B5EF4-FFF2-40B4-BE49-F238E27FC236}">
-                <a16:creationId xmlns:a16="http://schemas.microsoft.com/office/drawing/2014/main" id="{18DA02E9-77D1-471A-A359-2EBDFE5558CD}"/>
+                <a16:creationId xmlns:a16="http://schemas.microsoft.com/office/drawing/2014/main" id="{F9916FED-2C5D-4447-ADA3-6D781EA351BB}"/>
               </a:ext>
             </a:extLst>
           </p:cNvPr>
@@ -4504,7 +4504,7 @@
           <p:cNvPr id="2" name="">
             <a:extLst xmlns:a="http://schemas.openxmlformats.org/drawingml/2006/main">
               <a:ext uri="{FF2B5EF4-FFF2-40B4-BE49-F238E27FC236}">
-                <a16:creationId xmlns:a16="http://schemas.microsoft.com/office/drawing/2014/main" id="{1F87FC43-D057-4AE8-B625-90EBABAF22D5}"/>
+                <a16:creationId xmlns:a16="http://schemas.microsoft.com/office/drawing/2014/main" id="{3D3CC32B-5605-444A-AE2D-41E7EC33911A}"/>
               </a:ext>
             </a:extLst>
           </p:cNvPr>
@@ -4568,7 +4568,7 @@
           <p:cNvPr id="3" name="">
             <a:extLst xmlns:a="http://schemas.openxmlformats.org/drawingml/2006/main">
               <a:ext uri="{FF2B5EF4-FFF2-40B4-BE49-F238E27FC236}">
-                <a16:creationId xmlns:a16="http://schemas.microsoft.com/office/drawing/2014/main" id="{5796422F-2BAA-4DE4-B065-B6F184AB1F40}"/>
+                <a16:creationId xmlns:a16="http://schemas.microsoft.com/office/drawing/2014/main" id="{3CD420F1-DB90-4A25-8CAA-70CB4EC42F8F}"/>
               </a:ext>
             </a:extLst>
           </p:cNvPr>
@@ -4632,7 +4632,7 @@
           <p:cNvPr id="4" name="">
             <a:extLst xmlns:a="http://schemas.openxmlformats.org/drawingml/2006/main">
               <a:ext uri="{FF2B5EF4-FFF2-40B4-BE49-F238E27FC236}">
-                <a16:creationId xmlns:a16="http://schemas.microsoft.com/office/drawing/2014/main" id="{AA2A8ED3-C3DF-4F25-9DC9-8A6B96DE0549}"/>
+                <a16:creationId xmlns:a16="http://schemas.microsoft.com/office/drawing/2014/main" id="{A3BCC846-724F-484B-B993-B31CF2AB144C}"/>
               </a:ext>
             </a:extLst>
           </p:cNvPr>
@@ -4665,7 +4665,7 @@
           <p:cNvPr id="5" name="">
             <a:extLst xmlns:a="http://schemas.openxmlformats.org/drawingml/2006/main">
               <a:ext uri="{FF2B5EF4-FFF2-40B4-BE49-F238E27FC236}">
-                <a16:creationId xmlns:a16="http://schemas.microsoft.com/office/drawing/2014/main" id="{749D24CB-E3FA-4422-A043-68BB11EC1833}"/>
+                <a16:creationId xmlns:a16="http://schemas.microsoft.com/office/drawing/2014/main" id="{9B9B00ED-E056-4EE8-A555-844B0F937D87}"/>
               </a:ext>
             </a:extLst>
           </p:cNvPr>
@@ -4698,7 +4698,7 @@
           <p:cNvPr id="6" name="">
             <a:extLst xmlns:a="http://schemas.openxmlformats.org/drawingml/2006/main">
               <a:ext uri="{FF2B5EF4-FFF2-40B4-BE49-F238E27FC236}">
-                <a16:creationId xmlns:a16="http://schemas.microsoft.com/office/drawing/2014/main" id="{DE2BF2F7-EC63-44F4-8FD8-BAB878BC8D31}"/>
+                <a16:creationId xmlns:a16="http://schemas.microsoft.com/office/drawing/2014/main" id="{CBD39A93-89CB-49D4-96F0-AE3A67B26A68}"/>
               </a:ext>
             </a:extLst>
           </p:cNvPr>
@@ -4808,7 +4808,7 @@
           <p:cNvPr id="7" name="">
             <a:extLst xmlns:a="http://schemas.openxmlformats.org/drawingml/2006/main">
               <a:ext uri="{FF2B5EF4-FFF2-40B4-BE49-F238E27FC236}">
-                <a16:creationId xmlns:a16="http://schemas.microsoft.com/office/drawing/2014/main" id="{046A24C3-D0B8-489F-82F1-D8276CD1CC4A}"/>
+                <a16:creationId xmlns:a16="http://schemas.microsoft.com/office/drawing/2014/main" id="{B7F0CBB3-D31A-41E6-BB9F-8B3F4E37A63B}"/>
               </a:ext>
             </a:extLst>
           </p:cNvPr>
@@ -4841,7 +4841,7 @@
           <p:cNvPr id="8" name="">
             <a:extLst xmlns:a="http://schemas.openxmlformats.org/drawingml/2006/main">
               <a:ext uri="{FF2B5EF4-FFF2-40B4-BE49-F238E27FC236}">
-                <a16:creationId xmlns:a16="http://schemas.microsoft.com/office/drawing/2014/main" id="{EB16BBC2-87A8-4F26-9113-6CB693A00224}"/>
+                <a16:creationId xmlns:a16="http://schemas.microsoft.com/office/drawing/2014/main" id="{D4CB400E-AF9E-449D-908D-8881FEA88E69}"/>
               </a:ext>
             </a:extLst>
           </p:cNvPr>
@@ -4874,7 +4874,7 @@
           <p:cNvPr id="9" name="">
             <a:extLst xmlns:a="http://schemas.openxmlformats.org/drawingml/2006/main">
               <a:ext uri="{FF2B5EF4-FFF2-40B4-BE49-F238E27FC236}">
-                <a16:creationId xmlns:a16="http://schemas.microsoft.com/office/drawing/2014/main" id="{7A527BA3-6A54-4F42-AD46-D6B3EA541B35}"/>
+                <a16:creationId xmlns:a16="http://schemas.microsoft.com/office/drawing/2014/main" id="{E0506647-BC38-423F-A45F-66E810FDBC34}"/>
               </a:ext>
             </a:extLst>
           </p:cNvPr>
@@ -4907,7 +4907,7 @@
           <p:cNvPr id="10" name="">
             <a:extLst xmlns:a="http://schemas.openxmlformats.org/drawingml/2006/main">
               <a:ext uri="{FF2B5EF4-FFF2-40B4-BE49-F238E27FC236}">
-                <a16:creationId xmlns:a16="http://schemas.microsoft.com/office/drawing/2014/main" id="{4F2F7F4D-584D-4DDA-A248-1F6D8048316F}"/>
+                <a16:creationId xmlns:a16="http://schemas.microsoft.com/office/drawing/2014/main" id="{66F1A44C-32A3-4149-82C6-3BE58402AE56}"/>
               </a:ext>
             </a:extLst>
           </p:cNvPr>
@@ -5017,7 +5017,7 @@
           <p:cNvPr id="11" name="">
             <a:extLst xmlns:a="http://schemas.openxmlformats.org/drawingml/2006/main">
               <a:ext uri="{FF2B5EF4-FFF2-40B4-BE49-F238E27FC236}">
-                <a16:creationId xmlns:a16="http://schemas.microsoft.com/office/drawing/2014/main" id="{3B9C4FA5-6678-4CD9-B68A-7CB5269D5FBC}"/>
+                <a16:creationId xmlns:a16="http://schemas.microsoft.com/office/drawing/2014/main" id="{1AC752D0-3C8A-4740-AFD8-73616754EB0B}"/>
               </a:ext>
             </a:extLst>
           </p:cNvPr>
@@ -5050,7 +5050,7 @@
           <p:cNvPr id="12" name="">
             <a:extLst xmlns:a="http://schemas.openxmlformats.org/drawingml/2006/main">
               <a:ext uri="{FF2B5EF4-FFF2-40B4-BE49-F238E27FC236}">
-                <a16:creationId xmlns:a16="http://schemas.microsoft.com/office/drawing/2014/main" id="{764BE79D-77A3-4000-AC14-B90490C5B44F}"/>
+                <a16:creationId xmlns:a16="http://schemas.microsoft.com/office/drawing/2014/main" id="{379A3B7E-32CF-4912-941B-721E28756E8E}"/>
               </a:ext>
             </a:extLst>
           </p:cNvPr>
@@ -5083,7 +5083,7 @@
           <p:cNvPr id="13" name="">
             <a:extLst xmlns:a="http://schemas.openxmlformats.org/drawingml/2006/main">
               <a:ext uri="{FF2B5EF4-FFF2-40B4-BE49-F238E27FC236}">
-                <a16:creationId xmlns:a16="http://schemas.microsoft.com/office/drawing/2014/main" id="{E2442FBE-BEAA-4A1D-BBCC-C5C1B409A26A}"/>
+                <a16:creationId xmlns:a16="http://schemas.microsoft.com/office/drawing/2014/main" id="{FAADC5D1-DFCA-49C5-8B83-8A5E0C237F99}"/>
               </a:ext>
             </a:extLst>
           </p:cNvPr>
@@ -5116,7 +5116,7 @@
           <p:cNvPr id="14" name="">
             <a:extLst xmlns:a="http://schemas.openxmlformats.org/drawingml/2006/main">
               <a:ext uri="{FF2B5EF4-FFF2-40B4-BE49-F238E27FC236}">
-                <a16:creationId xmlns:a16="http://schemas.microsoft.com/office/drawing/2014/main" id="{2428E45C-6BC8-4E97-B886-B0FEA7DE5D5B}"/>
+                <a16:creationId xmlns:a16="http://schemas.microsoft.com/office/drawing/2014/main" id="{BDC414D6-18A3-4DDE-AD8A-03F48B7854AD}"/>
               </a:ext>
             </a:extLst>
           </p:cNvPr>
@@ -5226,7 +5226,7 @@
           <p:cNvPr id="15" name="">
             <a:extLst xmlns:a="http://schemas.openxmlformats.org/drawingml/2006/main">
               <a:ext uri="{FF2B5EF4-FFF2-40B4-BE49-F238E27FC236}">
-                <a16:creationId xmlns:a16="http://schemas.microsoft.com/office/drawing/2014/main" id="{D665503B-3035-46B8-B313-E963BF5EDE74}"/>
+                <a16:creationId xmlns:a16="http://schemas.microsoft.com/office/drawing/2014/main" id="{C33D1472-8716-429F-AB9E-A2DB35B1805B}"/>
               </a:ext>
             </a:extLst>
           </p:cNvPr>
@@ -5259,7 +5259,7 @@
           <p:cNvPr id="16" name="">
             <a:extLst xmlns:a="http://schemas.openxmlformats.org/drawingml/2006/main">
               <a:ext uri="{FF2B5EF4-FFF2-40B4-BE49-F238E27FC236}">
-                <a16:creationId xmlns:a16="http://schemas.microsoft.com/office/drawing/2014/main" id="{6D8AB5EF-7C54-4666-A872-5D969B430093}"/>
+                <a16:creationId xmlns:a16="http://schemas.microsoft.com/office/drawing/2014/main" id="{776F2551-1F86-4143-8095-E5F95F522C44}"/>
               </a:ext>
             </a:extLst>
           </p:cNvPr>
@@ -5292,7 +5292,7 @@
           <p:cNvPr id="17" name="">
             <a:extLst xmlns:a="http://schemas.openxmlformats.org/drawingml/2006/main">
               <a:ext uri="{FF2B5EF4-FFF2-40B4-BE49-F238E27FC236}">
-                <a16:creationId xmlns:a16="http://schemas.microsoft.com/office/drawing/2014/main" id="{55CCA771-BABF-4D84-9504-603EE357DC78}"/>
+                <a16:creationId xmlns:a16="http://schemas.microsoft.com/office/drawing/2014/main" id="{6519BFA2-7674-4635-BF45-FE88A77CA7CF}"/>
               </a:ext>
             </a:extLst>
           </p:cNvPr>
@@ -5325,7 +5325,7 @@
           <p:cNvPr id="18" name="">
             <a:extLst xmlns:a="http://schemas.openxmlformats.org/drawingml/2006/main">
               <a:ext uri="{FF2B5EF4-FFF2-40B4-BE49-F238E27FC236}">
-                <a16:creationId xmlns:a16="http://schemas.microsoft.com/office/drawing/2014/main" id="{9FC0CCE3-79AC-4091-87C5-90514067FE5A}"/>
+                <a16:creationId xmlns:a16="http://schemas.microsoft.com/office/drawing/2014/main" id="{1883CC94-8F09-4F66-958A-5B2AAABE2EC4}"/>
               </a:ext>
             </a:extLst>
           </p:cNvPr>
@@ -5435,7 +5435,7 @@
           <p:cNvPr id="19" name="">
             <a:extLst xmlns:a="http://schemas.openxmlformats.org/drawingml/2006/main">
               <a:ext uri="{FF2B5EF4-FFF2-40B4-BE49-F238E27FC236}">
-                <a16:creationId xmlns:a16="http://schemas.microsoft.com/office/drawing/2014/main" id="{DE58535F-0D16-4FFB-92D2-88A7D6AD2612}"/>
+                <a16:creationId xmlns:a16="http://schemas.microsoft.com/office/drawing/2014/main" id="{BC4C55E1-776A-4296-8CD6-4941372CC978}"/>
               </a:ext>
             </a:extLst>
           </p:cNvPr>
@@ -5468,7 +5468,7 @@
           <p:cNvPr id="20" name="">
             <a:extLst xmlns:a="http://schemas.openxmlformats.org/drawingml/2006/main">
               <a:ext uri="{FF2B5EF4-FFF2-40B4-BE49-F238E27FC236}">
-                <a16:creationId xmlns:a16="http://schemas.microsoft.com/office/drawing/2014/main" id="{2FD3C066-3625-457B-95BC-9B518A077477}"/>
+                <a16:creationId xmlns:a16="http://schemas.microsoft.com/office/drawing/2014/main" id="{193793EB-B9A2-49B3-A696-29508C778B53}"/>
               </a:ext>
             </a:extLst>
           </p:cNvPr>
@@ -5532,7 +5532,7 @@
           <p:cNvPr id="21" name="">
             <a:extLst xmlns:a="http://schemas.openxmlformats.org/drawingml/2006/main">
               <a:ext uri="{FF2B5EF4-FFF2-40B4-BE49-F238E27FC236}">
-                <a16:creationId xmlns:a16="http://schemas.microsoft.com/office/drawing/2014/main" id="{A9F0F989-9599-4A97-9AC3-F330C0BD7F63}"/>
+                <a16:creationId xmlns:a16="http://schemas.microsoft.com/office/drawing/2014/main" id="{6CB8B192-D692-41C3-9937-A54F5ABEBF62}"/>
               </a:ext>
             </a:extLst>
           </p:cNvPr>
@@ -5596,7 +5596,7 @@
           <p:cNvPr id="22" name="">
             <a:extLst xmlns:a="http://schemas.openxmlformats.org/drawingml/2006/main">
               <a:ext uri="{FF2B5EF4-FFF2-40B4-BE49-F238E27FC236}">
-                <a16:creationId xmlns:a16="http://schemas.microsoft.com/office/drawing/2014/main" id="{3BFD46B9-03FE-417D-883B-E9884BCB8B42}"/>
+                <a16:creationId xmlns:a16="http://schemas.microsoft.com/office/drawing/2014/main" id="{4D90D22D-AFD3-4948-B0C6-F54B0E1CFA4E}"/>
               </a:ext>
             </a:extLst>
           </p:cNvPr>
@@ -5658,7 +5658,7 @@
     </p:spTree>
     <p:extLst>
       <p:ext uri="{BB962C8B-B14F-4D97-AF65-F5344CB8AC3E}">
-        <p14:creationId xmlns:p14="http://schemas.microsoft.com/office/powerpoint/2010/main" val="1670838643"/>
+        <p14:creationId xmlns:p14="http://schemas.microsoft.com/office/powerpoint/2010/main" val="66494852"/>
       </p:ext>
     </p:extLst>
   </p:cSld>
@@ -5682,7 +5682,7 @@
           <p:cNvPr id="1" name="">
             <a:extLst xmlns:a="http://schemas.openxmlformats.org/drawingml/2006/main">
               <a:ext uri="{FF2B5EF4-FFF2-40B4-BE49-F238E27FC236}">
-                <a16:creationId xmlns:a16="http://schemas.microsoft.com/office/drawing/2014/main" id="{EBD87134-5369-466D-9C44-E863758F2E61}"/>
+                <a16:creationId xmlns:a16="http://schemas.microsoft.com/office/drawing/2014/main" id="{339FCA34-4B92-46FE-9BFF-73BBB89C40D0}"/>
               </a:ext>
             </a:extLst>
           </p:cNvPr>
@@ -5717,7 +5717,7 @@
           <p:cNvPr id="2" name="">
             <a:extLst xmlns:a="http://schemas.openxmlformats.org/drawingml/2006/main">
               <a:ext uri="{FF2B5EF4-FFF2-40B4-BE49-F238E27FC236}">
-                <a16:creationId xmlns:a16="http://schemas.microsoft.com/office/drawing/2014/main" id="{59BD7EE4-A39D-4E48-9D2F-F5641604532E}"/>
+                <a16:creationId xmlns:a16="http://schemas.microsoft.com/office/drawing/2014/main" id="{566F3795-3AA2-4FA7-A1D0-1A1B2CF61678}"/>
               </a:ext>
             </a:extLst>
           </p:cNvPr>
@@ -5771,7 +5771,7 @@
                 <a:ea typeface="Aptos Display"/>
                 <a:cs typeface="Aptos Display"/>
               </a:rPr>
-              <a:t>We evaluate for hidden-family behavior, not just self-eval fit</a:t>
+              <a:t>What makes a process family different?</a:t>
             </a:r>
           </a:p>
         </p:txBody>
@@ -5781,7 +5781,7 @@
           <p:cNvPr id="3" name="">
             <a:extLst xmlns:a="http://schemas.openxmlformats.org/drawingml/2006/main">
               <a:ext uri="{FF2B5EF4-FFF2-40B4-BE49-F238E27FC236}">
-                <a16:creationId xmlns:a16="http://schemas.microsoft.com/office/drawing/2014/main" id="{85BA5F31-9182-4ADE-9BEA-395CDC24E8B3}"/>
+                <a16:creationId xmlns:a16="http://schemas.microsoft.com/office/drawing/2014/main" id="{246E5528-5F0F-47B6-B6B0-9B6C477033F8}"/>
               </a:ext>
             </a:extLst>
           </p:cNvPr>
@@ -5835,7 +5835,7 @@
                 <a:ea typeface="Aptos"/>
                 <a:cs typeface="Aptos"/>
               </a:rPr>
-              <a:t>The final decision protocol is train on 12 families and report the average over 3 unseen families.</a:t>
+              <a:t>Same vocabulary, different valid process routes. That is what makes the OOD test meaningful.</a:t>
             </a:r>
           </a:p>
         </p:txBody>
@@ -5845,7 +5845,7 @@
           <p:cNvPr id="4" name="">
             <a:extLst xmlns:a="http://schemas.openxmlformats.org/drawingml/2006/main">
               <a:ext uri="{FF2B5EF4-FFF2-40B4-BE49-F238E27FC236}">
-                <a16:creationId xmlns:a16="http://schemas.microsoft.com/office/drawing/2014/main" id="{92432DFC-A0D3-4027-B96D-B22ED0E03C84}"/>
+                <a16:creationId xmlns:a16="http://schemas.microsoft.com/office/drawing/2014/main" id="{E9A020D2-6588-4D08-A490-606FBAB33E1E}"/>
               </a:ext>
             </a:extLst>
           </p:cNvPr>
@@ -5878,25 +5878,25 @@
           <p:cNvPr id="5" name="">
             <a:extLst xmlns:a="http://schemas.openxmlformats.org/drawingml/2006/main">
               <a:ext uri="{FF2B5EF4-FFF2-40B4-BE49-F238E27FC236}">
-                <a16:creationId xmlns:a16="http://schemas.microsoft.com/office/drawing/2014/main" id="{BCB9C78A-5AB2-4769-B137-A1280388545D}"/>
-              </a:ext>
-            </a:extLst>
-          </p:cNvPr>
-          <p:cNvSpPr>
-            <a:spLocks xmlns:a="http://schemas.openxmlformats.org/drawingml/2006/main" noGrp="1"/>
-          </p:cNvSpPr>
-          <p:nvPr/>
-        </p:nvSpPr>
-        <p:spPr>
-          <a:xfrm xmlns:a="http://schemas.openxmlformats.org/drawingml/2006/main">
-            <a:off x="666750" y="2190750"/>
-            <a:ext cx="2333625" cy="876300"/>
-          </a:xfrm>
-          <a:prstGeom xmlns:a="http://schemas.openxmlformats.org/drawingml/2006/main" prst="rect">
-            <a:avLst/>
-          </a:prstGeom>
-          <a:solidFill xmlns:a="http://schemas.openxmlformats.org/drawingml/2006/main">
-            <a:srgbClr val="FFFFFF"/>
+                <a16:creationId xmlns:a16="http://schemas.microsoft.com/office/drawing/2014/main" id="{50F34079-91EE-4EC9-968E-5C46E30781E3}"/>
+              </a:ext>
+            </a:extLst>
+          </p:cNvPr>
+          <p:cNvSpPr>
+            <a:spLocks xmlns:a="http://schemas.openxmlformats.org/drawingml/2006/main" noGrp="1"/>
+          </p:cNvSpPr>
+          <p:nvPr/>
+        </p:nvSpPr>
+        <p:spPr>
+          <a:xfrm xmlns:a="http://schemas.openxmlformats.org/drawingml/2006/main">
+            <a:off x="666750" y="1524000"/>
+            <a:ext cx="2381250" cy="971550"/>
+          </a:xfrm>
+          <a:prstGeom xmlns:a="http://schemas.openxmlformats.org/drawingml/2006/main" prst="rect">
+            <a:avLst/>
+          </a:prstGeom>
+          <a:solidFill xmlns:a="http://schemas.openxmlformats.org/drawingml/2006/main">
+            <a:srgbClr val="DCEAFE"/>
           </a:solidFill>
           <a:ln xmlns:a="http://schemas.openxmlformats.org/drawingml/2006/main" w="9525">
             <a:solidFill>
@@ -5911,19 +5911,19 @@
           <p:cNvPr id="6" name="">
             <a:extLst xmlns:a="http://schemas.openxmlformats.org/drawingml/2006/main">
               <a:ext uri="{FF2B5EF4-FFF2-40B4-BE49-F238E27FC236}">
-                <a16:creationId xmlns:a16="http://schemas.microsoft.com/office/drawing/2014/main" id="{13AC3C00-C3CE-4F01-B011-14505DDFE039}"/>
-              </a:ext>
-            </a:extLst>
-          </p:cNvPr>
-          <p:cNvSpPr>
-            <a:spLocks xmlns:a="http://schemas.openxmlformats.org/drawingml/2006/main" noGrp="1"/>
-          </p:cNvSpPr>
-          <p:nvPr/>
-        </p:nvSpPr>
-        <p:spPr>
-          <a:xfrm xmlns:a="http://schemas.openxmlformats.org/drawingml/2006/main">
-            <a:off x="819150" y="2324100"/>
-            <a:ext cx="2028825" cy="609600"/>
+                <a16:creationId xmlns:a16="http://schemas.microsoft.com/office/drawing/2014/main" id="{56A60C9B-2BA1-4D2C-952C-7E5C30DC6D65}"/>
+              </a:ext>
+            </a:extLst>
+          </p:cNvPr>
+          <p:cNvSpPr>
+            <a:spLocks xmlns:a="http://schemas.openxmlformats.org/drawingml/2006/main" noGrp="1"/>
+          </p:cNvSpPr>
+          <p:nvPr/>
+        </p:nvSpPr>
+        <p:spPr>
+          <a:xfrm xmlns:a="http://schemas.openxmlformats.org/drawingml/2006/main">
+            <a:off x="819150" y="1657350"/>
+            <a:ext cx="2076450" cy="228600"/>
           </a:xfrm>
           <a:prstGeom xmlns:a="http://schemas.openxmlformats.org/drawingml/2006/main" prst="rect">
             <a:avLst/>
@@ -5949,7 +5949,7 @@
             <a:pPr algn="l">
               <a:defRPr sz="1125" b="1">
                 <a:solidFill>
-                  <a:srgbClr val="111827"/>
+                  <a:srgbClr val="2563EB"/>
                 </a:solidFill>
                 <a:latin typeface="Aptos"/>
                 <a:ea typeface="Aptos"/>
@@ -5959,36 +5959,13 @@
             <a:r>
               <a:rPr sz="1125" b="1">
                 <a:solidFill>
-                  <a:srgbClr val="111827"/>
-                </a:solidFill>
-                <a:latin typeface="Aptos"/>
-                <a:ea typeface="Aptos"/>
-                <a:cs typeface="Aptos"/>
-              </a:rPr>
-              <a:t>Known organizer families</a:t>
-            </a:r>
-          </a:p>
-          <a:p xmlns:a="http://schemas.openxmlformats.org/drawingml/2006/main">
-            <a:pPr algn="l">
-              <a:defRPr sz="1125" b="1">
-                <a:solidFill>
-                  <a:srgbClr val="111827"/>
-                </a:solidFill>
-                <a:latin typeface="Aptos"/>
-                <a:ea typeface="Aptos"/>
-                <a:cs typeface="Aptos"/>
-              </a:defRPr>
-            </a:pPr>
-            <a:r>
-              <a:rPr sz="1125" b="1">
-                <a:solidFill>
-                  <a:srgbClr val="111827"/>
-                </a:solidFill>
-                <a:latin typeface="Aptos"/>
-                <a:ea typeface="Aptos"/>
-                <a:cs typeface="Aptos"/>
-              </a:rPr>
-              <a:t>MOSFET, IGBT, IC</a:t>
+                  <a:srgbClr val="2563EB"/>
+                </a:solidFill>
+                <a:latin typeface="Aptos"/>
+                <a:ea typeface="Aptos"/>
+                <a:cs typeface="Aptos"/>
+              </a:rPr>
+              <a:t>Litho levels</a:t>
             </a:r>
           </a:p>
         </p:txBody>
@@ -5998,118 +5975,19 @@
           <p:cNvPr id="7" name="">
             <a:extLst xmlns:a="http://schemas.openxmlformats.org/drawingml/2006/main">
               <a:ext uri="{FF2B5EF4-FFF2-40B4-BE49-F238E27FC236}">
-                <a16:creationId xmlns:a16="http://schemas.microsoft.com/office/drawing/2014/main" id="{5EA085F4-27CF-43F2-86C5-14F4CF1FFD47}"/>
-              </a:ext>
-            </a:extLst>
-          </p:cNvPr>
-          <p:cNvSpPr>
-            <a:spLocks xmlns:a="http://schemas.openxmlformats.org/drawingml/2006/main" noGrp="1"/>
-          </p:cNvSpPr>
-          <p:nvPr/>
-        </p:nvSpPr>
-        <p:spPr>
-          <a:xfrm xmlns:a="http://schemas.openxmlformats.org/drawingml/2006/main">
-            <a:off x="3095625" y="2619375"/>
-            <a:ext cx="666750" cy="28575"/>
-          </a:xfrm>
-          <a:prstGeom xmlns:a="http://schemas.openxmlformats.org/drawingml/2006/main" prst="rect">
-            <a:avLst/>
-          </a:prstGeom>
-          <a:solidFill xmlns:a="http://schemas.openxmlformats.org/drawingml/2006/main">
-            <a:srgbClr val="D9DEE7"/>
-          </a:solidFill>
-          <a:ln xmlns:a="http://schemas.openxmlformats.org/drawingml/2006/main" w="0">
-            <a:solidFill>
-              <a:srgbClr val="D9DEE7"/>
-            </a:solidFill>
-            <a:prstDash val="solid"/>
-          </a:ln>
-        </p:spPr>
-      </p:sp>
-      <p:sp>
-        <p:nvSpPr>
-          <p:cNvPr id="8" name="">
-            <a:extLst xmlns:a="http://schemas.openxmlformats.org/drawingml/2006/main">
-              <a:ext uri="{FF2B5EF4-FFF2-40B4-BE49-F238E27FC236}">
-                <a16:creationId xmlns:a16="http://schemas.microsoft.com/office/drawing/2014/main" id="{B2C99109-DE74-44FE-BD24-8D52BEE7307D}"/>
-              </a:ext>
-            </a:extLst>
-          </p:cNvPr>
-          <p:cNvSpPr>
-            <a:spLocks xmlns:a="http://schemas.openxmlformats.org/drawingml/2006/main" noGrp="1"/>
-          </p:cNvSpPr>
-          <p:nvPr/>
-        </p:nvSpPr>
-        <p:spPr>
-          <a:xfrm xmlns:a="http://schemas.openxmlformats.org/drawingml/2006/main">
-            <a:off x="3667125" y="2571750"/>
-            <a:ext cx="95250" cy="123825"/>
-          </a:xfrm>
-          <a:prstGeom xmlns:a="http://schemas.openxmlformats.org/drawingml/2006/main" prst="rect">
-            <a:avLst/>
-          </a:prstGeom>
-          <a:solidFill xmlns:a="http://schemas.openxmlformats.org/drawingml/2006/main">
-            <a:srgbClr val="D9DEE7"/>
-          </a:solidFill>
-          <a:ln xmlns:a="http://schemas.openxmlformats.org/drawingml/2006/main" w="0">
-            <a:solidFill>
-              <a:srgbClr val="D9DEE7"/>
-            </a:solidFill>
-            <a:prstDash val="solid"/>
-          </a:ln>
-        </p:spPr>
-      </p:sp>
-      <p:sp>
-        <p:nvSpPr>
-          <p:cNvPr id="9" name="">
-            <a:extLst xmlns:a="http://schemas.openxmlformats.org/drawingml/2006/main">
-              <a:ext uri="{FF2B5EF4-FFF2-40B4-BE49-F238E27FC236}">
-                <a16:creationId xmlns:a16="http://schemas.microsoft.com/office/drawing/2014/main" id="{E960BEA2-0BAA-4957-8549-3172492B1841}"/>
-              </a:ext>
-            </a:extLst>
-          </p:cNvPr>
-          <p:cNvSpPr>
-            <a:spLocks xmlns:a="http://schemas.openxmlformats.org/drawingml/2006/main" noGrp="1"/>
-          </p:cNvSpPr>
-          <p:nvPr/>
-        </p:nvSpPr>
-        <p:spPr>
-          <a:xfrm xmlns:a="http://schemas.openxmlformats.org/drawingml/2006/main">
-            <a:off x="3905250" y="2190750"/>
-            <a:ext cx="2333625" cy="876300"/>
-          </a:xfrm>
-          <a:prstGeom xmlns:a="http://schemas.openxmlformats.org/drawingml/2006/main" prst="rect">
-            <a:avLst/>
-          </a:prstGeom>
-          <a:solidFill xmlns:a="http://schemas.openxmlformats.org/drawingml/2006/main">
-            <a:srgbClr val="DFF5EC"/>
-          </a:solidFill>
-          <a:ln xmlns:a="http://schemas.openxmlformats.org/drawingml/2006/main" w="9525">
-            <a:solidFill>
-              <a:srgbClr val="D9DEE7"/>
-            </a:solidFill>
-            <a:prstDash val="solid"/>
-          </a:ln>
-        </p:spPr>
-      </p:sp>
-      <p:sp>
-        <p:nvSpPr>
-          <p:cNvPr id="10" name="">
-            <a:extLst xmlns:a="http://schemas.openxmlformats.org/drawingml/2006/main">
-              <a:ext uri="{FF2B5EF4-FFF2-40B4-BE49-F238E27FC236}">
-                <a16:creationId xmlns:a16="http://schemas.microsoft.com/office/drawing/2014/main" id="{08F4DD87-7397-426A-97F0-7B20642E216F}"/>
-              </a:ext>
-            </a:extLst>
-          </p:cNvPr>
-          <p:cNvSpPr>
-            <a:spLocks xmlns:a="http://schemas.openxmlformats.org/drawingml/2006/main" noGrp="1"/>
-          </p:cNvSpPr>
-          <p:nvPr/>
-        </p:nvSpPr>
-        <p:spPr>
-          <a:xfrm xmlns:a="http://schemas.openxmlformats.org/drawingml/2006/main">
-            <a:off x="4057650" y="2324100"/>
-            <a:ext cx="2028825" cy="609600"/>
+                <a16:creationId xmlns:a16="http://schemas.microsoft.com/office/drawing/2014/main" id="{58BE8870-1AD1-43F8-93AC-88A35C2D72F5}"/>
+              </a:ext>
+            </a:extLst>
+          </p:cNvPr>
+          <p:cNvSpPr>
+            <a:spLocks xmlns:a="http://schemas.openxmlformats.org/drawingml/2006/main" noGrp="1"/>
+          </p:cNvSpPr>
+          <p:nvPr/>
+        </p:nvSpPr>
+        <p:spPr>
+          <a:xfrm xmlns:a="http://schemas.openxmlformats.org/drawingml/2006/main">
+            <a:off x="819150" y="1933575"/>
+            <a:ext cx="2076450" cy="457200"/>
           </a:xfrm>
           <a:prstGeom xmlns:a="http://schemas.openxmlformats.org/drawingml/2006/main" prst="rect">
             <a:avLst/>
@@ -6133,78 +6011,55 @@
           <a:lstStyle xmlns:a="http://schemas.openxmlformats.org/drawingml/2006/main"/>
           <a:p xmlns:a="http://schemas.openxmlformats.org/drawingml/2006/main">
             <a:pPr algn="l">
-              <a:defRPr sz="1125" b="1">
-                <a:solidFill>
-                  <a:srgbClr val="0F8A5F"/>
-                </a:solidFill>
-                <a:latin typeface="Aptos"/>
-                <a:ea typeface="Aptos"/>
-                <a:cs typeface="Aptos"/>
-              </a:defRPr>
-            </a:pPr>
-            <a:r>
-              <a:rPr sz="1125" b="1">
-                <a:solidFill>
-                  <a:srgbClr val="0F8A5F"/>
-                </a:solidFill>
-                <a:latin typeface="Aptos"/>
-                <a:ea typeface="Aptos"/>
-                <a:cs typeface="Aptos"/>
-              </a:rPr>
-              <a:t>Synthetic train families</a:t>
-            </a:r>
-          </a:p>
-          <a:p xmlns:a="http://schemas.openxmlformats.org/drawingml/2006/main">
-            <a:pPr algn="l">
-              <a:defRPr sz="1125" b="1">
-                <a:solidFill>
-                  <a:srgbClr val="0F8A5F"/>
-                </a:solidFill>
-                <a:latin typeface="Aptos"/>
-                <a:ea typeface="Aptos"/>
-                <a:cs typeface="Aptos"/>
-              </a:defRPr>
-            </a:pPr>
-            <a:r>
-              <a:rPr sz="1125" b="1">
-                <a:solidFill>
-                  <a:srgbClr val="0F8A5F"/>
-                </a:solidFill>
-                <a:latin typeface="Aptos"/>
-                <a:ea typeface="Aptos"/>
-                <a:cs typeface="Aptos"/>
-              </a:rPr>
-              <a:t>scfam01-scfam09</a:t>
-            </a:r>
-          </a:p>
-        </p:txBody>
-      </p:sp>
-      <p:sp>
-        <p:nvSpPr>
-          <p:cNvPr id="11" name="">
-            <a:extLst xmlns:a="http://schemas.openxmlformats.org/drawingml/2006/main">
-              <a:ext uri="{FF2B5EF4-FFF2-40B4-BE49-F238E27FC236}">
-                <a16:creationId xmlns:a16="http://schemas.microsoft.com/office/drawing/2014/main" id="{3409B102-557D-4988-BCEC-72B611360206}"/>
-              </a:ext>
-            </a:extLst>
-          </p:cNvPr>
-          <p:cNvSpPr>
-            <a:spLocks xmlns:a="http://schemas.openxmlformats.org/drawingml/2006/main" noGrp="1"/>
-          </p:cNvSpPr>
-          <p:nvPr/>
-        </p:nvSpPr>
-        <p:spPr>
-          <a:xfrm xmlns:a="http://schemas.openxmlformats.org/drawingml/2006/main">
-            <a:off x="6334125" y="2619375"/>
-            <a:ext cx="666750" cy="28575"/>
-          </a:xfrm>
-          <a:prstGeom xmlns:a="http://schemas.openxmlformats.org/drawingml/2006/main" prst="rect">
-            <a:avLst/>
-          </a:prstGeom>
-          <a:solidFill xmlns:a="http://schemas.openxmlformats.org/drawingml/2006/main">
-            <a:srgbClr val="D9DEE7"/>
-          </a:solidFill>
-          <a:ln xmlns:a="http://schemas.openxmlformats.org/drawingml/2006/main" w="0">
+              <a:defRPr sz="900" b="0">
+                <a:solidFill>
+                  <a:srgbClr val="111827"/>
+                </a:solidFill>
+                <a:latin typeface="Aptos"/>
+                <a:ea typeface="Aptos"/>
+                <a:cs typeface="Aptos"/>
+              </a:defRPr>
+            </a:pPr>
+            <a:r>
+              <a:rPr sz="900" b="0">
+                <a:solidFill>
+                  <a:srgbClr val="111827"/>
+                </a:solidFill>
+                <a:latin typeface="Aptos"/>
+                <a:ea typeface="Aptos"/>
+                <a:cs typeface="Aptos"/>
+              </a:rPr>
+              <a:t>Number of mask / photoresist patterning cycles. More levels means a deeper route.</a:t>
+            </a:r>
+          </a:p>
+        </p:txBody>
+      </p:sp>
+      <p:sp>
+        <p:nvSpPr>
+          <p:cNvPr id="8" name="">
+            <a:extLst xmlns:a="http://schemas.openxmlformats.org/drawingml/2006/main">
+              <a:ext uri="{FF2B5EF4-FFF2-40B4-BE49-F238E27FC236}">
+                <a16:creationId xmlns:a16="http://schemas.microsoft.com/office/drawing/2014/main" id="{29031DE3-7AFD-4C1C-AF4C-4AB5031DF3E7}"/>
+              </a:ext>
+            </a:extLst>
+          </p:cNvPr>
+          <p:cNvSpPr>
+            <a:spLocks xmlns:a="http://schemas.openxmlformats.org/drawingml/2006/main" noGrp="1"/>
+          </p:cNvSpPr>
+          <p:nvPr/>
+        </p:nvSpPr>
+        <p:spPr>
+          <a:xfrm xmlns:a="http://schemas.openxmlformats.org/drawingml/2006/main">
+            <a:off x="3238500" y="1524000"/>
+            <a:ext cx="2381250" cy="971550"/>
+          </a:xfrm>
+          <a:prstGeom xmlns:a="http://schemas.openxmlformats.org/drawingml/2006/main" prst="rect">
+            <a:avLst/>
+          </a:prstGeom>
+          <a:solidFill xmlns:a="http://schemas.openxmlformats.org/drawingml/2006/main">
+            <a:srgbClr val="DFF5EC"/>
+          </a:solidFill>
+          <a:ln xmlns:a="http://schemas.openxmlformats.org/drawingml/2006/main" w="9525">
             <a:solidFill>
               <a:srgbClr val="D9DEE7"/>
             </a:solidFill>
@@ -6214,88 +6069,22 @@
       </p:sp>
       <p:sp>
         <p:nvSpPr>
-          <p:cNvPr id="12" name="">
-            <a:extLst xmlns:a="http://schemas.openxmlformats.org/drawingml/2006/main">
-              <a:ext uri="{FF2B5EF4-FFF2-40B4-BE49-F238E27FC236}">
-                <a16:creationId xmlns:a16="http://schemas.microsoft.com/office/drawing/2014/main" id="{28F97D61-8CBF-456A-8991-418C4E97C1A1}"/>
-              </a:ext>
-            </a:extLst>
-          </p:cNvPr>
-          <p:cNvSpPr>
-            <a:spLocks xmlns:a="http://schemas.openxmlformats.org/drawingml/2006/main" noGrp="1"/>
-          </p:cNvSpPr>
-          <p:nvPr/>
-        </p:nvSpPr>
-        <p:spPr>
-          <a:xfrm xmlns:a="http://schemas.openxmlformats.org/drawingml/2006/main">
-            <a:off x="6905625" y="2571750"/>
-            <a:ext cx="95250" cy="123825"/>
-          </a:xfrm>
-          <a:prstGeom xmlns:a="http://schemas.openxmlformats.org/drawingml/2006/main" prst="rect">
-            <a:avLst/>
-          </a:prstGeom>
-          <a:solidFill xmlns:a="http://schemas.openxmlformats.org/drawingml/2006/main">
-            <a:srgbClr val="D9DEE7"/>
-          </a:solidFill>
-          <a:ln xmlns:a="http://schemas.openxmlformats.org/drawingml/2006/main" w="0">
-            <a:solidFill>
-              <a:srgbClr val="D9DEE7"/>
-            </a:solidFill>
-            <a:prstDash val="solid"/>
-          </a:ln>
-        </p:spPr>
-      </p:sp>
-      <p:sp>
-        <p:nvSpPr>
-          <p:cNvPr id="13" name="">
-            <a:extLst xmlns:a="http://schemas.openxmlformats.org/drawingml/2006/main">
-              <a:ext uri="{FF2B5EF4-FFF2-40B4-BE49-F238E27FC236}">
-                <a16:creationId xmlns:a16="http://schemas.microsoft.com/office/drawing/2014/main" id="{44F99EAD-110D-440F-9686-DAE1D106D725}"/>
-              </a:ext>
-            </a:extLst>
-          </p:cNvPr>
-          <p:cNvSpPr>
-            <a:spLocks xmlns:a="http://schemas.openxmlformats.org/drawingml/2006/main" noGrp="1"/>
-          </p:cNvSpPr>
-          <p:nvPr/>
-        </p:nvSpPr>
-        <p:spPr>
-          <a:xfrm xmlns:a="http://schemas.openxmlformats.org/drawingml/2006/main">
-            <a:off x="7143750" y="2190750"/>
-            <a:ext cx="2333625" cy="876300"/>
-          </a:xfrm>
-          <a:prstGeom xmlns:a="http://schemas.openxmlformats.org/drawingml/2006/main" prst="rect">
-            <a:avLst/>
-          </a:prstGeom>
-          <a:solidFill xmlns:a="http://schemas.openxmlformats.org/drawingml/2006/main">
-            <a:srgbClr val="DCEAFE"/>
-          </a:solidFill>
-          <a:ln xmlns:a="http://schemas.openxmlformats.org/drawingml/2006/main" w="9525">
-            <a:solidFill>
-              <a:srgbClr val="D9DEE7"/>
-            </a:solidFill>
-            <a:prstDash val="solid"/>
-          </a:ln>
-        </p:spPr>
-      </p:sp>
-      <p:sp>
-        <p:nvSpPr>
-          <p:cNvPr id="14" name="">
-            <a:extLst xmlns:a="http://schemas.openxmlformats.org/drawingml/2006/main">
-              <a:ext uri="{FF2B5EF4-FFF2-40B4-BE49-F238E27FC236}">
-                <a16:creationId xmlns:a16="http://schemas.microsoft.com/office/drawing/2014/main" id="{FABED461-023D-4ED4-83B3-03928E8BCD86}"/>
-              </a:ext>
-            </a:extLst>
-          </p:cNvPr>
-          <p:cNvSpPr>
-            <a:spLocks xmlns:a="http://schemas.openxmlformats.org/drawingml/2006/main" noGrp="1"/>
-          </p:cNvSpPr>
-          <p:nvPr/>
-        </p:nvSpPr>
-        <p:spPr>
-          <a:xfrm xmlns:a="http://schemas.openxmlformats.org/drawingml/2006/main">
-            <a:off x="7296150" y="2324100"/>
-            <a:ext cx="2028825" cy="609600"/>
+          <p:cNvPr id="9" name="">
+            <a:extLst xmlns:a="http://schemas.openxmlformats.org/drawingml/2006/main">
+              <a:ext uri="{FF2B5EF4-FFF2-40B4-BE49-F238E27FC236}">
+                <a16:creationId xmlns:a16="http://schemas.microsoft.com/office/drawing/2014/main" id="{9DCD8A13-8413-4C73-B4AE-C2A6417EE1CD}"/>
+              </a:ext>
+            </a:extLst>
+          </p:cNvPr>
+          <p:cNvSpPr>
+            <a:spLocks xmlns:a="http://schemas.openxmlformats.org/drawingml/2006/main" noGrp="1"/>
+          </p:cNvSpPr>
+          <p:nvPr/>
+        </p:nvSpPr>
+        <p:spPr>
+          <a:xfrm xmlns:a="http://schemas.openxmlformats.org/drawingml/2006/main">
+            <a:off x="3390900" y="1657350"/>
+            <a:ext cx="2076450" cy="228600"/>
           </a:xfrm>
           <a:prstGeom xmlns:a="http://schemas.openxmlformats.org/drawingml/2006/main" prst="rect">
             <a:avLst/>
@@ -6321,7 +6110,7 @@
             <a:pPr algn="l">
               <a:defRPr sz="1125" b="1">
                 <a:solidFill>
-                  <a:srgbClr val="2563EB"/>
+                  <a:srgbClr val="0F8A5F"/>
                 </a:solidFill>
                 <a:latin typeface="Aptos"/>
                 <a:ea typeface="Aptos"/>
@@ -6331,58 +6120,35 @@
             <a:r>
               <a:rPr sz="1125" b="1">
                 <a:solidFill>
-                  <a:srgbClr val="2563EB"/>
-                </a:solidFill>
-                <a:latin typeface="Aptos"/>
-                <a:ea typeface="Aptos"/>
-                <a:cs typeface="Aptos"/>
-              </a:rPr>
-              <a:t>Held-out OOD families</a:t>
-            </a:r>
-          </a:p>
-          <a:p xmlns:a="http://schemas.openxmlformats.org/drawingml/2006/main">
-            <a:pPr algn="l">
-              <a:defRPr sz="1125" b="1">
-                <a:solidFill>
-                  <a:srgbClr val="2563EB"/>
-                </a:solidFill>
-                <a:latin typeface="Aptos"/>
-                <a:ea typeface="Aptos"/>
-                <a:cs typeface="Aptos"/>
-              </a:defRPr>
-            </a:pPr>
-            <a:r>
-              <a:rPr sz="1125" b="1">
-                <a:solidFill>
-                  <a:srgbClr val="2563EB"/>
-                </a:solidFill>
-                <a:latin typeface="Aptos"/>
-                <a:ea typeface="Aptos"/>
-                <a:cs typeface="Aptos"/>
-              </a:rPr>
-              <a:t>scfam10-scfam12</a:t>
-            </a:r>
-          </a:p>
-        </p:txBody>
-      </p:sp>
-      <p:sp>
-        <p:nvSpPr>
-          <p:cNvPr id="15" name="">
-            <a:extLst xmlns:a="http://schemas.openxmlformats.org/drawingml/2006/main">
-              <a:ext uri="{FF2B5EF4-FFF2-40B4-BE49-F238E27FC236}">
-                <a16:creationId xmlns:a16="http://schemas.microsoft.com/office/drawing/2014/main" id="{BA8DB5BF-4048-444B-BE0E-CD44F7CF2C9B}"/>
-              </a:ext>
-            </a:extLst>
-          </p:cNvPr>
-          <p:cNvSpPr>
-            <a:spLocks xmlns:a="http://schemas.openxmlformats.org/drawingml/2006/main" noGrp="1"/>
-          </p:cNvSpPr>
-          <p:nvPr/>
-        </p:nvSpPr>
-        <p:spPr>
-          <a:xfrm xmlns:a="http://schemas.openxmlformats.org/drawingml/2006/main">
-            <a:off x="1028700" y="3352800"/>
-            <a:ext cx="1143000" cy="266700"/>
+                  <a:srgbClr val="0F8A5F"/>
+                </a:solidFill>
+                <a:latin typeface="Aptos"/>
+                <a:ea typeface="Aptos"/>
+                <a:cs typeface="Aptos"/>
+              </a:rPr>
+              <a:t>Extra via block</a:t>
+            </a:r>
+          </a:p>
+        </p:txBody>
+      </p:sp>
+      <p:sp>
+        <p:nvSpPr>
+          <p:cNvPr id="10" name="">
+            <a:extLst xmlns:a="http://schemas.openxmlformats.org/drawingml/2006/main">
+              <a:ext uri="{FF2B5EF4-FFF2-40B4-BE49-F238E27FC236}">
+                <a16:creationId xmlns:a16="http://schemas.microsoft.com/office/drawing/2014/main" id="{3DE2F598-6632-4566-868D-8DFC4E063750}"/>
+              </a:ext>
+            </a:extLst>
+          </p:cNvPr>
+          <p:cNvSpPr>
+            <a:spLocks xmlns:a="http://schemas.openxmlformats.org/drawingml/2006/main" noGrp="1"/>
+          </p:cNvSpPr>
+          <p:nvPr/>
+        </p:nvSpPr>
+        <p:spPr>
+          <a:xfrm xmlns:a="http://schemas.openxmlformats.org/drawingml/2006/main">
+            <a:off x="3390900" y="1933575"/>
+            <a:ext cx="2076450" cy="457200"/>
           </a:xfrm>
           <a:prstGeom xmlns:a="http://schemas.openxmlformats.org/drawingml/2006/main" prst="rect">
             <a:avLst/>
@@ -6406,80 +6172,80 @@
           <a:lstStyle xmlns:a="http://schemas.openxmlformats.org/drawingml/2006/main"/>
           <a:p xmlns:a="http://schemas.openxmlformats.org/drawingml/2006/main">
             <a:pPr algn="l">
-              <a:defRPr sz="1350" b="1">
-                <a:solidFill>
-                  <a:srgbClr val="0F8A5F"/>
-                </a:solidFill>
-                <a:latin typeface="Aptos"/>
-                <a:ea typeface="Aptos"/>
-                <a:cs typeface="Aptos"/>
-              </a:defRPr>
-            </a:pPr>
-            <a:r>
-              <a:rPr sz="1350" b="1">
-                <a:solidFill>
-                  <a:srgbClr val="0F8A5F"/>
-                </a:solidFill>
-                <a:latin typeface="Aptos"/>
-                <a:ea typeface="Aptos"/>
-                <a:cs typeface="Aptos"/>
-              </a:rPr>
-              <a:t>Train</a:t>
-            </a:r>
-          </a:p>
-        </p:txBody>
-      </p:sp>
-      <p:sp>
-        <p:nvSpPr>
-          <p:cNvPr id="16" name="">
-            <a:extLst xmlns:a="http://schemas.openxmlformats.org/drawingml/2006/main">
-              <a:ext uri="{FF2B5EF4-FFF2-40B4-BE49-F238E27FC236}">
-                <a16:creationId xmlns:a16="http://schemas.microsoft.com/office/drawing/2014/main" id="{E0C88D90-CE4B-4271-9BB9-C93FAA400E90}"/>
-              </a:ext>
-            </a:extLst>
-          </p:cNvPr>
-          <p:cNvSpPr>
-            <a:spLocks xmlns:a="http://schemas.openxmlformats.org/drawingml/2006/main" noGrp="1"/>
-          </p:cNvSpPr>
-          <p:nvPr/>
-        </p:nvSpPr>
-        <p:spPr>
-          <a:xfrm xmlns:a="http://schemas.openxmlformats.org/drawingml/2006/main">
-            <a:off x="876300" y="3676650"/>
-            <a:ext cx="5143500" cy="190500"/>
-          </a:xfrm>
-          <a:prstGeom xmlns:a="http://schemas.openxmlformats.org/drawingml/2006/main" prst="rect">
-            <a:avLst/>
-          </a:prstGeom>
-          <a:solidFill xmlns:a="http://schemas.openxmlformats.org/drawingml/2006/main">
-            <a:srgbClr val="0F8A5F"/>
-          </a:solidFill>
-          <a:ln xmlns:a="http://schemas.openxmlformats.org/drawingml/2006/main" w="0">
-            <a:solidFill>
-              <a:srgbClr val="0F8A5F"/>
-            </a:solidFill>
-            <a:prstDash val="solid"/>
-          </a:ln>
-        </p:spPr>
-      </p:sp>
-      <p:sp>
-        <p:nvSpPr>
-          <p:cNvPr id="17" name="">
-            <a:extLst xmlns:a="http://schemas.openxmlformats.org/drawingml/2006/main">
-              <a:ext uri="{FF2B5EF4-FFF2-40B4-BE49-F238E27FC236}">
-                <a16:creationId xmlns:a16="http://schemas.microsoft.com/office/drawing/2014/main" id="{2CA7C4FC-5520-4416-AA3D-1B951F5742F5}"/>
-              </a:ext>
-            </a:extLst>
-          </p:cNvPr>
-          <p:cNvSpPr>
-            <a:spLocks xmlns:a="http://schemas.openxmlformats.org/drawingml/2006/main" noGrp="1"/>
-          </p:cNvSpPr>
-          <p:nvPr/>
-        </p:nvSpPr>
-        <p:spPr>
-          <a:xfrm xmlns:a="http://schemas.openxmlformats.org/drawingml/2006/main">
-            <a:off x="7372350" y="3352800"/>
-            <a:ext cx="1524000" cy="266700"/>
+              <a:defRPr sz="900" b="0">
+                <a:solidFill>
+                  <a:srgbClr val="111827"/>
+                </a:solidFill>
+                <a:latin typeface="Aptos"/>
+                <a:ea typeface="Aptos"/>
+                <a:cs typeface="Aptos"/>
+              </a:defRPr>
+            </a:pPr>
+            <a:r>
+              <a:rPr sz="900" b="0">
+                <a:solidFill>
+                  <a:srgbClr val="111827"/>
+                </a:solidFill>
+                <a:latin typeface="Aptos"/>
+                <a:ea typeface="Aptos"/>
+                <a:cs typeface="Aptos"/>
+              </a:rPr>
+              <a:t>Some families repeat field oxide, via etch, via fill, and CMP.</a:t>
+            </a:r>
+          </a:p>
+        </p:txBody>
+      </p:sp>
+      <p:sp>
+        <p:nvSpPr>
+          <p:cNvPr id="11" name="">
+            <a:extLst xmlns:a="http://schemas.openxmlformats.org/drawingml/2006/main">
+              <a:ext uri="{FF2B5EF4-FFF2-40B4-BE49-F238E27FC236}">
+                <a16:creationId xmlns:a16="http://schemas.microsoft.com/office/drawing/2014/main" id="{74F6ACD9-1913-4DA6-946E-B8DDEEEE5B47}"/>
+              </a:ext>
+            </a:extLst>
+          </p:cNvPr>
+          <p:cNvSpPr>
+            <a:spLocks xmlns:a="http://schemas.openxmlformats.org/drawingml/2006/main" noGrp="1"/>
+          </p:cNvSpPr>
+          <p:nvPr/>
+        </p:nvSpPr>
+        <p:spPr>
+          <a:xfrm xmlns:a="http://schemas.openxmlformats.org/drawingml/2006/main">
+            <a:off x="5810250" y="1524000"/>
+            <a:ext cx="2381250" cy="971550"/>
+          </a:xfrm>
+          <a:prstGeom xmlns:a="http://schemas.openxmlformats.org/drawingml/2006/main" prst="rect">
+            <a:avLst/>
+          </a:prstGeom>
+          <a:solidFill xmlns:a="http://schemas.openxmlformats.org/drawingml/2006/main">
+            <a:srgbClr val="FFF3D6"/>
+          </a:solidFill>
+          <a:ln xmlns:a="http://schemas.openxmlformats.org/drawingml/2006/main" w="9525">
+            <a:solidFill>
+              <a:srgbClr val="D9DEE7"/>
+            </a:solidFill>
+            <a:prstDash val="solid"/>
+          </a:ln>
+        </p:spPr>
+      </p:sp>
+      <p:sp>
+        <p:nvSpPr>
+          <p:cNvPr id="12" name="">
+            <a:extLst xmlns:a="http://schemas.openxmlformats.org/drawingml/2006/main">
+              <a:ext uri="{FF2B5EF4-FFF2-40B4-BE49-F238E27FC236}">
+                <a16:creationId xmlns:a16="http://schemas.microsoft.com/office/drawing/2014/main" id="{B56D7DF7-623C-4741-B213-204F5740F2A8}"/>
+              </a:ext>
+            </a:extLst>
+          </p:cNvPr>
+          <p:cNvSpPr>
+            <a:spLocks xmlns:a="http://schemas.openxmlformats.org/drawingml/2006/main" noGrp="1"/>
+          </p:cNvSpPr>
+          <p:nvPr/>
+        </p:nvSpPr>
+        <p:spPr>
+          <a:xfrm xmlns:a="http://schemas.openxmlformats.org/drawingml/2006/main">
+            <a:off x="5962650" y="1657350"/>
+            <a:ext cx="2076450" cy="228600"/>
           </a:xfrm>
           <a:prstGeom xmlns:a="http://schemas.openxmlformats.org/drawingml/2006/main" prst="rect">
             <a:avLst/>
@@ -6503,113 +6269,47 @@
           <a:lstStyle xmlns:a="http://schemas.openxmlformats.org/drawingml/2006/main"/>
           <a:p xmlns:a="http://schemas.openxmlformats.org/drawingml/2006/main">
             <a:pPr algn="l">
-              <a:defRPr sz="1350" b="1">
-                <a:solidFill>
-                  <a:srgbClr val="2563EB"/>
-                </a:solidFill>
-                <a:latin typeface="Aptos"/>
-                <a:ea typeface="Aptos"/>
-                <a:cs typeface="Aptos"/>
-              </a:defRPr>
-            </a:pPr>
-            <a:r>
-              <a:rPr sz="1350" b="1">
-                <a:solidFill>
-                  <a:srgbClr val="2563EB"/>
-                </a:solidFill>
-                <a:latin typeface="Aptos"/>
-                <a:ea typeface="Aptos"/>
-                <a:cs typeface="Aptos"/>
-              </a:rPr>
-              <a:t>Test unseen</a:t>
-            </a:r>
-          </a:p>
-        </p:txBody>
-      </p:sp>
-      <p:sp>
-        <p:nvSpPr>
-          <p:cNvPr id="18" name="">
-            <a:extLst xmlns:a="http://schemas.openxmlformats.org/drawingml/2006/main">
-              <a:ext uri="{FF2B5EF4-FFF2-40B4-BE49-F238E27FC236}">
-                <a16:creationId xmlns:a16="http://schemas.microsoft.com/office/drawing/2014/main" id="{9DAAEEDB-338C-456A-B357-FC4FDADA567D}"/>
-              </a:ext>
-            </a:extLst>
-          </p:cNvPr>
-          <p:cNvSpPr>
-            <a:spLocks xmlns:a="http://schemas.openxmlformats.org/drawingml/2006/main" noGrp="1"/>
-          </p:cNvSpPr>
-          <p:nvPr/>
-        </p:nvSpPr>
-        <p:spPr>
-          <a:xfrm xmlns:a="http://schemas.openxmlformats.org/drawingml/2006/main">
-            <a:off x="7315200" y="3676650"/>
-            <a:ext cx="2000250" cy="190500"/>
-          </a:xfrm>
-          <a:prstGeom xmlns:a="http://schemas.openxmlformats.org/drawingml/2006/main" prst="rect">
-            <a:avLst/>
-          </a:prstGeom>
-          <a:solidFill xmlns:a="http://schemas.openxmlformats.org/drawingml/2006/main">
-            <a:srgbClr val="2563EB"/>
-          </a:solidFill>
-          <a:ln xmlns:a="http://schemas.openxmlformats.org/drawingml/2006/main" w="0">
-            <a:solidFill>
-              <a:srgbClr val="2563EB"/>
-            </a:solidFill>
-            <a:prstDash val="solid"/>
-          </a:ln>
-        </p:spPr>
-      </p:sp>
-      <p:sp>
-        <p:nvSpPr>
-          <p:cNvPr id="19" name="">
-            <a:extLst xmlns:a="http://schemas.openxmlformats.org/drawingml/2006/main">
-              <a:ext uri="{FF2B5EF4-FFF2-40B4-BE49-F238E27FC236}">
-                <a16:creationId xmlns:a16="http://schemas.microsoft.com/office/drawing/2014/main" id="{9649EF70-5D56-454B-9CE2-20D55E376B01}"/>
-              </a:ext>
-            </a:extLst>
-          </p:cNvPr>
-          <p:cNvSpPr>
-            <a:spLocks xmlns:a="http://schemas.openxmlformats.org/drawingml/2006/main" noGrp="1"/>
-          </p:cNvSpPr>
-          <p:nvPr/>
-        </p:nvSpPr>
-        <p:spPr>
-          <a:xfrm xmlns:a="http://schemas.openxmlformats.org/drawingml/2006/main">
-            <a:off x="1333500" y="4476750"/>
-            <a:ext cx="1619250" cy="1047750"/>
-          </a:xfrm>
-          <a:prstGeom xmlns:a="http://schemas.openxmlformats.org/drawingml/2006/main" prst="rect">
-            <a:avLst/>
-          </a:prstGeom>
-          <a:solidFill xmlns:a="http://schemas.openxmlformats.org/drawingml/2006/main">
-            <a:srgbClr val="FFFFFF"/>
-          </a:solidFill>
-          <a:ln xmlns:a="http://schemas.openxmlformats.org/drawingml/2006/main" w="9525">
-            <a:solidFill>
-              <a:srgbClr val="D9DEE7"/>
-            </a:solidFill>
-            <a:prstDash val="solid"/>
-          </a:ln>
-        </p:spPr>
-      </p:sp>
-      <p:sp>
-        <p:nvSpPr>
-          <p:cNvPr id="20" name="">
-            <a:extLst xmlns:a="http://schemas.openxmlformats.org/drawingml/2006/main">
-              <a:ext uri="{FF2B5EF4-FFF2-40B4-BE49-F238E27FC236}">
-                <a16:creationId xmlns:a16="http://schemas.microsoft.com/office/drawing/2014/main" id="{3E0BA7A2-B3A0-488E-8655-67F770DA538B}"/>
-              </a:ext>
-            </a:extLst>
-          </p:cNvPr>
-          <p:cNvSpPr>
-            <a:spLocks xmlns:a="http://schemas.openxmlformats.org/drawingml/2006/main" noGrp="1"/>
-          </p:cNvSpPr>
-          <p:nvPr/>
-        </p:nvSpPr>
-        <p:spPr>
-          <a:xfrm xmlns:a="http://schemas.openxmlformats.org/drawingml/2006/main">
-            <a:off x="1504950" y="4648200"/>
-            <a:ext cx="1276350" cy="400050"/>
+              <a:defRPr sz="1125" b="1">
+                <a:solidFill>
+                  <a:srgbClr val="B7791F"/>
+                </a:solidFill>
+                <a:latin typeface="Aptos"/>
+                <a:ea typeface="Aptos"/>
+                <a:cs typeface="Aptos"/>
+              </a:defRPr>
+            </a:pPr>
+            <a:r>
+              <a:rPr sz="1125" b="1">
+                <a:solidFill>
+                  <a:srgbClr val="B7791F"/>
+                </a:solidFill>
+                <a:latin typeface="Aptos"/>
+                <a:ea typeface="Aptos"/>
+                <a:cs typeface="Aptos"/>
+              </a:rPr>
+              <a:t>Spacer rate</a:t>
+            </a:r>
+          </a:p>
+        </p:txBody>
+      </p:sp>
+      <p:sp>
+        <p:nvSpPr>
+          <p:cNvPr id="13" name="">
+            <a:extLst xmlns:a="http://schemas.openxmlformats.org/drawingml/2006/main">
+              <a:ext uri="{FF2B5EF4-FFF2-40B4-BE49-F238E27FC236}">
+                <a16:creationId xmlns:a16="http://schemas.microsoft.com/office/drawing/2014/main" id="{C830E477-E25C-4A81-95D5-0612320EC4EE}"/>
+              </a:ext>
+            </a:extLst>
+          </p:cNvPr>
+          <p:cNvSpPr>
+            <a:spLocks xmlns:a="http://schemas.openxmlformats.org/drawingml/2006/main" noGrp="1"/>
+          </p:cNvSpPr>
+          <p:nvPr/>
+        </p:nvSpPr>
+        <p:spPr>
+          <a:xfrm xmlns:a="http://schemas.openxmlformats.org/drawingml/2006/main">
+            <a:off x="5962650" y="1933575"/>
+            <a:ext cx="2076450" cy="457200"/>
           </a:xfrm>
           <a:prstGeom xmlns:a="http://schemas.openxmlformats.org/drawingml/2006/main" prst="rect">
             <a:avLst/>
@@ -6633,47 +6333,80 @@
           <a:lstStyle xmlns:a="http://schemas.openxmlformats.org/drawingml/2006/main"/>
           <a:p xmlns:a="http://schemas.openxmlformats.org/drawingml/2006/main">
             <a:pPr algn="l">
-              <a:defRPr sz="2550" b="1">
-                <a:solidFill>
-                  <a:srgbClr val="B7791F"/>
-                </a:solidFill>
-                <a:latin typeface="Aptos"/>
-                <a:ea typeface="Aptos"/>
-                <a:cs typeface="Aptos"/>
-              </a:defRPr>
-            </a:pPr>
-            <a:r>
-              <a:rPr sz="2550" b="1">
-                <a:solidFill>
-                  <a:srgbClr val="B7791F"/>
-                </a:solidFill>
-                <a:latin typeface="Aptos"/>
-                <a:ea typeface="Aptos"/>
-                <a:cs typeface="Aptos"/>
-              </a:rPr>
-              <a:t>15</a:t>
-            </a:r>
-          </a:p>
-        </p:txBody>
-      </p:sp>
-      <p:sp>
-        <p:nvSpPr>
-          <p:cNvPr id="21" name="">
-            <a:extLst xmlns:a="http://schemas.openxmlformats.org/drawingml/2006/main">
-              <a:ext uri="{FF2B5EF4-FFF2-40B4-BE49-F238E27FC236}">
-                <a16:creationId xmlns:a16="http://schemas.microsoft.com/office/drawing/2014/main" id="{B05A4F25-8D0F-4E45-BE4A-187364B8A2DD}"/>
-              </a:ext>
-            </a:extLst>
-          </p:cNvPr>
-          <p:cNvSpPr>
-            <a:spLocks xmlns:a="http://schemas.openxmlformats.org/drawingml/2006/main" noGrp="1"/>
-          </p:cNvSpPr>
-          <p:nvPr/>
-        </p:nvSpPr>
-        <p:spPr>
-          <a:xfrm xmlns:a="http://schemas.openxmlformats.org/drawingml/2006/main">
-            <a:off x="1504950" y="5076825"/>
-            <a:ext cx="1276350" cy="190500"/>
+              <a:defRPr sz="900" b="0">
+                <a:solidFill>
+                  <a:srgbClr val="111827"/>
+                </a:solidFill>
+                <a:latin typeface="Aptos"/>
+                <a:ea typeface="Aptos"/>
+                <a:cs typeface="Aptos"/>
+              </a:defRPr>
+            </a:pPr>
+            <a:r>
+              <a:rPr sz="900" b="0">
+                <a:solidFill>
+                  <a:srgbClr val="111827"/>
+                </a:solidFill>
+                <a:latin typeface="Aptos"/>
+                <a:ea typeface="Aptos"/>
+                <a:cs typeface="Aptos"/>
+              </a:rPr>
+              <a:t>Probability that spacer dielectric and anisotropic spacer etch appear.</a:t>
+            </a:r>
+          </a:p>
+        </p:txBody>
+      </p:sp>
+      <p:sp>
+        <p:nvSpPr>
+          <p:cNvPr id="14" name="">
+            <a:extLst xmlns:a="http://schemas.openxmlformats.org/drawingml/2006/main">
+              <a:ext uri="{FF2B5EF4-FFF2-40B4-BE49-F238E27FC236}">
+                <a16:creationId xmlns:a16="http://schemas.microsoft.com/office/drawing/2014/main" id="{92E2F8CD-66E5-4A9A-8C69-63A04FF1E693}"/>
+              </a:ext>
+            </a:extLst>
+          </p:cNvPr>
+          <p:cNvSpPr>
+            <a:spLocks xmlns:a="http://schemas.openxmlformats.org/drawingml/2006/main" noGrp="1"/>
+          </p:cNvSpPr>
+          <p:nvPr/>
+        </p:nvSpPr>
+        <p:spPr>
+          <a:xfrm xmlns:a="http://schemas.openxmlformats.org/drawingml/2006/main">
+            <a:off x="8382000" y="1524000"/>
+            <a:ext cx="2381250" cy="971550"/>
+          </a:xfrm>
+          <a:prstGeom xmlns:a="http://schemas.openxmlformats.org/drawingml/2006/main" prst="rect">
+            <a:avLst/>
+          </a:prstGeom>
+          <a:solidFill xmlns:a="http://schemas.openxmlformats.org/drawingml/2006/main">
+            <a:srgbClr val="DCF8FF"/>
+          </a:solidFill>
+          <a:ln xmlns:a="http://schemas.openxmlformats.org/drawingml/2006/main" w="9525">
+            <a:solidFill>
+              <a:srgbClr val="D9DEE7"/>
+            </a:solidFill>
+            <a:prstDash val="solid"/>
+          </a:ln>
+        </p:spPr>
+      </p:sp>
+      <p:sp>
+        <p:nvSpPr>
+          <p:cNvPr id="15" name="">
+            <a:extLst xmlns:a="http://schemas.openxmlformats.org/drawingml/2006/main">
+              <a:ext uri="{FF2B5EF4-FFF2-40B4-BE49-F238E27FC236}">
+                <a16:creationId xmlns:a16="http://schemas.microsoft.com/office/drawing/2014/main" id="{0875C507-F40C-44D2-9AFF-34EA39EEC49C}"/>
+              </a:ext>
+            </a:extLst>
+          </p:cNvPr>
+          <p:cNvSpPr>
+            <a:spLocks xmlns:a="http://schemas.openxmlformats.org/drawingml/2006/main" noGrp="1"/>
+          </p:cNvSpPr>
+          <p:nvPr/>
+        </p:nvSpPr>
+        <p:spPr>
+          <a:xfrm xmlns:a="http://schemas.openxmlformats.org/drawingml/2006/main">
+            <a:off x="8534400" y="1657350"/>
+            <a:ext cx="2076450" cy="228600"/>
           </a:xfrm>
           <a:prstGeom xmlns:a="http://schemas.openxmlformats.org/drawingml/2006/main" prst="rect">
             <a:avLst/>
@@ -6697,47 +6430,47 @@
           <a:lstStyle xmlns:a="http://schemas.openxmlformats.org/drawingml/2006/main"/>
           <a:p xmlns:a="http://schemas.openxmlformats.org/drawingml/2006/main">
             <a:pPr algn="l">
-              <a:defRPr sz="900" b="1">
-                <a:solidFill>
-                  <a:srgbClr val="111827"/>
-                </a:solidFill>
-                <a:latin typeface="Aptos"/>
-                <a:ea typeface="Aptos"/>
-                <a:cs typeface="Aptos"/>
-              </a:defRPr>
-            </a:pPr>
-            <a:r>
-              <a:rPr sz="900" b="1">
-                <a:solidFill>
-                  <a:srgbClr val="111827"/>
-                </a:solidFill>
-                <a:latin typeface="Aptos"/>
-                <a:ea typeface="Aptos"/>
-                <a:cs typeface="Aptos"/>
-              </a:rPr>
-              <a:t>Families</a:t>
-            </a:r>
-          </a:p>
-        </p:txBody>
-      </p:sp>
-      <p:sp>
-        <p:nvSpPr>
-          <p:cNvPr id="22" name="">
-            <a:extLst xmlns:a="http://schemas.openxmlformats.org/drawingml/2006/main">
-              <a:ext uri="{FF2B5EF4-FFF2-40B4-BE49-F238E27FC236}">
-                <a16:creationId xmlns:a16="http://schemas.microsoft.com/office/drawing/2014/main" id="{52DBFFD5-93E7-47F2-BCE7-E89623BDE2A2}"/>
-              </a:ext>
-            </a:extLst>
-          </p:cNvPr>
-          <p:cNvSpPr>
-            <a:spLocks xmlns:a="http://schemas.openxmlformats.org/drawingml/2006/main" noGrp="1"/>
-          </p:cNvSpPr>
-          <p:nvPr/>
-        </p:nvSpPr>
-        <p:spPr>
-          <a:xfrm xmlns:a="http://schemas.openxmlformats.org/drawingml/2006/main">
-            <a:off x="1504950" y="5276850"/>
-            <a:ext cx="1276350" cy="171450"/>
+              <a:defRPr sz="1125" b="1">
+                <a:solidFill>
+                  <a:srgbClr val="0891B2"/>
+                </a:solidFill>
+                <a:latin typeface="Aptos"/>
+                <a:ea typeface="Aptos"/>
+                <a:cs typeface="Aptos"/>
+              </a:defRPr>
+            </a:pPr>
+            <a:r>
+              <a:rPr sz="1125" b="1">
+                <a:solidFill>
+                  <a:srgbClr val="0891B2"/>
+                </a:solidFill>
+                <a:latin typeface="Aptos"/>
+                <a:ea typeface="Aptos"/>
+                <a:cs typeface="Aptos"/>
+              </a:rPr>
+              <a:t>Implant route</a:t>
+            </a:r>
+          </a:p>
+        </p:txBody>
+      </p:sp>
+      <p:sp>
+        <p:nvSpPr>
+          <p:cNvPr id="16" name="">
+            <a:extLst xmlns:a="http://schemas.openxmlformats.org/drawingml/2006/main">
+              <a:ext uri="{FF2B5EF4-FFF2-40B4-BE49-F238E27FC236}">
+                <a16:creationId xmlns:a16="http://schemas.microsoft.com/office/drawing/2014/main" id="{25602E61-C869-43C8-81CE-0AE1BC596215}"/>
+              </a:ext>
+            </a:extLst>
+          </p:cNvPr>
+          <p:cNvSpPr>
+            <a:spLocks xmlns:a="http://schemas.openxmlformats.org/drawingml/2006/main" noGrp="1"/>
+          </p:cNvSpPr>
+          <p:nvPr/>
+        </p:nvSpPr>
+        <p:spPr>
+          <a:xfrm xmlns:a="http://schemas.openxmlformats.org/drawingml/2006/main">
+            <a:off x="8534400" y="1933575"/>
+            <a:ext cx="2076450" cy="457200"/>
           </a:xfrm>
           <a:prstGeom xmlns:a="http://schemas.openxmlformats.org/drawingml/2006/main" prst="rect">
             <a:avLst/>
@@ -6761,53 +6494,53 @@
           <a:lstStyle xmlns:a="http://schemas.openxmlformats.org/drawingml/2006/main"/>
           <a:p xmlns:a="http://schemas.openxmlformats.org/drawingml/2006/main">
             <a:pPr algn="l">
-              <a:defRPr sz="675" b="0">
-                <a:solidFill>
-                  <a:srgbClr val="5B6472"/>
-                </a:solidFill>
-                <a:latin typeface="Aptos"/>
-                <a:ea typeface="Aptos"/>
-                <a:cs typeface="Aptos"/>
-              </a:defRPr>
-            </a:pPr>
-            <a:r>
-              <a:rPr sz="675" b="0">
-                <a:solidFill>
-                  <a:srgbClr val="5B6472"/>
-                </a:solidFill>
-                <a:latin typeface="Aptos"/>
-                <a:ea typeface="Aptos"/>
-                <a:cs typeface="Aptos"/>
-              </a:rPr>
-              <a:t>total</a:t>
-            </a:r>
-          </a:p>
-        </p:txBody>
-      </p:sp>
-      <p:sp>
-        <p:nvSpPr>
-          <p:cNvPr id="23" name="">
-            <a:extLst xmlns:a="http://schemas.openxmlformats.org/drawingml/2006/main">
-              <a:ext uri="{FF2B5EF4-FFF2-40B4-BE49-F238E27FC236}">
-                <a16:creationId xmlns:a16="http://schemas.microsoft.com/office/drawing/2014/main" id="{19DEED2A-8B81-40A8-A456-D982C98B3FEF}"/>
-              </a:ext>
-            </a:extLst>
-          </p:cNvPr>
-          <p:cNvSpPr>
-            <a:spLocks xmlns:a="http://schemas.openxmlformats.org/drawingml/2006/main" noGrp="1"/>
-          </p:cNvSpPr>
-          <p:nvPr/>
-        </p:nvSpPr>
-        <p:spPr>
-          <a:xfrm xmlns:a="http://schemas.openxmlformats.org/drawingml/2006/main">
-            <a:off x="3429000" y="4476750"/>
-            <a:ext cx="1619250" cy="1047750"/>
-          </a:xfrm>
-          <a:prstGeom xmlns:a="http://schemas.openxmlformats.org/drawingml/2006/main" prst="rect">
-            <a:avLst/>
-          </a:prstGeom>
-          <a:solidFill xmlns:a="http://schemas.openxmlformats.org/drawingml/2006/main">
-            <a:srgbClr val="FFFFFF"/>
+              <a:defRPr sz="900" b="0">
+                <a:solidFill>
+                  <a:srgbClr val="111827"/>
+                </a:solidFill>
+                <a:latin typeface="Aptos"/>
+                <a:ea typeface="Aptos"/>
+                <a:cs typeface="Aptos"/>
+              </a:defRPr>
+            </a:pPr>
+            <a:r>
+              <a:rPr sz="900" b="0">
+                <a:solidFill>
+                  <a:srgbClr val="111827"/>
+                </a:solidFill>
+                <a:latin typeface="Aptos"/>
+                <a:ea typeface="Aptos"/>
+                <a:cs typeface="Aptos"/>
+              </a:rPr>
+              <a:t>Valid recombinations such as source/drain followed by N-buffer.</a:t>
+            </a:r>
+          </a:p>
+        </p:txBody>
+      </p:sp>
+      <p:sp>
+        <p:nvSpPr>
+          <p:cNvPr id="17" name="">
+            <a:extLst xmlns:a="http://schemas.openxmlformats.org/drawingml/2006/main">
+              <a:ext uri="{FF2B5EF4-FFF2-40B4-BE49-F238E27FC236}">
+                <a16:creationId xmlns:a16="http://schemas.microsoft.com/office/drawing/2014/main" id="{5DE36958-6081-4644-ABA1-8F3E4A2D1250}"/>
+              </a:ext>
+            </a:extLst>
+          </p:cNvPr>
+          <p:cNvSpPr>
+            <a:spLocks xmlns:a="http://schemas.openxmlformats.org/drawingml/2006/main" noGrp="1"/>
+          </p:cNvSpPr>
+          <p:nvPr/>
+        </p:nvSpPr>
+        <p:spPr>
+          <a:xfrm xmlns:a="http://schemas.openxmlformats.org/drawingml/2006/main">
+            <a:off x="666750" y="3371850"/>
+            <a:ext cx="1571625" cy="419100"/>
+          </a:xfrm>
+          <a:prstGeom xmlns:a="http://schemas.openxmlformats.org/drawingml/2006/main" prst="rect">
+            <a:avLst/>
+          </a:prstGeom>
+          <a:solidFill xmlns:a="http://schemas.openxmlformats.org/drawingml/2006/main">
+            <a:srgbClr val="EEF2F7"/>
           </a:solidFill>
           <a:ln xmlns:a="http://schemas.openxmlformats.org/drawingml/2006/main" w="9525">
             <a:solidFill>
@@ -6819,22 +6552,22 @@
       </p:sp>
       <p:sp>
         <p:nvSpPr>
-          <p:cNvPr id="24" name="">
-            <a:extLst xmlns:a="http://schemas.openxmlformats.org/drawingml/2006/main">
-              <a:ext uri="{FF2B5EF4-FFF2-40B4-BE49-F238E27FC236}">
-                <a16:creationId xmlns:a16="http://schemas.microsoft.com/office/drawing/2014/main" id="{96D7AFE3-B074-43AB-96B4-8B7D3EE0F0D2}"/>
-              </a:ext>
-            </a:extLst>
-          </p:cNvPr>
-          <p:cNvSpPr>
-            <a:spLocks xmlns:a="http://schemas.openxmlformats.org/drawingml/2006/main" noGrp="1"/>
-          </p:cNvSpPr>
-          <p:nvPr/>
-        </p:nvSpPr>
-        <p:spPr>
-          <a:xfrm xmlns:a="http://schemas.openxmlformats.org/drawingml/2006/main">
-            <a:off x="3600450" y="4648200"/>
-            <a:ext cx="1276350" cy="400050"/>
+          <p:cNvPr id="18" name="">
+            <a:extLst xmlns:a="http://schemas.openxmlformats.org/drawingml/2006/main">
+              <a:ext uri="{FF2B5EF4-FFF2-40B4-BE49-F238E27FC236}">
+                <a16:creationId xmlns:a16="http://schemas.microsoft.com/office/drawing/2014/main" id="{BCA158DC-37E4-4BA5-81ED-E7EC8F23A17D}"/>
+              </a:ext>
+            </a:extLst>
+          </p:cNvPr>
+          <p:cNvSpPr>
+            <a:spLocks xmlns:a="http://schemas.openxmlformats.org/drawingml/2006/main" noGrp="1"/>
+          </p:cNvSpPr>
+          <p:nvPr/>
+        </p:nvSpPr>
+        <p:spPr>
+          <a:xfrm xmlns:a="http://schemas.openxmlformats.org/drawingml/2006/main">
+            <a:off x="762000" y="3467100"/>
+            <a:ext cx="1381125" cy="228600"/>
           </a:xfrm>
           <a:prstGeom xmlns:a="http://schemas.openxmlformats.org/drawingml/2006/main" prst="rect">
             <a:avLst/>
@@ -6858,47 +6591,80 @@
           <a:lstStyle xmlns:a="http://schemas.openxmlformats.org/drawingml/2006/main"/>
           <a:p xmlns:a="http://schemas.openxmlformats.org/drawingml/2006/main">
             <a:pPr algn="l">
-              <a:defRPr sz="2550" b="1">
-                <a:solidFill>
-                  <a:srgbClr val="0F8A5F"/>
-                </a:solidFill>
-                <a:latin typeface="Aptos"/>
-                <a:ea typeface="Aptos"/>
-                <a:cs typeface="Aptos"/>
-              </a:defRPr>
-            </a:pPr>
-            <a:r>
-              <a:rPr sz="2550" b="1">
-                <a:solidFill>
-                  <a:srgbClr val="0F8A5F"/>
-                </a:solidFill>
-                <a:latin typeface="Aptos"/>
-                <a:ea typeface="Aptos"/>
-                <a:cs typeface="Aptos"/>
-              </a:rPr>
-              <a:t>12</a:t>
-            </a:r>
-          </a:p>
-        </p:txBody>
-      </p:sp>
-      <p:sp>
-        <p:nvSpPr>
-          <p:cNvPr id="25" name="">
-            <a:extLst xmlns:a="http://schemas.openxmlformats.org/drawingml/2006/main">
-              <a:ext uri="{FF2B5EF4-FFF2-40B4-BE49-F238E27FC236}">
-                <a16:creationId xmlns:a16="http://schemas.microsoft.com/office/drawing/2014/main" id="{16C9F46C-31A2-426F-A06C-7FA2EC39FE49}"/>
-              </a:ext>
-            </a:extLst>
-          </p:cNvPr>
-          <p:cNvSpPr>
-            <a:spLocks xmlns:a="http://schemas.openxmlformats.org/drawingml/2006/main" noGrp="1"/>
-          </p:cNvSpPr>
-          <p:nvPr/>
-        </p:nvSpPr>
-        <p:spPr>
-          <a:xfrm xmlns:a="http://schemas.openxmlformats.org/drawingml/2006/main">
-            <a:off x="3600450" y="5076825"/>
-            <a:ext cx="1276350" cy="190500"/>
+              <a:defRPr sz="825" b="1">
+                <a:solidFill>
+                  <a:srgbClr val="111827"/>
+                </a:solidFill>
+                <a:latin typeface="Aptos"/>
+                <a:ea typeface="Aptos"/>
+                <a:cs typeface="Aptos"/>
+              </a:defRPr>
+            </a:pPr>
+            <a:r>
+              <a:rPr sz="825" b="1">
+                <a:solidFill>
+                  <a:srgbClr val="111827"/>
+                </a:solidFill>
+                <a:latin typeface="Aptos"/>
+                <a:ea typeface="Aptos"/>
+                <a:cs typeface="Aptos"/>
+              </a:rPr>
+              <a:t>Group</a:t>
+            </a:r>
+          </a:p>
+        </p:txBody>
+      </p:sp>
+      <p:sp>
+        <p:nvSpPr>
+          <p:cNvPr id="19" name="">
+            <a:extLst xmlns:a="http://schemas.openxmlformats.org/drawingml/2006/main">
+              <a:ext uri="{FF2B5EF4-FFF2-40B4-BE49-F238E27FC236}">
+                <a16:creationId xmlns:a16="http://schemas.microsoft.com/office/drawing/2014/main" id="{BEA59F7C-36A3-4131-9800-0FE361B65B04}"/>
+              </a:ext>
+            </a:extLst>
+          </p:cNvPr>
+          <p:cNvSpPr>
+            <a:spLocks xmlns:a="http://schemas.openxmlformats.org/drawingml/2006/main" noGrp="1"/>
+          </p:cNvSpPr>
+          <p:nvPr/>
+        </p:nvSpPr>
+        <p:spPr>
+          <a:xfrm xmlns:a="http://schemas.openxmlformats.org/drawingml/2006/main">
+            <a:off x="2238375" y="3371850"/>
+            <a:ext cx="1571625" cy="419100"/>
+          </a:xfrm>
+          <a:prstGeom xmlns:a="http://schemas.openxmlformats.org/drawingml/2006/main" prst="rect">
+            <a:avLst/>
+          </a:prstGeom>
+          <a:solidFill xmlns:a="http://schemas.openxmlformats.org/drawingml/2006/main">
+            <a:srgbClr val="EEF2F7"/>
+          </a:solidFill>
+          <a:ln xmlns:a="http://schemas.openxmlformats.org/drawingml/2006/main" w="9525">
+            <a:solidFill>
+              <a:srgbClr val="D9DEE7"/>
+            </a:solidFill>
+            <a:prstDash val="solid"/>
+          </a:ln>
+        </p:spPr>
+      </p:sp>
+      <p:sp>
+        <p:nvSpPr>
+          <p:cNvPr id="20" name="">
+            <a:extLst xmlns:a="http://schemas.openxmlformats.org/drawingml/2006/main">
+              <a:ext uri="{FF2B5EF4-FFF2-40B4-BE49-F238E27FC236}">
+                <a16:creationId xmlns:a16="http://schemas.microsoft.com/office/drawing/2014/main" id="{CEE677C9-FC23-40B9-843C-5F3F267795D4}"/>
+              </a:ext>
+            </a:extLst>
+          </p:cNvPr>
+          <p:cNvSpPr>
+            <a:spLocks xmlns:a="http://schemas.openxmlformats.org/drawingml/2006/main" noGrp="1"/>
+          </p:cNvSpPr>
+          <p:nvPr/>
+        </p:nvSpPr>
+        <p:spPr>
+          <a:xfrm xmlns:a="http://schemas.openxmlformats.org/drawingml/2006/main">
+            <a:off x="2333625" y="3467100"/>
+            <a:ext cx="1381125" cy="228600"/>
           </a:xfrm>
           <a:prstGeom xmlns:a="http://schemas.openxmlformats.org/drawingml/2006/main" prst="rect">
             <a:avLst/>
@@ -6922,47 +6688,80 @@
           <a:lstStyle xmlns:a="http://schemas.openxmlformats.org/drawingml/2006/main"/>
           <a:p xmlns:a="http://schemas.openxmlformats.org/drawingml/2006/main">
             <a:pPr algn="l">
-              <a:defRPr sz="900" b="1">
-                <a:solidFill>
-                  <a:srgbClr val="111827"/>
-                </a:solidFill>
-                <a:latin typeface="Aptos"/>
-                <a:ea typeface="Aptos"/>
-                <a:cs typeface="Aptos"/>
-              </a:defRPr>
-            </a:pPr>
-            <a:r>
-              <a:rPr sz="900" b="1">
-                <a:solidFill>
-                  <a:srgbClr val="111827"/>
-                </a:solidFill>
-                <a:latin typeface="Aptos"/>
-                <a:ea typeface="Aptos"/>
-                <a:cs typeface="Aptos"/>
-              </a:rPr>
-              <a:t>Train</a:t>
-            </a:r>
-          </a:p>
-        </p:txBody>
-      </p:sp>
-      <p:sp>
-        <p:nvSpPr>
-          <p:cNvPr id="26" name="">
-            <a:extLst xmlns:a="http://schemas.openxmlformats.org/drawingml/2006/main">
-              <a:ext uri="{FF2B5EF4-FFF2-40B4-BE49-F238E27FC236}">
-                <a16:creationId xmlns:a16="http://schemas.microsoft.com/office/drawing/2014/main" id="{C0DEF3C1-7DB3-48EF-8AF8-E75F76D461A1}"/>
-              </a:ext>
-            </a:extLst>
-          </p:cNvPr>
-          <p:cNvSpPr>
-            <a:spLocks xmlns:a="http://schemas.openxmlformats.org/drawingml/2006/main" noGrp="1"/>
-          </p:cNvSpPr>
-          <p:nvPr/>
-        </p:nvSpPr>
-        <p:spPr>
-          <a:xfrm xmlns:a="http://schemas.openxmlformats.org/drawingml/2006/main">
-            <a:off x="3600450" y="5276850"/>
-            <a:ext cx="1276350" cy="171450"/>
+              <a:defRPr sz="825" b="1">
+                <a:solidFill>
+                  <a:srgbClr val="111827"/>
+                </a:solidFill>
+                <a:latin typeface="Aptos"/>
+                <a:ea typeface="Aptos"/>
+                <a:cs typeface="Aptos"/>
+              </a:defRPr>
+            </a:pPr>
+            <a:r>
+              <a:rPr sz="825" b="1">
+                <a:solidFill>
+                  <a:srgbClr val="111827"/>
+                </a:solidFill>
+                <a:latin typeface="Aptos"/>
+                <a:ea typeface="Aptos"/>
+                <a:cs typeface="Aptos"/>
+              </a:rPr>
+              <a:t>Litho levels</a:t>
+            </a:r>
+          </a:p>
+        </p:txBody>
+      </p:sp>
+      <p:sp>
+        <p:nvSpPr>
+          <p:cNvPr id="21" name="">
+            <a:extLst xmlns:a="http://schemas.openxmlformats.org/drawingml/2006/main">
+              <a:ext uri="{FF2B5EF4-FFF2-40B4-BE49-F238E27FC236}">
+                <a16:creationId xmlns:a16="http://schemas.microsoft.com/office/drawing/2014/main" id="{298CA42E-F399-4C43-A17C-B88F9049C9C2}"/>
+              </a:ext>
+            </a:extLst>
+          </p:cNvPr>
+          <p:cNvSpPr>
+            <a:spLocks xmlns:a="http://schemas.openxmlformats.org/drawingml/2006/main" noGrp="1"/>
+          </p:cNvSpPr>
+          <p:nvPr/>
+        </p:nvSpPr>
+        <p:spPr>
+          <a:xfrm xmlns:a="http://schemas.openxmlformats.org/drawingml/2006/main">
+            <a:off x="3810000" y="3371850"/>
+            <a:ext cx="1619250" cy="419100"/>
+          </a:xfrm>
+          <a:prstGeom xmlns:a="http://schemas.openxmlformats.org/drawingml/2006/main" prst="rect">
+            <a:avLst/>
+          </a:prstGeom>
+          <a:solidFill xmlns:a="http://schemas.openxmlformats.org/drawingml/2006/main">
+            <a:srgbClr val="EEF2F7"/>
+          </a:solidFill>
+          <a:ln xmlns:a="http://schemas.openxmlformats.org/drawingml/2006/main" w="9525">
+            <a:solidFill>
+              <a:srgbClr val="D9DEE7"/>
+            </a:solidFill>
+            <a:prstDash val="solid"/>
+          </a:ln>
+        </p:spPr>
+      </p:sp>
+      <p:sp>
+        <p:nvSpPr>
+          <p:cNvPr id="22" name="">
+            <a:extLst xmlns:a="http://schemas.openxmlformats.org/drawingml/2006/main">
+              <a:ext uri="{FF2B5EF4-FFF2-40B4-BE49-F238E27FC236}">
+                <a16:creationId xmlns:a16="http://schemas.microsoft.com/office/drawing/2014/main" id="{97BEF176-23EE-498A-B051-6BF4C4C5C330}"/>
+              </a:ext>
+            </a:extLst>
+          </p:cNvPr>
+          <p:cNvSpPr>
+            <a:spLocks xmlns:a="http://schemas.openxmlformats.org/drawingml/2006/main" noGrp="1"/>
+          </p:cNvSpPr>
+          <p:nvPr/>
+        </p:nvSpPr>
+        <p:spPr>
+          <a:xfrm xmlns:a="http://schemas.openxmlformats.org/drawingml/2006/main">
+            <a:off x="3905250" y="3467100"/>
+            <a:ext cx="1428750" cy="228600"/>
           </a:xfrm>
           <a:prstGeom xmlns:a="http://schemas.openxmlformats.org/drawingml/2006/main" prst="rect">
             <a:avLst/>
@@ -6986,53 +6785,53 @@
           <a:lstStyle xmlns:a="http://schemas.openxmlformats.org/drawingml/2006/main"/>
           <a:p xmlns:a="http://schemas.openxmlformats.org/drawingml/2006/main">
             <a:pPr algn="l">
-              <a:defRPr sz="675" b="0">
-                <a:solidFill>
-                  <a:srgbClr val="5B6472"/>
-                </a:solidFill>
-                <a:latin typeface="Aptos"/>
-                <a:ea typeface="Aptos"/>
-                <a:cs typeface="Aptos"/>
-              </a:defRPr>
-            </a:pPr>
-            <a:r>
-              <a:rPr sz="675" b="0">
-                <a:solidFill>
-                  <a:srgbClr val="5B6472"/>
-                </a:solidFill>
-                <a:latin typeface="Aptos"/>
-                <a:ea typeface="Aptos"/>
-                <a:cs typeface="Aptos"/>
-              </a:rPr>
-              <a:t>families</a:t>
-            </a:r>
-          </a:p>
-        </p:txBody>
-      </p:sp>
-      <p:sp>
-        <p:nvSpPr>
-          <p:cNvPr id="27" name="">
-            <a:extLst xmlns:a="http://schemas.openxmlformats.org/drawingml/2006/main">
-              <a:ext uri="{FF2B5EF4-FFF2-40B4-BE49-F238E27FC236}">
-                <a16:creationId xmlns:a16="http://schemas.microsoft.com/office/drawing/2014/main" id="{96D72BF8-71C3-4C8A-B967-2097F93856DE}"/>
-              </a:ext>
-            </a:extLst>
-          </p:cNvPr>
-          <p:cNvSpPr>
-            <a:spLocks xmlns:a="http://schemas.openxmlformats.org/drawingml/2006/main" noGrp="1"/>
-          </p:cNvSpPr>
-          <p:nvPr/>
-        </p:nvSpPr>
-        <p:spPr>
-          <a:xfrm xmlns:a="http://schemas.openxmlformats.org/drawingml/2006/main">
-            <a:off x="5524500" y="4476750"/>
-            <a:ext cx="1619250" cy="1047750"/>
-          </a:xfrm>
-          <a:prstGeom xmlns:a="http://schemas.openxmlformats.org/drawingml/2006/main" prst="rect">
-            <a:avLst/>
-          </a:prstGeom>
-          <a:solidFill xmlns:a="http://schemas.openxmlformats.org/drawingml/2006/main">
-            <a:srgbClr val="FFFFFF"/>
+              <a:defRPr sz="825" b="1">
+                <a:solidFill>
+                  <a:srgbClr val="111827"/>
+                </a:solidFill>
+                <a:latin typeface="Aptos"/>
+                <a:ea typeface="Aptos"/>
+                <a:cs typeface="Aptos"/>
+              </a:defRPr>
+            </a:pPr>
+            <a:r>
+              <a:rPr sz="825" b="1">
+                <a:solidFill>
+                  <a:srgbClr val="111827"/>
+                </a:solidFill>
+                <a:latin typeface="Aptos"/>
+                <a:ea typeface="Aptos"/>
+                <a:cs typeface="Aptos"/>
+              </a:rPr>
+              <a:t>Extra via</a:t>
+            </a:r>
+          </a:p>
+        </p:txBody>
+      </p:sp>
+      <p:sp>
+        <p:nvSpPr>
+          <p:cNvPr id="23" name="">
+            <a:extLst xmlns:a="http://schemas.openxmlformats.org/drawingml/2006/main">
+              <a:ext uri="{FF2B5EF4-FFF2-40B4-BE49-F238E27FC236}">
+                <a16:creationId xmlns:a16="http://schemas.microsoft.com/office/drawing/2014/main" id="{799C680E-5258-49E9-98A1-C71BAE82331D}"/>
+              </a:ext>
+            </a:extLst>
+          </p:cNvPr>
+          <p:cNvSpPr>
+            <a:spLocks xmlns:a="http://schemas.openxmlformats.org/drawingml/2006/main" noGrp="1"/>
+          </p:cNvSpPr>
+          <p:nvPr/>
+        </p:nvSpPr>
+        <p:spPr>
+          <a:xfrm xmlns:a="http://schemas.openxmlformats.org/drawingml/2006/main">
+            <a:off x="5429250" y="3371850"/>
+            <a:ext cx="1571625" cy="419100"/>
+          </a:xfrm>
+          <a:prstGeom xmlns:a="http://schemas.openxmlformats.org/drawingml/2006/main" prst="rect">
+            <a:avLst/>
+          </a:prstGeom>
+          <a:solidFill xmlns:a="http://schemas.openxmlformats.org/drawingml/2006/main">
+            <a:srgbClr val="EEF2F7"/>
           </a:solidFill>
           <a:ln xmlns:a="http://schemas.openxmlformats.org/drawingml/2006/main" w="9525">
             <a:solidFill>
@@ -7044,22 +6843,22 @@
       </p:sp>
       <p:sp>
         <p:nvSpPr>
-          <p:cNvPr id="28" name="">
-            <a:extLst xmlns:a="http://schemas.openxmlformats.org/drawingml/2006/main">
-              <a:ext uri="{FF2B5EF4-FFF2-40B4-BE49-F238E27FC236}">
-                <a16:creationId xmlns:a16="http://schemas.microsoft.com/office/drawing/2014/main" id="{3B5B4B24-C24A-4DA5-9EE7-DD5A4119EC73}"/>
-              </a:ext>
-            </a:extLst>
-          </p:cNvPr>
-          <p:cNvSpPr>
-            <a:spLocks xmlns:a="http://schemas.openxmlformats.org/drawingml/2006/main" noGrp="1"/>
-          </p:cNvSpPr>
-          <p:nvPr/>
-        </p:nvSpPr>
-        <p:spPr>
-          <a:xfrm xmlns:a="http://schemas.openxmlformats.org/drawingml/2006/main">
-            <a:off x="5695950" y="4648200"/>
-            <a:ext cx="1276350" cy="400050"/>
+          <p:cNvPr id="24" name="">
+            <a:extLst xmlns:a="http://schemas.openxmlformats.org/drawingml/2006/main">
+              <a:ext uri="{FF2B5EF4-FFF2-40B4-BE49-F238E27FC236}">
+                <a16:creationId xmlns:a16="http://schemas.microsoft.com/office/drawing/2014/main" id="{39FCA33F-F003-4A12-97DF-CA67801BEAFC}"/>
+              </a:ext>
+            </a:extLst>
+          </p:cNvPr>
+          <p:cNvSpPr>
+            <a:spLocks xmlns:a="http://schemas.openxmlformats.org/drawingml/2006/main" noGrp="1"/>
+          </p:cNvSpPr>
+          <p:nvPr/>
+        </p:nvSpPr>
+        <p:spPr>
+          <a:xfrm xmlns:a="http://schemas.openxmlformats.org/drawingml/2006/main">
+            <a:off x="5524500" y="3467100"/>
+            <a:ext cx="1381125" cy="228600"/>
           </a:xfrm>
           <a:prstGeom xmlns:a="http://schemas.openxmlformats.org/drawingml/2006/main" prst="rect">
             <a:avLst/>
@@ -7083,47 +6882,80 @@
           <a:lstStyle xmlns:a="http://schemas.openxmlformats.org/drawingml/2006/main"/>
           <a:p xmlns:a="http://schemas.openxmlformats.org/drawingml/2006/main">
             <a:pPr algn="l">
-              <a:defRPr sz="2550" b="1">
-                <a:solidFill>
-                  <a:srgbClr val="2563EB"/>
-                </a:solidFill>
-                <a:latin typeface="Aptos"/>
-                <a:ea typeface="Aptos"/>
-                <a:cs typeface="Aptos"/>
-              </a:defRPr>
-            </a:pPr>
-            <a:r>
-              <a:rPr sz="2550" b="1">
-                <a:solidFill>
-                  <a:srgbClr val="2563EB"/>
-                </a:solidFill>
-                <a:latin typeface="Aptos"/>
-                <a:ea typeface="Aptos"/>
-                <a:cs typeface="Aptos"/>
-              </a:rPr>
-              <a:t>3</a:t>
-            </a:r>
-          </a:p>
-        </p:txBody>
-      </p:sp>
-      <p:sp>
-        <p:nvSpPr>
-          <p:cNvPr id="29" name="">
-            <a:extLst xmlns:a="http://schemas.openxmlformats.org/drawingml/2006/main">
-              <a:ext uri="{FF2B5EF4-FFF2-40B4-BE49-F238E27FC236}">
-                <a16:creationId xmlns:a16="http://schemas.microsoft.com/office/drawing/2014/main" id="{F44B610B-1F85-4156-AFC7-8E87BEBE4F32}"/>
-              </a:ext>
-            </a:extLst>
-          </p:cNvPr>
-          <p:cNvSpPr>
-            <a:spLocks xmlns:a="http://schemas.openxmlformats.org/drawingml/2006/main" noGrp="1"/>
-          </p:cNvSpPr>
-          <p:nvPr/>
-        </p:nvSpPr>
-        <p:spPr>
-          <a:xfrm xmlns:a="http://schemas.openxmlformats.org/drawingml/2006/main">
-            <a:off x="5695950" y="5076825"/>
-            <a:ext cx="1276350" cy="190500"/>
+              <a:defRPr sz="825" b="1">
+                <a:solidFill>
+                  <a:srgbClr val="111827"/>
+                </a:solidFill>
+                <a:latin typeface="Aptos"/>
+                <a:ea typeface="Aptos"/>
+                <a:cs typeface="Aptos"/>
+              </a:defRPr>
+            </a:pPr>
+            <a:r>
+              <a:rPr sz="825" b="1">
+                <a:solidFill>
+                  <a:srgbClr val="111827"/>
+                </a:solidFill>
+                <a:latin typeface="Aptos"/>
+                <a:ea typeface="Aptos"/>
+                <a:cs typeface="Aptos"/>
+              </a:rPr>
+              <a:t>Spacer rate</a:t>
+            </a:r>
+          </a:p>
+        </p:txBody>
+      </p:sp>
+      <p:sp>
+        <p:nvSpPr>
+          <p:cNvPr id="25" name="">
+            <a:extLst xmlns:a="http://schemas.openxmlformats.org/drawingml/2006/main">
+              <a:ext uri="{FF2B5EF4-FFF2-40B4-BE49-F238E27FC236}">
+                <a16:creationId xmlns:a16="http://schemas.microsoft.com/office/drawing/2014/main" id="{73AB7023-7AF4-457B-A67B-2FF71AF205B4}"/>
+              </a:ext>
+            </a:extLst>
+          </p:cNvPr>
+          <p:cNvSpPr>
+            <a:spLocks xmlns:a="http://schemas.openxmlformats.org/drawingml/2006/main" noGrp="1"/>
+          </p:cNvSpPr>
+          <p:nvPr/>
+        </p:nvSpPr>
+        <p:spPr>
+          <a:xfrm xmlns:a="http://schemas.openxmlformats.org/drawingml/2006/main">
+            <a:off x="7000875" y="3371850"/>
+            <a:ext cx="1666875" cy="419100"/>
+          </a:xfrm>
+          <a:prstGeom xmlns:a="http://schemas.openxmlformats.org/drawingml/2006/main" prst="rect">
+            <a:avLst/>
+          </a:prstGeom>
+          <a:solidFill xmlns:a="http://schemas.openxmlformats.org/drawingml/2006/main">
+            <a:srgbClr val="EEF2F7"/>
+          </a:solidFill>
+          <a:ln xmlns:a="http://schemas.openxmlformats.org/drawingml/2006/main" w="9525">
+            <a:solidFill>
+              <a:srgbClr val="D9DEE7"/>
+            </a:solidFill>
+            <a:prstDash val="solid"/>
+          </a:ln>
+        </p:spPr>
+      </p:sp>
+      <p:sp>
+        <p:nvSpPr>
+          <p:cNvPr id="26" name="">
+            <a:extLst xmlns:a="http://schemas.openxmlformats.org/drawingml/2006/main">
+              <a:ext uri="{FF2B5EF4-FFF2-40B4-BE49-F238E27FC236}">
+                <a16:creationId xmlns:a16="http://schemas.microsoft.com/office/drawing/2014/main" id="{FE893820-13C9-4E3C-997A-193612F034EE}"/>
+              </a:ext>
+            </a:extLst>
+          </p:cNvPr>
+          <p:cNvSpPr>
+            <a:spLocks xmlns:a="http://schemas.openxmlformats.org/drawingml/2006/main" noGrp="1"/>
+          </p:cNvSpPr>
+          <p:nvPr/>
+        </p:nvSpPr>
+        <p:spPr>
+          <a:xfrm xmlns:a="http://schemas.openxmlformats.org/drawingml/2006/main">
+            <a:off x="7096125" y="3467100"/>
+            <a:ext cx="1476375" cy="228600"/>
           </a:xfrm>
           <a:prstGeom xmlns:a="http://schemas.openxmlformats.org/drawingml/2006/main" prst="rect">
             <a:avLst/>
@@ -7147,47 +6979,80 @@
           <a:lstStyle xmlns:a="http://schemas.openxmlformats.org/drawingml/2006/main"/>
           <a:p xmlns:a="http://schemas.openxmlformats.org/drawingml/2006/main">
             <a:pPr algn="l">
-              <a:defRPr sz="900" b="1">
-                <a:solidFill>
-                  <a:srgbClr val="111827"/>
-                </a:solidFill>
-                <a:latin typeface="Aptos"/>
-                <a:ea typeface="Aptos"/>
-                <a:cs typeface="Aptos"/>
-              </a:defRPr>
-            </a:pPr>
-            <a:r>
-              <a:rPr sz="900" b="1">
-                <a:solidFill>
-                  <a:srgbClr val="111827"/>
-                </a:solidFill>
-                <a:latin typeface="Aptos"/>
-                <a:ea typeface="Aptos"/>
-                <a:cs typeface="Aptos"/>
-              </a:rPr>
-              <a:t>OOD Test</a:t>
-            </a:r>
-          </a:p>
-        </p:txBody>
-      </p:sp>
-      <p:sp>
-        <p:nvSpPr>
-          <p:cNvPr id="30" name="">
-            <a:extLst xmlns:a="http://schemas.openxmlformats.org/drawingml/2006/main">
-              <a:ext uri="{FF2B5EF4-FFF2-40B4-BE49-F238E27FC236}">
-                <a16:creationId xmlns:a16="http://schemas.microsoft.com/office/drawing/2014/main" id="{9B24004D-D588-4E91-A175-3E60484A2196}"/>
-              </a:ext>
-            </a:extLst>
-          </p:cNvPr>
-          <p:cNvSpPr>
-            <a:spLocks xmlns:a="http://schemas.openxmlformats.org/drawingml/2006/main" noGrp="1"/>
-          </p:cNvSpPr>
-          <p:nvPr/>
-        </p:nvSpPr>
-        <p:spPr>
-          <a:xfrm xmlns:a="http://schemas.openxmlformats.org/drawingml/2006/main">
-            <a:off x="5695950" y="5276850"/>
-            <a:ext cx="1276350" cy="171450"/>
+              <a:defRPr sz="825" b="1">
+                <a:solidFill>
+                  <a:srgbClr val="111827"/>
+                </a:solidFill>
+                <a:latin typeface="Aptos"/>
+                <a:ea typeface="Aptos"/>
+                <a:cs typeface="Aptos"/>
+              </a:defRPr>
+            </a:pPr>
+            <a:r>
+              <a:rPr sz="825" b="1">
+                <a:solidFill>
+                  <a:srgbClr val="111827"/>
+                </a:solidFill>
+                <a:latin typeface="Aptos"/>
+                <a:ea typeface="Aptos"/>
+                <a:cs typeface="Aptos"/>
+              </a:rPr>
+              <a:t>Role</a:t>
+            </a:r>
+          </a:p>
+        </p:txBody>
+      </p:sp>
+      <p:sp>
+        <p:nvSpPr>
+          <p:cNvPr id="27" name="">
+            <a:extLst xmlns:a="http://schemas.openxmlformats.org/drawingml/2006/main">
+              <a:ext uri="{FF2B5EF4-FFF2-40B4-BE49-F238E27FC236}">
+                <a16:creationId xmlns:a16="http://schemas.microsoft.com/office/drawing/2014/main" id="{76358D15-09CD-4E3C-9B80-109B8B62AD3C}"/>
+              </a:ext>
+            </a:extLst>
+          </p:cNvPr>
+          <p:cNvSpPr>
+            <a:spLocks xmlns:a="http://schemas.openxmlformats.org/drawingml/2006/main" noGrp="1"/>
+          </p:cNvSpPr>
+          <p:nvPr/>
+        </p:nvSpPr>
+        <p:spPr>
+          <a:xfrm xmlns:a="http://schemas.openxmlformats.org/drawingml/2006/main">
+            <a:off x="8667750" y="3371850"/>
+            <a:ext cx="2333625" cy="419100"/>
+          </a:xfrm>
+          <a:prstGeom xmlns:a="http://schemas.openxmlformats.org/drawingml/2006/main" prst="rect">
+            <a:avLst/>
+          </a:prstGeom>
+          <a:solidFill xmlns:a="http://schemas.openxmlformats.org/drawingml/2006/main">
+            <a:srgbClr val="EEF2F7"/>
+          </a:solidFill>
+          <a:ln xmlns:a="http://schemas.openxmlformats.org/drawingml/2006/main" w="9525">
+            <a:solidFill>
+              <a:srgbClr val="D9DEE7"/>
+            </a:solidFill>
+            <a:prstDash val="solid"/>
+          </a:ln>
+        </p:spPr>
+      </p:sp>
+      <p:sp>
+        <p:nvSpPr>
+          <p:cNvPr id="28" name="">
+            <a:extLst xmlns:a="http://schemas.openxmlformats.org/drawingml/2006/main">
+              <a:ext uri="{FF2B5EF4-FFF2-40B4-BE49-F238E27FC236}">
+                <a16:creationId xmlns:a16="http://schemas.microsoft.com/office/drawing/2014/main" id="{EF3643EF-4EDA-49A8-8D3F-F3C021091718}"/>
+              </a:ext>
+            </a:extLst>
+          </p:cNvPr>
+          <p:cNvSpPr>
+            <a:spLocks xmlns:a="http://schemas.openxmlformats.org/drawingml/2006/main" noGrp="1"/>
+          </p:cNvSpPr>
+          <p:nvPr/>
+        </p:nvSpPr>
+        <p:spPr>
+          <a:xfrm xmlns:a="http://schemas.openxmlformats.org/drawingml/2006/main">
+            <a:off x="8763000" y="3467100"/>
+            <a:ext cx="2143125" cy="228600"/>
           </a:xfrm>
           <a:prstGeom xmlns:a="http://schemas.openxmlformats.org/drawingml/2006/main" prst="rect">
             <a:avLst/>
@@ -7211,47 +7076,47 @@
           <a:lstStyle xmlns:a="http://schemas.openxmlformats.org/drawingml/2006/main"/>
           <a:p xmlns:a="http://schemas.openxmlformats.org/drawingml/2006/main">
             <a:pPr algn="l">
-              <a:defRPr sz="675" b="0">
-                <a:solidFill>
-                  <a:srgbClr val="5B6472"/>
-                </a:solidFill>
-                <a:latin typeface="Aptos"/>
-                <a:ea typeface="Aptos"/>
-                <a:cs typeface="Aptos"/>
-              </a:defRPr>
-            </a:pPr>
-            <a:r>
-              <a:rPr sz="675" b="0">
-                <a:solidFill>
-                  <a:srgbClr val="5B6472"/>
-                </a:solidFill>
-                <a:latin typeface="Aptos"/>
-                <a:ea typeface="Aptos"/>
-                <a:cs typeface="Aptos"/>
-              </a:rPr>
-              <a:t>families</a:t>
-            </a:r>
-          </a:p>
-        </p:txBody>
-      </p:sp>
-      <p:sp>
-        <p:nvSpPr>
-          <p:cNvPr id="31" name="">
-            <a:extLst xmlns:a="http://schemas.openxmlformats.org/drawingml/2006/main">
-              <a:ext uri="{FF2B5EF4-FFF2-40B4-BE49-F238E27FC236}">
-                <a16:creationId xmlns:a16="http://schemas.microsoft.com/office/drawing/2014/main" id="{29D4CAF3-8F67-4325-8E5D-E4E3BC0A1B70}"/>
-              </a:ext>
-            </a:extLst>
-          </p:cNvPr>
-          <p:cNvSpPr>
-            <a:spLocks xmlns:a="http://schemas.openxmlformats.org/drawingml/2006/main" noGrp="1"/>
-          </p:cNvSpPr>
-          <p:nvPr/>
-        </p:nvSpPr>
-        <p:spPr>
-          <a:xfrm xmlns:a="http://schemas.openxmlformats.org/drawingml/2006/main">
-            <a:off x="7620000" y="4476750"/>
-            <a:ext cx="1619250" cy="1047750"/>
+              <a:defRPr sz="825" b="1">
+                <a:solidFill>
+                  <a:srgbClr val="111827"/>
+                </a:solidFill>
+                <a:latin typeface="Aptos"/>
+                <a:ea typeface="Aptos"/>
+                <a:cs typeface="Aptos"/>
+              </a:defRPr>
+            </a:pPr>
+            <a:r>
+              <a:rPr sz="825" b="1">
+                <a:solidFill>
+                  <a:srgbClr val="111827"/>
+                </a:solidFill>
+                <a:latin typeface="Aptos"/>
+                <a:ea typeface="Aptos"/>
+                <a:cs typeface="Aptos"/>
+              </a:rPr>
+              <a:t>Why it matters</a:t>
+            </a:r>
+          </a:p>
+        </p:txBody>
+      </p:sp>
+      <p:sp>
+        <p:nvSpPr>
+          <p:cNvPr id="29" name="">
+            <a:extLst xmlns:a="http://schemas.openxmlformats.org/drawingml/2006/main">
+              <a:ext uri="{FF2B5EF4-FFF2-40B4-BE49-F238E27FC236}">
+                <a16:creationId xmlns:a16="http://schemas.microsoft.com/office/drawing/2014/main" id="{B7A70D63-0459-4B77-BC8C-0CB1238EA96D}"/>
+              </a:ext>
+            </a:extLst>
+          </p:cNvPr>
+          <p:cNvSpPr>
+            <a:spLocks xmlns:a="http://schemas.openxmlformats.org/drawingml/2006/main" noGrp="1"/>
+          </p:cNvSpPr>
+          <p:nvPr/>
+        </p:nvSpPr>
+        <p:spPr>
+          <a:xfrm xmlns:a="http://schemas.openxmlformats.org/drawingml/2006/main">
+            <a:off x="666750" y="3790950"/>
+            <a:ext cx="1571625" cy="419100"/>
           </a:xfrm>
           <a:prstGeom xmlns:a="http://schemas.openxmlformats.org/drawingml/2006/main" prst="rect">
             <a:avLst/>
@@ -7269,22 +7134,22 @@
       </p:sp>
       <p:sp>
         <p:nvSpPr>
-          <p:cNvPr id="32" name="">
-            <a:extLst xmlns:a="http://schemas.openxmlformats.org/drawingml/2006/main">
-              <a:ext uri="{FF2B5EF4-FFF2-40B4-BE49-F238E27FC236}">
-                <a16:creationId xmlns:a16="http://schemas.microsoft.com/office/drawing/2014/main" id="{146CECB4-5C33-4BA5-A429-A72F818B2986}"/>
-              </a:ext>
-            </a:extLst>
-          </p:cNvPr>
-          <p:cNvSpPr>
-            <a:spLocks xmlns:a="http://schemas.openxmlformats.org/drawingml/2006/main" noGrp="1"/>
-          </p:cNvSpPr>
-          <p:nvPr/>
-        </p:nvSpPr>
-        <p:spPr>
-          <a:xfrm xmlns:a="http://schemas.openxmlformats.org/drawingml/2006/main">
-            <a:off x="7791450" y="4648200"/>
-            <a:ext cx="1276350" cy="400050"/>
+          <p:cNvPr id="30" name="">
+            <a:extLst xmlns:a="http://schemas.openxmlformats.org/drawingml/2006/main">
+              <a:ext uri="{FF2B5EF4-FFF2-40B4-BE49-F238E27FC236}">
+                <a16:creationId xmlns:a16="http://schemas.microsoft.com/office/drawing/2014/main" id="{64471C32-AF5E-453D-8E7B-A12625246EA5}"/>
+              </a:ext>
+            </a:extLst>
+          </p:cNvPr>
+          <p:cNvSpPr>
+            <a:spLocks xmlns:a="http://schemas.openxmlformats.org/drawingml/2006/main" noGrp="1"/>
+          </p:cNvSpPr>
+          <p:nvPr/>
+        </p:nvSpPr>
+        <p:spPr>
+          <a:xfrm xmlns:a="http://schemas.openxmlformats.org/drawingml/2006/main">
+            <a:off x="762000" y="3886200"/>
+            <a:ext cx="1381125" cy="228600"/>
           </a:xfrm>
           <a:prstGeom xmlns:a="http://schemas.openxmlformats.org/drawingml/2006/main" prst="rect">
             <a:avLst/>
@@ -7308,47 +7173,80 @@
           <a:lstStyle xmlns:a="http://schemas.openxmlformats.org/drawingml/2006/main"/>
           <a:p xmlns:a="http://schemas.openxmlformats.org/drawingml/2006/main">
             <a:pPr algn="l">
-              <a:defRPr sz="2550" b="1">
-                <a:solidFill>
-                  <a:srgbClr val="B42318"/>
-                </a:solidFill>
-                <a:latin typeface="Aptos"/>
-                <a:ea typeface="Aptos"/>
-                <a:cs typeface="Aptos"/>
-              </a:defRPr>
-            </a:pPr>
-            <a:r>
-              <a:rPr sz="2550" b="1">
-                <a:solidFill>
-                  <a:srgbClr val="B42318"/>
-                </a:solidFill>
-                <a:latin typeface="Aptos"/>
-                <a:ea typeface="Aptos"/>
-                <a:cs typeface="Aptos"/>
-              </a:rPr>
-              <a:t>0</a:t>
-            </a:r>
-          </a:p>
-        </p:txBody>
-      </p:sp>
-      <p:sp>
-        <p:nvSpPr>
-          <p:cNvPr id="33" name="">
-            <a:extLst xmlns:a="http://schemas.openxmlformats.org/drawingml/2006/main">
-              <a:ext uri="{FF2B5EF4-FFF2-40B4-BE49-F238E27FC236}">
-                <a16:creationId xmlns:a16="http://schemas.microsoft.com/office/drawing/2014/main" id="{CB882ACA-3491-498A-AFF2-576449513733}"/>
-              </a:ext>
-            </a:extLst>
-          </p:cNvPr>
-          <p:cNvSpPr>
-            <a:spLocks xmlns:a="http://schemas.openxmlformats.org/drawingml/2006/main" noGrp="1"/>
-          </p:cNvSpPr>
-          <p:nvPr/>
-        </p:nvSpPr>
-        <p:spPr>
-          <a:xfrm xmlns:a="http://schemas.openxmlformats.org/drawingml/2006/main">
-            <a:off x="7791450" y="5076825"/>
-            <a:ext cx="1276350" cy="190500"/>
+              <a:defRPr sz="825" b="1">
+                <a:solidFill>
+                  <a:srgbClr val="111827"/>
+                </a:solidFill>
+                <a:latin typeface="Aptos"/>
+                <a:ea typeface="Aptos"/>
+                <a:cs typeface="Aptos"/>
+              </a:defRPr>
+            </a:pPr>
+            <a:r>
+              <a:rPr sz="825" b="1">
+                <a:solidFill>
+                  <a:srgbClr val="111827"/>
+                </a:solidFill>
+                <a:latin typeface="Aptos"/>
+                <a:ea typeface="Aptos"/>
+                <a:cs typeface="Aptos"/>
+              </a:rPr>
+              <a:t>Organizer</a:t>
+            </a:r>
+          </a:p>
+        </p:txBody>
+      </p:sp>
+      <p:sp>
+        <p:nvSpPr>
+          <p:cNvPr id="31" name="">
+            <a:extLst xmlns:a="http://schemas.openxmlformats.org/drawingml/2006/main">
+              <a:ext uri="{FF2B5EF4-FFF2-40B4-BE49-F238E27FC236}">
+                <a16:creationId xmlns:a16="http://schemas.microsoft.com/office/drawing/2014/main" id="{74336225-697F-47CE-B4F9-3EAE58D1B36B}"/>
+              </a:ext>
+            </a:extLst>
+          </p:cNvPr>
+          <p:cNvSpPr>
+            <a:spLocks xmlns:a="http://schemas.openxmlformats.org/drawingml/2006/main" noGrp="1"/>
+          </p:cNvSpPr>
+          <p:nvPr/>
+        </p:nvSpPr>
+        <p:spPr>
+          <a:xfrm xmlns:a="http://schemas.openxmlformats.org/drawingml/2006/main">
+            <a:off x="2238375" y="3790950"/>
+            <a:ext cx="1571625" cy="419100"/>
+          </a:xfrm>
+          <a:prstGeom xmlns:a="http://schemas.openxmlformats.org/drawingml/2006/main" prst="rect">
+            <a:avLst/>
+          </a:prstGeom>
+          <a:solidFill xmlns:a="http://schemas.openxmlformats.org/drawingml/2006/main">
+            <a:srgbClr val="FFFFFF"/>
+          </a:solidFill>
+          <a:ln xmlns:a="http://schemas.openxmlformats.org/drawingml/2006/main" w="9525">
+            <a:solidFill>
+              <a:srgbClr val="D9DEE7"/>
+            </a:solidFill>
+            <a:prstDash val="solid"/>
+          </a:ln>
+        </p:spPr>
+      </p:sp>
+      <p:sp>
+        <p:nvSpPr>
+          <p:cNvPr id="32" name="">
+            <a:extLst xmlns:a="http://schemas.openxmlformats.org/drawingml/2006/main">
+              <a:ext uri="{FF2B5EF4-FFF2-40B4-BE49-F238E27FC236}">
+                <a16:creationId xmlns:a16="http://schemas.microsoft.com/office/drawing/2014/main" id="{7B1F5E78-449C-4DC0-ABD4-075C7E331EA7}"/>
+              </a:ext>
+            </a:extLst>
+          </p:cNvPr>
+          <p:cNvSpPr>
+            <a:spLocks xmlns:a="http://schemas.openxmlformats.org/drawingml/2006/main" noGrp="1"/>
+          </p:cNvSpPr>
+          <p:nvPr/>
+        </p:nvSpPr>
+        <p:spPr>
+          <a:xfrm xmlns:a="http://schemas.openxmlformats.org/drawingml/2006/main">
+            <a:off x="2333625" y="3886200"/>
+            <a:ext cx="1381125" cy="228600"/>
           </a:xfrm>
           <a:prstGeom xmlns:a="http://schemas.openxmlformats.org/drawingml/2006/main" prst="rect">
             <a:avLst/>
@@ -7372,47 +7270,80 @@
           <a:lstStyle xmlns:a="http://schemas.openxmlformats.org/drawingml/2006/main"/>
           <a:p xmlns:a="http://schemas.openxmlformats.org/drawingml/2006/main">
             <a:pPr algn="l">
-              <a:defRPr sz="900" b="1">
-                <a:solidFill>
-                  <a:srgbClr val="111827"/>
-                </a:solidFill>
-                <a:latin typeface="Aptos"/>
-                <a:ea typeface="Aptos"/>
-                <a:cs typeface="Aptos"/>
-              </a:defRPr>
-            </a:pPr>
-            <a:r>
-              <a:rPr sz="900" b="1">
-                <a:solidFill>
-                  <a:srgbClr val="111827"/>
-                </a:solidFill>
-                <a:latin typeface="Aptos"/>
-                <a:ea typeface="Aptos"/>
-                <a:cs typeface="Aptos"/>
-              </a:rPr>
-              <a:t>Official eval</a:t>
-            </a:r>
-          </a:p>
-        </p:txBody>
+              <a:defRPr sz="825" b="0">
+                <a:solidFill>
+                  <a:srgbClr val="111827"/>
+                </a:solidFill>
+                <a:latin typeface="Aptos"/>
+                <a:ea typeface="Aptos"/>
+                <a:cs typeface="Aptos"/>
+              </a:defRPr>
+            </a:pPr>
+            <a:r>
+              <a:rPr sz="825" b="0">
+                <a:solidFill>
+                  <a:srgbClr val="111827"/>
+                </a:solidFill>
+                <a:latin typeface="Aptos"/>
+                <a:ea typeface="Aptos"/>
+                <a:cs typeface="Aptos"/>
+              </a:rPr>
+              <a:t>4 / 6 / 4</a:t>
+            </a:r>
+          </a:p>
+        </p:txBody>
+      </p:sp>
+      <p:sp>
+        <p:nvSpPr>
+          <p:cNvPr id="33" name="">
+            <a:extLst xmlns:a="http://schemas.openxmlformats.org/drawingml/2006/main">
+              <a:ext uri="{FF2B5EF4-FFF2-40B4-BE49-F238E27FC236}">
+                <a16:creationId xmlns:a16="http://schemas.microsoft.com/office/drawing/2014/main" id="{A1425506-C1D7-4BBC-AA64-518E48743458}"/>
+              </a:ext>
+            </a:extLst>
+          </p:cNvPr>
+          <p:cNvSpPr>
+            <a:spLocks xmlns:a="http://schemas.openxmlformats.org/drawingml/2006/main" noGrp="1"/>
+          </p:cNvSpPr>
+          <p:nvPr/>
+        </p:nvSpPr>
+        <p:spPr>
+          <a:xfrm xmlns:a="http://schemas.openxmlformats.org/drawingml/2006/main">
+            <a:off x="3810000" y="3790950"/>
+            <a:ext cx="1619250" cy="419100"/>
+          </a:xfrm>
+          <a:prstGeom xmlns:a="http://schemas.openxmlformats.org/drawingml/2006/main" prst="rect">
+            <a:avLst/>
+          </a:prstGeom>
+          <a:solidFill xmlns:a="http://schemas.openxmlformats.org/drawingml/2006/main">
+            <a:srgbClr val="FFFFFF"/>
+          </a:solidFill>
+          <a:ln xmlns:a="http://schemas.openxmlformats.org/drawingml/2006/main" w="9525">
+            <a:solidFill>
+              <a:srgbClr val="D9DEE7"/>
+            </a:solidFill>
+            <a:prstDash val="solid"/>
+          </a:ln>
+        </p:spPr>
       </p:sp>
       <p:sp>
         <p:nvSpPr>
           <p:cNvPr id="34" name="">
             <a:extLst xmlns:a="http://schemas.openxmlformats.org/drawingml/2006/main">
               <a:ext uri="{FF2B5EF4-FFF2-40B4-BE49-F238E27FC236}">
-                <a16:creationId xmlns:a16="http://schemas.microsoft.com/office/drawing/2014/main" id="{F5C7C346-E29A-4B1D-8A10-3AC08488E9BB}"/>
-              </a:ext>
-            </a:extLst>
-          </p:cNvPr>
-          <p:cNvSpPr>
-            <a:spLocks xmlns:a="http://schemas.openxmlformats.org/drawingml/2006/main" noGrp="1"/>
-          </p:cNvSpPr>
-          <p:nvPr/>
-        </p:nvSpPr>
-        <p:spPr>
-          <a:xfrm xmlns:a="http://schemas.openxmlformats.org/drawingml/2006/main">
-            <a:off x="7791450" y="5276850"/>
-            <a:ext cx="1276350" cy="171450"/>
+                <a16:creationId xmlns:a16="http://schemas.microsoft.com/office/drawing/2014/main" id="{95AE17BB-6C23-4B65-A9D9-E7AC84ACF810}"/>
+              </a:ext>
+            </a:extLst>
+          </p:cNvPr>
+          <p:cNvSpPr>
+            <a:spLocks xmlns:a="http://schemas.openxmlformats.org/drawingml/2006/main" noGrp="1"/>
+          </p:cNvSpPr>
+          <p:nvPr/>
+        </p:nvSpPr>
+        <p:spPr>
+          <a:xfrm xmlns:a="http://schemas.openxmlformats.org/drawingml/2006/main">
+            <a:off x="3905250" y="3886200"/>
+            <a:ext cx="1428750" cy="228600"/>
           </a:xfrm>
           <a:prstGeom xmlns:a="http://schemas.openxmlformats.org/drawingml/2006/main" prst="rect">
             <a:avLst/>
@@ -7436,25 +7367,25 @@
           <a:lstStyle xmlns:a="http://schemas.openxmlformats.org/drawingml/2006/main"/>
           <a:p xmlns:a="http://schemas.openxmlformats.org/drawingml/2006/main">
             <a:pPr algn="l">
-              <a:defRPr sz="675" b="0">
-                <a:solidFill>
-                  <a:srgbClr val="5B6472"/>
-                </a:solidFill>
-                <a:latin typeface="Aptos"/>
-                <a:ea typeface="Aptos"/>
-                <a:cs typeface="Aptos"/>
-              </a:defRPr>
-            </a:pPr>
-            <a:r>
-              <a:rPr sz="675" b="0">
-                <a:solidFill>
-                  <a:srgbClr val="5B6472"/>
-                </a:solidFill>
-                <a:latin typeface="Aptos"/>
-                <a:ea typeface="Aptos"/>
-                <a:cs typeface="Aptos"/>
-              </a:rPr>
-              <a:t>training rows</a:t>
+              <a:defRPr sz="825" b="0">
+                <a:solidFill>
+                  <a:srgbClr val="111827"/>
+                </a:solidFill>
+                <a:latin typeface="Aptos"/>
+                <a:ea typeface="Aptos"/>
+                <a:cs typeface="Aptos"/>
+              </a:defRPr>
+            </a:pPr>
+            <a:r>
+              <a:rPr sz="825" b="0">
+                <a:solidFill>
+                  <a:srgbClr val="111827"/>
+                </a:solidFill>
+                <a:latin typeface="Aptos"/>
+                <a:ea typeface="Aptos"/>
+                <a:cs typeface="Aptos"/>
+              </a:rPr>
+              <a:t>native</a:t>
             </a:r>
           </a:p>
         </p:txBody>
@@ -7464,19 +7395,52 @@
           <p:cNvPr id="35" name="">
             <a:extLst xmlns:a="http://schemas.openxmlformats.org/drawingml/2006/main">
               <a:ext uri="{FF2B5EF4-FFF2-40B4-BE49-F238E27FC236}">
-                <a16:creationId xmlns:a16="http://schemas.microsoft.com/office/drawing/2014/main" id="{99672CD3-605C-410C-9AA1-E54373C856F6}"/>
-              </a:ext>
-            </a:extLst>
-          </p:cNvPr>
-          <p:cNvSpPr>
-            <a:spLocks xmlns:a="http://schemas.openxmlformats.org/drawingml/2006/main" noGrp="1"/>
-          </p:cNvSpPr>
-          <p:nvPr/>
-        </p:nvSpPr>
-        <p:spPr>
-          <a:xfrm xmlns:a="http://schemas.openxmlformats.org/drawingml/2006/main">
-            <a:off x="571500" y="6496050"/>
-            <a:ext cx="7239000" cy="190500"/>
+                <a16:creationId xmlns:a16="http://schemas.microsoft.com/office/drawing/2014/main" id="{04354C06-63FB-4EF3-A115-07F6AFC55930}"/>
+              </a:ext>
+            </a:extLst>
+          </p:cNvPr>
+          <p:cNvSpPr>
+            <a:spLocks xmlns:a="http://schemas.openxmlformats.org/drawingml/2006/main" noGrp="1"/>
+          </p:cNvSpPr>
+          <p:nvPr/>
+        </p:nvSpPr>
+        <p:spPr>
+          <a:xfrm xmlns:a="http://schemas.openxmlformats.org/drawingml/2006/main">
+            <a:off x="5429250" y="3790950"/>
+            <a:ext cx="1571625" cy="419100"/>
+          </a:xfrm>
+          <a:prstGeom xmlns:a="http://schemas.openxmlformats.org/drawingml/2006/main" prst="rect">
+            <a:avLst/>
+          </a:prstGeom>
+          <a:solidFill xmlns:a="http://schemas.openxmlformats.org/drawingml/2006/main">
+            <a:srgbClr val="FFFFFF"/>
+          </a:solidFill>
+          <a:ln xmlns:a="http://schemas.openxmlformats.org/drawingml/2006/main" w="9525">
+            <a:solidFill>
+              <a:srgbClr val="D9DEE7"/>
+            </a:solidFill>
+            <a:prstDash val="solid"/>
+          </a:ln>
+        </p:spPr>
+      </p:sp>
+      <p:sp>
+        <p:nvSpPr>
+          <p:cNvPr id="36" name="">
+            <a:extLst xmlns:a="http://schemas.openxmlformats.org/drawingml/2006/main">
+              <a:ext uri="{FF2B5EF4-FFF2-40B4-BE49-F238E27FC236}">
+                <a16:creationId xmlns:a16="http://schemas.microsoft.com/office/drawing/2014/main" id="{0903D662-492B-4B98-9C40-916AD9EFD952}"/>
+              </a:ext>
+            </a:extLst>
+          </p:cNvPr>
+          <p:cNvSpPr>
+            <a:spLocks xmlns:a="http://schemas.openxmlformats.org/drawingml/2006/main" noGrp="1"/>
+          </p:cNvSpPr>
+          <p:nvPr/>
+        </p:nvSpPr>
+        <p:spPr>
+          <a:xfrm xmlns:a="http://schemas.openxmlformats.org/drawingml/2006/main">
+            <a:off x="5524500" y="3886200"/>
+            <a:ext cx="1381125" cy="228600"/>
           </a:xfrm>
           <a:prstGeom xmlns:a="http://schemas.openxmlformats.org/drawingml/2006/main" prst="rect">
             <a:avLst/>
@@ -7500,6 +7464,1525 @@
           <a:lstStyle xmlns:a="http://schemas.openxmlformats.org/drawingml/2006/main"/>
           <a:p xmlns:a="http://schemas.openxmlformats.org/drawingml/2006/main">
             <a:pPr algn="l">
+              <a:defRPr sz="825" b="0">
+                <a:solidFill>
+                  <a:srgbClr val="111827"/>
+                </a:solidFill>
+                <a:latin typeface="Aptos"/>
+                <a:ea typeface="Aptos"/>
+                <a:cs typeface="Aptos"/>
+              </a:defRPr>
+            </a:pPr>
+            <a:r>
+              <a:rPr sz="825" b="0">
+                <a:solidFill>
+                  <a:srgbClr val="111827"/>
+                </a:solidFill>
+                <a:latin typeface="Aptos"/>
+                <a:ea typeface="Aptos"/>
+                <a:cs typeface="Aptos"/>
+              </a:rPr>
+              <a:t>native</a:t>
+            </a:r>
+          </a:p>
+        </p:txBody>
+      </p:sp>
+      <p:sp>
+        <p:nvSpPr>
+          <p:cNvPr id="37" name="">
+            <a:extLst xmlns:a="http://schemas.openxmlformats.org/drawingml/2006/main">
+              <a:ext uri="{FF2B5EF4-FFF2-40B4-BE49-F238E27FC236}">
+                <a16:creationId xmlns:a16="http://schemas.microsoft.com/office/drawing/2014/main" id="{CA64600D-DC6E-46E3-97DD-44BE7418E6A8}"/>
+              </a:ext>
+            </a:extLst>
+          </p:cNvPr>
+          <p:cNvSpPr>
+            <a:spLocks xmlns:a="http://schemas.openxmlformats.org/drawingml/2006/main" noGrp="1"/>
+          </p:cNvSpPr>
+          <p:nvPr/>
+        </p:nvSpPr>
+        <p:spPr>
+          <a:xfrm xmlns:a="http://schemas.openxmlformats.org/drawingml/2006/main">
+            <a:off x="7000875" y="3790950"/>
+            <a:ext cx="1666875" cy="419100"/>
+          </a:xfrm>
+          <a:prstGeom xmlns:a="http://schemas.openxmlformats.org/drawingml/2006/main" prst="rect">
+            <a:avLst/>
+          </a:prstGeom>
+          <a:solidFill xmlns:a="http://schemas.openxmlformats.org/drawingml/2006/main">
+            <a:srgbClr val="FFFFFF"/>
+          </a:solidFill>
+          <a:ln xmlns:a="http://schemas.openxmlformats.org/drawingml/2006/main" w="9525">
+            <a:solidFill>
+              <a:srgbClr val="D9DEE7"/>
+            </a:solidFill>
+            <a:prstDash val="solid"/>
+          </a:ln>
+        </p:spPr>
+      </p:sp>
+      <p:sp>
+        <p:nvSpPr>
+          <p:cNvPr id="38" name="">
+            <a:extLst xmlns:a="http://schemas.openxmlformats.org/drawingml/2006/main">
+              <a:ext uri="{FF2B5EF4-FFF2-40B4-BE49-F238E27FC236}">
+                <a16:creationId xmlns:a16="http://schemas.microsoft.com/office/drawing/2014/main" id="{69884DFA-3B40-4FEA-97FB-4746E9961C22}"/>
+              </a:ext>
+            </a:extLst>
+          </p:cNvPr>
+          <p:cNvSpPr>
+            <a:spLocks xmlns:a="http://schemas.openxmlformats.org/drawingml/2006/main" noGrp="1"/>
+          </p:cNvSpPr>
+          <p:nvPr/>
+        </p:nvSpPr>
+        <p:spPr>
+          <a:xfrm xmlns:a="http://schemas.openxmlformats.org/drawingml/2006/main">
+            <a:off x="7096125" y="3886200"/>
+            <a:ext cx="1476375" cy="228600"/>
+          </a:xfrm>
+          <a:prstGeom xmlns:a="http://schemas.openxmlformats.org/drawingml/2006/main" prst="rect">
+            <a:avLst/>
+          </a:prstGeom>
+          <a:solidFill xmlns:a="http://schemas.openxmlformats.org/drawingml/2006/main">
+            <a:srgbClr val="000000">
+              <a:alpha val="0"/>
+            </a:srgbClr>
+          </a:solidFill>
+          <a:ln xmlns:a="http://schemas.openxmlformats.org/drawingml/2006/main" w="0">
+            <a:solidFill>
+              <a:srgbClr val="000000">
+                <a:alpha val="0"/>
+              </a:srgbClr>
+            </a:solidFill>
+            <a:prstDash val="solid"/>
+          </a:ln>
+        </p:spPr>
+        <p:txBody>
+          <a:bodyPr xmlns:a="http://schemas.openxmlformats.org/drawingml/2006/main" lIns="0" tIns="0" rIns="0" bIns="0" anchor="t"/>
+          <a:lstStyle xmlns:a="http://schemas.openxmlformats.org/drawingml/2006/main"/>
+          <a:p xmlns:a="http://schemas.openxmlformats.org/drawingml/2006/main">
+            <a:pPr algn="l">
+              <a:defRPr sz="825" b="0">
+                <a:solidFill>
+                  <a:srgbClr val="111827"/>
+                </a:solidFill>
+                <a:latin typeface="Aptos"/>
+                <a:ea typeface="Aptos"/>
+                <a:cs typeface="Aptos"/>
+              </a:defRPr>
+            </a:pPr>
+            <a:r>
+              <a:rPr sz="825" b="0">
+                <a:solidFill>
+                  <a:srgbClr val="111827"/>
+                </a:solidFill>
+                <a:latin typeface="Aptos"/>
+                <a:ea typeface="Aptos"/>
+                <a:cs typeface="Aptos"/>
+              </a:rPr>
+              <a:t>train</a:t>
+            </a:r>
+          </a:p>
+        </p:txBody>
+      </p:sp>
+      <p:sp>
+        <p:nvSpPr>
+          <p:cNvPr id="39" name="">
+            <a:extLst xmlns:a="http://schemas.openxmlformats.org/drawingml/2006/main">
+              <a:ext uri="{FF2B5EF4-FFF2-40B4-BE49-F238E27FC236}">
+                <a16:creationId xmlns:a16="http://schemas.microsoft.com/office/drawing/2014/main" id="{38E95F6E-3870-4EED-BC5C-0875173F674E}"/>
+              </a:ext>
+            </a:extLst>
+          </p:cNvPr>
+          <p:cNvSpPr>
+            <a:spLocks xmlns:a="http://schemas.openxmlformats.org/drawingml/2006/main" noGrp="1"/>
+          </p:cNvSpPr>
+          <p:nvPr/>
+        </p:nvSpPr>
+        <p:spPr>
+          <a:xfrm xmlns:a="http://schemas.openxmlformats.org/drawingml/2006/main">
+            <a:off x="8667750" y="3790950"/>
+            <a:ext cx="2333625" cy="419100"/>
+          </a:xfrm>
+          <a:prstGeom xmlns:a="http://schemas.openxmlformats.org/drawingml/2006/main" prst="rect">
+            <a:avLst/>
+          </a:prstGeom>
+          <a:solidFill xmlns:a="http://schemas.openxmlformats.org/drawingml/2006/main">
+            <a:srgbClr val="FFFFFF"/>
+          </a:solidFill>
+          <a:ln xmlns:a="http://schemas.openxmlformats.org/drawingml/2006/main" w="9525">
+            <a:solidFill>
+              <a:srgbClr val="D9DEE7"/>
+            </a:solidFill>
+            <a:prstDash val="solid"/>
+          </a:ln>
+        </p:spPr>
+      </p:sp>
+      <p:sp>
+        <p:nvSpPr>
+          <p:cNvPr id="40" name="">
+            <a:extLst xmlns:a="http://schemas.openxmlformats.org/drawingml/2006/main">
+              <a:ext uri="{FF2B5EF4-FFF2-40B4-BE49-F238E27FC236}">
+                <a16:creationId xmlns:a16="http://schemas.microsoft.com/office/drawing/2014/main" id="{977DD763-CA13-4652-9261-80554B18EB2A}"/>
+              </a:ext>
+            </a:extLst>
+          </p:cNvPr>
+          <p:cNvSpPr>
+            <a:spLocks xmlns:a="http://schemas.openxmlformats.org/drawingml/2006/main" noGrp="1"/>
+          </p:cNvSpPr>
+          <p:nvPr/>
+        </p:nvSpPr>
+        <p:spPr>
+          <a:xfrm xmlns:a="http://schemas.openxmlformats.org/drawingml/2006/main">
+            <a:off x="8763000" y="3886200"/>
+            <a:ext cx="2143125" cy="228600"/>
+          </a:xfrm>
+          <a:prstGeom xmlns:a="http://schemas.openxmlformats.org/drawingml/2006/main" prst="rect">
+            <a:avLst/>
+          </a:prstGeom>
+          <a:solidFill xmlns:a="http://schemas.openxmlformats.org/drawingml/2006/main">
+            <a:srgbClr val="000000">
+              <a:alpha val="0"/>
+            </a:srgbClr>
+          </a:solidFill>
+          <a:ln xmlns:a="http://schemas.openxmlformats.org/drawingml/2006/main" w="0">
+            <a:solidFill>
+              <a:srgbClr val="000000">
+                <a:alpha val="0"/>
+              </a:srgbClr>
+            </a:solidFill>
+            <a:prstDash val="solid"/>
+          </a:ln>
+        </p:spPr>
+        <p:txBody>
+          <a:bodyPr xmlns:a="http://schemas.openxmlformats.org/drawingml/2006/main" lIns="0" tIns="0" rIns="0" bIns="0" anchor="t"/>
+          <a:lstStyle xmlns:a="http://schemas.openxmlformats.org/drawingml/2006/main"/>
+          <a:p xmlns:a="http://schemas.openxmlformats.org/drawingml/2006/main">
+            <a:pPr algn="l">
+              <a:defRPr sz="825" b="0">
+                <a:solidFill>
+                  <a:srgbClr val="111827"/>
+                </a:solidFill>
+                <a:latin typeface="Aptos"/>
+                <a:ea typeface="Aptos"/>
+                <a:cs typeface="Aptos"/>
+              </a:defRPr>
+            </a:pPr>
+            <a:r>
+              <a:rPr sz="825" b="0">
+                <a:solidFill>
+                  <a:srgbClr val="111827"/>
+                </a:solidFill>
+                <a:latin typeface="Aptos"/>
+                <a:ea typeface="Aptos"/>
+                <a:cs typeface="Aptos"/>
+              </a:rPr>
+              <a:t>Real known process families</a:t>
+            </a:r>
+          </a:p>
+        </p:txBody>
+      </p:sp>
+      <p:sp>
+        <p:nvSpPr>
+          <p:cNvPr id="41" name="">
+            <a:extLst xmlns:a="http://schemas.openxmlformats.org/drawingml/2006/main">
+              <a:ext uri="{FF2B5EF4-FFF2-40B4-BE49-F238E27FC236}">
+                <a16:creationId xmlns:a16="http://schemas.microsoft.com/office/drawing/2014/main" id="{DFCA2F87-B415-4E0C-BF24-D333DEEC7AEB}"/>
+              </a:ext>
+            </a:extLst>
+          </p:cNvPr>
+          <p:cNvSpPr>
+            <a:spLocks xmlns:a="http://schemas.openxmlformats.org/drawingml/2006/main" noGrp="1"/>
+          </p:cNvSpPr>
+          <p:nvPr/>
+        </p:nvSpPr>
+        <p:spPr>
+          <a:xfrm xmlns:a="http://schemas.openxmlformats.org/drawingml/2006/main">
+            <a:off x="666750" y="4210050"/>
+            <a:ext cx="1571625" cy="419100"/>
+          </a:xfrm>
+          <a:prstGeom xmlns:a="http://schemas.openxmlformats.org/drawingml/2006/main" prst="rect">
+            <a:avLst/>
+          </a:prstGeom>
+          <a:solidFill xmlns:a="http://schemas.openxmlformats.org/drawingml/2006/main">
+            <a:srgbClr val="FFFFFF"/>
+          </a:solidFill>
+          <a:ln xmlns:a="http://schemas.openxmlformats.org/drawingml/2006/main" w="9525">
+            <a:solidFill>
+              <a:srgbClr val="D9DEE7"/>
+            </a:solidFill>
+            <a:prstDash val="solid"/>
+          </a:ln>
+        </p:spPr>
+      </p:sp>
+      <p:sp>
+        <p:nvSpPr>
+          <p:cNvPr id="42" name="">
+            <a:extLst xmlns:a="http://schemas.openxmlformats.org/drawingml/2006/main">
+              <a:ext uri="{FF2B5EF4-FFF2-40B4-BE49-F238E27FC236}">
+                <a16:creationId xmlns:a16="http://schemas.microsoft.com/office/drawing/2014/main" id="{3A9C86B7-6A46-417D-9011-37E3B7ADAA65}"/>
+              </a:ext>
+            </a:extLst>
+          </p:cNvPr>
+          <p:cNvSpPr>
+            <a:spLocks xmlns:a="http://schemas.openxmlformats.org/drawingml/2006/main" noGrp="1"/>
+          </p:cNvSpPr>
+          <p:nvPr/>
+        </p:nvSpPr>
+        <p:spPr>
+          <a:xfrm xmlns:a="http://schemas.openxmlformats.org/drawingml/2006/main">
+            <a:off x="762000" y="4305300"/>
+            <a:ext cx="1381125" cy="228600"/>
+          </a:xfrm>
+          <a:prstGeom xmlns:a="http://schemas.openxmlformats.org/drawingml/2006/main" prst="rect">
+            <a:avLst/>
+          </a:prstGeom>
+          <a:solidFill xmlns:a="http://schemas.openxmlformats.org/drawingml/2006/main">
+            <a:srgbClr val="000000">
+              <a:alpha val="0"/>
+            </a:srgbClr>
+          </a:solidFill>
+          <a:ln xmlns:a="http://schemas.openxmlformats.org/drawingml/2006/main" w="0">
+            <a:solidFill>
+              <a:srgbClr val="000000">
+                <a:alpha val="0"/>
+              </a:srgbClr>
+            </a:solidFill>
+            <a:prstDash val="solid"/>
+          </a:ln>
+        </p:spPr>
+        <p:txBody>
+          <a:bodyPr xmlns:a="http://schemas.openxmlformats.org/drawingml/2006/main" lIns="0" tIns="0" rIns="0" bIns="0" anchor="t"/>
+          <a:lstStyle xmlns:a="http://schemas.openxmlformats.org/drawingml/2006/main"/>
+          <a:p xmlns:a="http://schemas.openxmlformats.org/drawingml/2006/main">
+            <a:pPr algn="l">
+              <a:defRPr sz="825" b="1">
+                <a:solidFill>
+                  <a:srgbClr val="111827"/>
+                </a:solidFill>
+                <a:latin typeface="Aptos"/>
+                <a:ea typeface="Aptos"/>
+                <a:cs typeface="Aptos"/>
+              </a:defRPr>
+            </a:pPr>
+            <a:r>
+              <a:rPr sz="825" b="1">
+                <a:solidFill>
+                  <a:srgbClr val="111827"/>
+                </a:solidFill>
+                <a:latin typeface="Aptos"/>
+                <a:ea typeface="Aptos"/>
+                <a:cs typeface="Aptos"/>
+              </a:rPr>
+              <a:t>SCFAM01-09</a:t>
+            </a:r>
+          </a:p>
+        </p:txBody>
+      </p:sp>
+      <p:sp>
+        <p:nvSpPr>
+          <p:cNvPr id="43" name="">
+            <a:extLst xmlns:a="http://schemas.openxmlformats.org/drawingml/2006/main">
+              <a:ext uri="{FF2B5EF4-FFF2-40B4-BE49-F238E27FC236}">
+                <a16:creationId xmlns:a16="http://schemas.microsoft.com/office/drawing/2014/main" id="{FAC96D2C-52BA-472B-A302-06B2D37DA621}"/>
+              </a:ext>
+            </a:extLst>
+          </p:cNvPr>
+          <p:cNvSpPr>
+            <a:spLocks xmlns:a="http://schemas.openxmlformats.org/drawingml/2006/main" noGrp="1"/>
+          </p:cNvSpPr>
+          <p:nvPr/>
+        </p:nvSpPr>
+        <p:spPr>
+          <a:xfrm xmlns:a="http://schemas.openxmlformats.org/drawingml/2006/main">
+            <a:off x="2238375" y="4210050"/>
+            <a:ext cx="1571625" cy="419100"/>
+          </a:xfrm>
+          <a:prstGeom xmlns:a="http://schemas.openxmlformats.org/drawingml/2006/main" prst="rect">
+            <a:avLst/>
+          </a:prstGeom>
+          <a:solidFill xmlns:a="http://schemas.openxmlformats.org/drawingml/2006/main">
+            <a:srgbClr val="FFFFFF"/>
+          </a:solidFill>
+          <a:ln xmlns:a="http://schemas.openxmlformats.org/drawingml/2006/main" w="9525">
+            <a:solidFill>
+              <a:srgbClr val="D9DEE7"/>
+            </a:solidFill>
+            <a:prstDash val="solid"/>
+          </a:ln>
+        </p:spPr>
+      </p:sp>
+      <p:sp>
+        <p:nvSpPr>
+          <p:cNvPr id="44" name="">
+            <a:extLst xmlns:a="http://schemas.openxmlformats.org/drawingml/2006/main">
+              <a:ext uri="{FF2B5EF4-FFF2-40B4-BE49-F238E27FC236}">
+                <a16:creationId xmlns:a16="http://schemas.microsoft.com/office/drawing/2014/main" id="{44CB01BD-B93A-42F6-8431-FB73801520EA}"/>
+              </a:ext>
+            </a:extLst>
+          </p:cNvPr>
+          <p:cNvSpPr>
+            <a:spLocks xmlns:a="http://schemas.openxmlformats.org/drawingml/2006/main" noGrp="1"/>
+          </p:cNvSpPr>
+          <p:nvPr/>
+        </p:nvSpPr>
+        <p:spPr>
+          <a:xfrm xmlns:a="http://schemas.openxmlformats.org/drawingml/2006/main">
+            <a:off x="2333625" y="4305300"/>
+            <a:ext cx="1381125" cy="228600"/>
+          </a:xfrm>
+          <a:prstGeom xmlns:a="http://schemas.openxmlformats.org/drawingml/2006/main" prst="rect">
+            <a:avLst/>
+          </a:prstGeom>
+          <a:solidFill xmlns:a="http://schemas.openxmlformats.org/drawingml/2006/main">
+            <a:srgbClr val="000000">
+              <a:alpha val="0"/>
+            </a:srgbClr>
+          </a:solidFill>
+          <a:ln xmlns:a="http://schemas.openxmlformats.org/drawingml/2006/main" w="0">
+            <a:solidFill>
+              <a:srgbClr val="000000">
+                <a:alpha val="0"/>
+              </a:srgbClr>
+            </a:solidFill>
+            <a:prstDash val="solid"/>
+          </a:ln>
+        </p:spPr>
+        <p:txBody>
+          <a:bodyPr xmlns:a="http://schemas.openxmlformats.org/drawingml/2006/main" lIns="0" tIns="0" rIns="0" bIns="0" anchor="t"/>
+          <a:lstStyle xmlns:a="http://schemas.openxmlformats.org/drawingml/2006/main"/>
+          <a:p xmlns:a="http://schemas.openxmlformats.org/drawingml/2006/main">
+            <a:pPr algn="l">
+              <a:defRPr sz="825" b="0">
+                <a:solidFill>
+                  <a:srgbClr val="111827"/>
+                </a:solidFill>
+                <a:latin typeface="Aptos"/>
+                <a:ea typeface="Aptos"/>
+                <a:cs typeface="Aptos"/>
+              </a:defRPr>
+            </a:pPr>
+            <a:r>
+              <a:rPr sz="825" b="0">
+                <a:solidFill>
+                  <a:srgbClr val="111827"/>
+                </a:solidFill>
+                <a:latin typeface="Aptos"/>
+                <a:ea typeface="Aptos"/>
+                <a:cs typeface="Aptos"/>
+              </a:rPr>
+              <a:t>4-6</a:t>
+            </a:r>
+          </a:p>
+        </p:txBody>
+      </p:sp>
+      <p:sp>
+        <p:nvSpPr>
+          <p:cNvPr id="45" name="">
+            <a:extLst xmlns:a="http://schemas.openxmlformats.org/drawingml/2006/main">
+              <a:ext uri="{FF2B5EF4-FFF2-40B4-BE49-F238E27FC236}">
+                <a16:creationId xmlns:a16="http://schemas.microsoft.com/office/drawing/2014/main" id="{A3C920F9-50A3-40E5-9491-C1AC528F2EC7}"/>
+              </a:ext>
+            </a:extLst>
+          </p:cNvPr>
+          <p:cNvSpPr>
+            <a:spLocks xmlns:a="http://schemas.openxmlformats.org/drawingml/2006/main" noGrp="1"/>
+          </p:cNvSpPr>
+          <p:nvPr/>
+        </p:nvSpPr>
+        <p:spPr>
+          <a:xfrm xmlns:a="http://schemas.openxmlformats.org/drawingml/2006/main">
+            <a:off x="3810000" y="4210050"/>
+            <a:ext cx="1619250" cy="419100"/>
+          </a:xfrm>
+          <a:prstGeom xmlns:a="http://schemas.openxmlformats.org/drawingml/2006/main" prst="rect">
+            <a:avLst/>
+          </a:prstGeom>
+          <a:solidFill xmlns:a="http://schemas.openxmlformats.org/drawingml/2006/main">
+            <a:srgbClr val="FFFFFF"/>
+          </a:solidFill>
+          <a:ln xmlns:a="http://schemas.openxmlformats.org/drawingml/2006/main" w="9525">
+            <a:solidFill>
+              <a:srgbClr val="D9DEE7"/>
+            </a:solidFill>
+            <a:prstDash val="solid"/>
+          </a:ln>
+        </p:spPr>
+      </p:sp>
+      <p:sp>
+        <p:nvSpPr>
+          <p:cNvPr id="46" name="">
+            <a:extLst xmlns:a="http://schemas.openxmlformats.org/drawingml/2006/main">
+              <a:ext uri="{FF2B5EF4-FFF2-40B4-BE49-F238E27FC236}">
+                <a16:creationId xmlns:a16="http://schemas.microsoft.com/office/drawing/2014/main" id="{5C2DFED1-2F92-41CA-8539-EA8CE2FA3AC8}"/>
+              </a:ext>
+            </a:extLst>
+          </p:cNvPr>
+          <p:cNvSpPr>
+            <a:spLocks xmlns:a="http://schemas.openxmlformats.org/drawingml/2006/main" noGrp="1"/>
+          </p:cNvSpPr>
+          <p:nvPr/>
+        </p:nvSpPr>
+        <p:spPr>
+          <a:xfrm xmlns:a="http://schemas.openxmlformats.org/drawingml/2006/main">
+            <a:off x="3905250" y="4305300"/>
+            <a:ext cx="1428750" cy="228600"/>
+          </a:xfrm>
+          <a:prstGeom xmlns:a="http://schemas.openxmlformats.org/drawingml/2006/main" prst="rect">
+            <a:avLst/>
+          </a:prstGeom>
+          <a:solidFill xmlns:a="http://schemas.openxmlformats.org/drawingml/2006/main">
+            <a:srgbClr val="000000">
+              <a:alpha val="0"/>
+            </a:srgbClr>
+          </a:solidFill>
+          <a:ln xmlns:a="http://schemas.openxmlformats.org/drawingml/2006/main" w="0">
+            <a:solidFill>
+              <a:srgbClr val="000000">
+                <a:alpha val="0"/>
+              </a:srgbClr>
+            </a:solidFill>
+            <a:prstDash val="solid"/>
+          </a:ln>
+        </p:spPr>
+        <p:txBody>
+          <a:bodyPr xmlns:a="http://schemas.openxmlformats.org/drawingml/2006/main" lIns="0" tIns="0" rIns="0" bIns="0" anchor="t"/>
+          <a:lstStyle xmlns:a="http://schemas.openxmlformats.org/drawingml/2006/main"/>
+          <a:p xmlns:a="http://schemas.openxmlformats.org/drawingml/2006/main">
+            <a:pPr algn="l">
+              <a:defRPr sz="825" b="0">
+                <a:solidFill>
+                  <a:srgbClr val="111827"/>
+                </a:solidFill>
+                <a:latin typeface="Aptos"/>
+                <a:ea typeface="Aptos"/>
+                <a:cs typeface="Aptos"/>
+              </a:defRPr>
+            </a:pPr>
+            <a:r>
+              <a:rPr sz="825" b="0">
+                <a:solidFill>
+                  <a:srgbClr val="111827"/>
+                </a:solidFill>
+                <a:latin typeface="Aptos"/>
+                <a:ea typeface="Aptos"/>
+                <a:cs typeface="Aptos"/>
+              </a:rPr>
+              <a:t>mixed</a:t>
+            </a:r>
+          </a:p>
+        </p:txBody>
+      </p:sp>
+      <p:sp>
+        <p:nvSpPr>
+          <p:cNvPr id="47" name="">
+            <a:extLst xmlns:a="http://schemas.openxmlformats.org/drawingml/2006/main">
+              <a:ext uri="{FF2B5EF4-FFF2-40B4-BE49-F238E27FC236}">
+                <a16:creationId xmlns:a16="http://schemas.microsoft.com/office/drawing/2014/main" id="{45CA2D42-CDCA-4B93-AB29-6C25D561836A}"/>
+              </a:ext>
+            </a:extLst>
+          </p:cNvPr>
+          <p:cNvSpPr>
+            <a:spLocks xmlns:a="http://schemas.openxmlformats.org/drawingml/2006/main" noGrp="1"/>
+          </p:cNvSpPr>
+          <p:nvPr/>
+        </p:nvSpPr>
+        <p:spPr>
+          <a:xfrm xmlns:a="http://schemas.openxmlformats.org/drawingml/2006/main">
+            <a:off x="5429250" y="4210050"/>
+            <a:ext cx="1571625" cy="419100"/>
+          </a:xfrm>
+          <a:prstGeom xmlns:a="http://schemas.openxmlformats.org/drawingml/2006/main" prst="rect">
+            <a:avLst/>
+          </a:prstGeom>
+          <a:solidFill xmlns:a="http://schemas.openxmlformats.org/drawingml/2006/main">
+            <a:srgbClr val="FFFFFF"/>
+          </a:solidFill>
+          <a:ln xmlns:a="http://schemas.openxmlformats.org/drawingml/2006/main" w="9525">
+            <a:solidFill>
+              <a:srgbClr val="D9DEE7"/>
+            </a:solidFill>
+            <a:prstDash val="solid"/>
+          </a:ln>
+        </p:spPr>
+      </p:sp>
+      <p:sp>
+        <p:nvSpPr>
+          <p:cNvPr id="48" name="">
+            <a:extLst xmlns:a="http://schemas.openxmlformats.org/drawingml/2006/main">
+              <a:ext uri="{FF2B5EF4-FFF2-40B4-BE49-F238E27FC236}">
+                <a16:creationId xmlns:a16="http://schemas.microsoft.com/office/drawing/2014/main" id="{FDEF50E1-85B6-471C-BC4F-DDE268FF538A}"/>
+              </a:ext>
+            </a:extLst>
+          </p:cNvPr>
+          <p:cNvSpPr>
+            <a:spLocks xmlns:a="http://schemas.openxmlformats.org/drawingml/2006/main" noGrp="1"/>
+          </p:cNvSpPr>
+          <p:nvPr/>
+        </p:nvSpPr>
+        <p:spPr>
+          <a:xfrm xmlns:a="http://schemas.openxmlformats.org/drawingml/2006/main">
+            <a:off x="5524500" y="4305300"/>
+            <a:ext cx="1381125" cy="228600"/>
+          </a:xfrm>
+          <a:prstGeom xmlns:a="http://schemas.openxmlformats.org/drawingml/2006/main" prst="rect">
+            <a:avLst/>
+          </a:prstGeom>
+          <a:solidFill xmlns:a="http://schemas.openxmlformats.org/drawingml/2006/main">
+            <a:srgbClr val="000000">
+              <a:alpha val="0"/>
+            </a:srgbClr>
+          </a:solidFill>
+          <a:ln xmlns:a="http://schemas.openxmlformats.org/drawingml/2006/main" w="0">
+            <a:solidFill>
+              <a:srgbClr val="000000">
+                <a:alpha val="0"/>
+              </a:srgbClr>
+            </a:solidFill>
+            <a:prstDash val="solid"/>
+          </a:ln>
+        </p:spPr>
+        <p:txBody>
+          <a:bodyPr xmlns:a="http://schemas.openxmlformats.org/drawingml/2006/main" lIns="0" tIns="0" rIns="0" bIns="0" anchor="t"/>
+          <a:lstStyle xmlns:a="http://schemas.openxmlformats.org/drawingml/2006/main"/>
+          <a:p xmlns:a="http://schemas.openxmlformats.org/drawingml/2006/main">
+            <a:pPr algn="l">
+              <a:defRPr sz="825" b="0">
+                <a:solidFill>
+                  <a:srgbClr val="111827"/>
+                </a:solidFill>
+                <a:latin typeface="Aptos"/>
+                <a:ea typeface="Aptos"/>
+                <a:cs typeface="Aptos"/>
+              </a:defRPr>
+            </a:pPr>
+            <a:r>
+              <a:rPr sz="825" b="0">
+                <a:solidFill>
+                  <a:srgbClr val="111827"/>
+                </a:solidFill>
+                <a:latin typeface="Aptos"/>
+                <a:ea typeface="Aptos"/>
+                <a:cs typeface="Aptos"/>
+              </a:rPr>
+              <a:t>0.25-0.80</a:t>
+            </a:r>
+          </a:p>
+        </p:txBody>
+      </p:sp>
+      <p:sp>
+        <p:nvSpPr>
+          <p:cNvPr id="49" name="">
+            <a:extLst xmlns:a="http://schemas.openxmlformats.org/drawingml/2006/main">
+              <a:ext uri="{FF2B5EF4-FFF2-40B4-BE49-F238E27FC236}">
+                <a16:creationId xmlns:a16="http://schemas.microsoft.com/office/drawing/2014/main" id="{4DFF9626-671A-467F-9D35-95C66209A079}"/>
+              </a:ext>
+            </a:extLst>
+          </p:cNvPr>
+          <p:cNvSpPr>
+            <a:spLocks xmlns:a="http://schemas.openxmlformats.org/drawingml/2006/main" noGrp="1"/>
+          </p:cNvSpPr>
+          <p:nvPr/>
+        </p:nvSpPr>
+        <p:spPr>
+          <a:xfrm xmlns:a="http://schemas.openxmlformats.org/drawingml/2006/main">
+            <a:off x="7000875" y="4210050"/>
+            <a:ext cx="1666875" cy="419100"/>
+          </a:xfrm>
+          <a:prstGeom xmlns:a="http://schemas.openxmlformats.org/drawingml/2006/main" prst="rect">
+            <a:avLst/>
+          </a:prstGeom>
+          <a:solidFill xmlns:a="http://schemas.openxmlformats.org/drawingml/2006/main">
+            <a:srgbClr val="DFF5EC"/>
+          </a:solidFill>
+          <a:ln xmlns:a="http://schemas.openxmlformats.org/drawingml/2006/main" w="9525">
+            <a:solidFill>
+              <a:srgbClr val="D9DEE7"/>
+            </a:solidFill>
+            <a:prstDash val="solid"/>
+          </a:ln>
+        </p:spPr>
+      </p:sp>
+      <p:sp>
+        <p:nvSpPr>
+          <p:cNvPr id="50" name="">
+            <a:extLst xmlns:a="http://schemas.openxmlformats.org/drawingml/2006/main">
+              <a:ext uri="{FF2B5EF4-FFF2-40B4-BE49-F238E27FC236}">
+                <a16:creationId xmlns:a16="http://schemas.microsoft.com/office/drawing/2014/main" id="{FBB9FF68-1F1C-4F64-A663-2EFA9490247C}"/>
+              </a:ext>
+            </a:extLst>
+          </p:cNvPr>
+          <p:cNvSpPr>
+            <a:spLocks xmlns:a="http://schemas.openxmlformats.org/drawingml/2006/main" noGrp="1"/>
+          </p:cNvSpPr>
+          <p:nvPr/>
+        </p:nvSpPr>
+        <p:spPr>
+          <a:xfrm xmlns:a="http://schemas.openxmlformats.org/drawingml/2006/main">
+            <a:off x="7096125" y="4305300"/>
+            <a:ext cx="1476375" cy="228600"/>
+          </a:xfrm>
+          <a:prstGeom xmlns:a="http://schemas.openxmlformats.org/drawingml/2006/main" prst="rect">
+            <a:avLst/>
+          </a:prstGeom>
+          <a:solidFill xmlns:a="http://schemas.openxmlformats.org/drawingml/2006/main">
+            <a:srgbClr val="000000">
+              <a:alpha val="0"/>
+            </a:srgbClr>
+          </a:solidFill>
+          <a:ln xmlns:a="http://schemas.openxmlformats.org/drawingml/2006/main" w="0">
+            <a:solidFill>
+              <a:srgbClr val="000000">
+                <a:alpha val="0"/>
+              </a:srgbClr>
+            </a:solidFill>
+            <a:prstDash val="solid"/>
+          </a:ln>
+        </p:spPr>
+        <p:txBody>
+          <a:bodyPr xmlns:a="http://schemas.openxmlformats.org/drawingml/2006/main" lIns="0" tIns="0" rIns="0" bIns="0" anchor="t"/>
+          <a:lstStyle xmlns:a="http://schemas.openxmlformats.org/drawingml/2006/main"/>
+          <a:p xmlns:a="http://schemas.openxmlformats.org/drawingml/2006/main">
+            <a:pPr algn="l">
+              <a:defRPr sz="825" b="0">
+                <a:solidFill>
+                  <a:srgbClr val="111827"/>
+                </a:solidFill>
+                <a:latin typeface="Aptos"/>
+                <a:ea typeface="Aptos"/>
+                <a:cs typeface="Aptos"/>
+              </a:defRPr>
+            </a:pPr>
+            <a:r>
+              <a:rPr sz="825" b="0">
+                <a:solidFill>
+                  <a:srgbClr val="111827"/>
+                </a:solidFill>
+                <a:latin typeface="Aptos"/>
+                <a:ea typeface="Aptos"/>
+                <a:cs typeface="Aptos"/>
+              </a:rPr>
+              <a:t>train</a:t>
+            </a:r>
+          </a:p>
+        </p:txBody>
+      </p:sp>
+      <p:sp>
+        <p:nvSpPr>
+          <p:cNvPr id="51" name="">
+            <a:extLst xmlns:a="http://schemas.openxmlformats.org/drawingml/2006/main">
+              <a:ext uri="{FF2B5EF4-FFF2-40B4-BE49-F238E27FC236}">
+                <a16:creationId xmlns:a16="http://schemas.microsoft.com/office/drawing/2014/main" id="{B4CBFAB2-B285-466A-8695-9B535EE2B241}"/>
+              </a:ext>
+            </a:extLst>
+          </p:cNvPr>
+          <p:cNvSpPr>
+            <a:spLocks xmlns:a="http://schemas.openxmlformats.org/drawingml/2006/main" noGrp="1"/>
+          </p:cNvSpPr>
+          <p:nvPr/>
+        </p:nvSpPr>
+        <p:spPr>
+          <a:xfrm xmlns:a="http://schemas.openxmlformats.org/drawingml/2006/main">
+            <a:off x="8667750" y="4210050"/>
+            <a:ext cx="2333625" cy="419100"/>
+          </a:xfrm>
+          <a:prstGeom xmlns:a="http://schemas.openxmlformats.org/drawingml/2006/main" prst="rect">
+            <a:avLst/>
+          </a:prstGeom>
+          <a:solidFill xmlns:a="http://schemas.openxmlformats.org/drawingml/2006/main">
+            <a:srgbClr val="FFFFFF"/>
+          </a:solidFill>
+          <a:ln xmlns:a="http://schemas.openxmlformats.org/drawingml/2006/main" w="9525">
+            <a:solidFill>
+              <a:srgbClr val="D9DEE7"/>
+            </a:solidFill>
+            <a:prstDash val="solid"/>
+          </a:ln>
+        </p:spPr>
+      </p:sp>
+      <p:sp>
+        <p:nvSpPr>
+          <p:cNvPr id="52" name="">
+            <a:extLst xmlns:a="http://schemas.openxmlformats.org/drawingml/2006/main">
+              <a:ext uri="{FF2B5EF4-FFF2-40B4-BE49-F238E27FC236}">
+                <a16:creationId xmlns:a16="http://schemas.microsoft.com/office/drawing/2014/main" id="{013DDBA9-780D-4D48-BBAA-4CCCD4FBE476}"/>
+              </a:ext>
+            </a:extLst>
+          </p:cNvPr>
+          <p:cNvSpPr>
+            <a:spLocks xmlns:a="http://schemas.openxmlformats.org/drawingml/2006/main" noGrp="1"/>
+          </p:cNvSpPr>
+          <p:nvPr/>
+        </p:nvSpPr>
+        <p:spPr>
+          <a:xfrm xmlns:a="http://schemas.openxmlformats.org/drawingml/2006/main">
+            <a:off x="8763000" y="4305300"/>
+            <a:ext cx="2143125" cy="228600"/>
+          </a:xfrm>
+          <a:prstGeom xmlns:a="http://schemas.openxmlformats.org/drawingml/2006/main" prst="rect">
+            <a:avLst/>
+          </a:prstGeom>
+          <a:solidFill xmlns:a="http://schemas.openxmlformats.org/drawingml/2006/main">
+            <a:srgbClr val="000000">
+              <a:alpha val="0"/>
+            </a:srgbClr>
+          </a:solidFill>
+          <a:ln xmlns:a="http://schemas.openxmlformats.org/drawingml/2006/main" w="0">
+            <a:solidFill>
+              <a:srgbClr val="000000">
+                <a:alpha val="0"/>
+              </a:srgbClr>
+            </a:solidFill>
+            <a:prstDash val="solid"/>
+          </a:ln>
+        </p:spPr>
+        <p:txBody>
+          <a:bodyPr xmlns:a="http://schemas.openxmlformats.org/drawingml/2006/main" lIns="0" tIns="0" rIns="0" bIns="0" anchor="t"/>
+          <a:lstStyle xmlns:a="http://schemas.openxmlformats.org/drawingml/2006/main"/>
+          <a:p xmlns:a="http://schemas.openxmlformats.org/drawingml/2006/main">
+            <a:pPr algn="l">
+              <a:defRPr sz="825" b="0">
+                <a:solidFill>
+                  <a:srgbClr val="111827"/>
+                </a:solidFill>
+                <a:latin typeface="Aptos"/>
+                <a:ea typeface="Aptos"/>
+                <a:cs typeface="Aptos"/>
+              </a:defRPr>
+            </a:pPr>
+            <a:r>
+              <a:rPr sz="825" b="0">
+                <a:solidFill>
+                  <a:srgbClr val="111827"/>
+                </a:solidFill>
+                <a:latin typeface="Aptos"/>
+                <a:ea typeface="Aptos"/>
+                <a:cs typeface="Aptos"/>
+              </a:rPr>
+              <a:t>Teaches varied valid routes</a:t>
+            </a:r>
+          </a:p>
+        </p:txBody>
+      </p:sp>
+      <p:sp>
+        <p:nvSpPr>
+          <p:cNvPr id="53" name="">
+            <a:extLst xmlns:a="http://schemas.openxmlformats.org/drawingml/2006/main">
+              <a:ext uri="{FF2B5EF4-FFF2-40B4-BE49-F238E27FC236}">
+                <a16:creationId xmlns:a16="http://schemas.microsoft.com/office/drawing/2014/main" id="{47C62582-551C-45AC-929E-839604C52D82}"/>
+              </a:ext>
+            </a:extLst>
+          </p:cNvPr>
+          <p:cNvSpPr>
+            <a:spLocks xmlns:a="http://schemas.openxmlformats.org/drawingml/2006/main" noGrp="1"/>
+          </p:cNvSpPr>
+          <p:nvPr/>
+        </p:nvSpPr>
+        <p:spPr>
+          <a:xfrm xmlns:a="http://schemas.openxmlformats.org/drawingml/2006/main">
+            <a:off x="666750" y="4629150"/>
+            <a:ext cx="1571625" cy="419100"/>
+          </a:xfrm>
+          <a:prstGeom xmlns:a="http://schemas.openxmlformats.org/drawingml/2006/main" prst="rect">
+            <a:avLst/>
+          </a:prstGeom>
+          <a:solidFill xmlns:a="http://schemas.openxmlformats.org/drawingml/2006/main">
+            <a:srgbClr val="FFFFFF"/>
+          </a:solidFill>
+          <a:ln xmlns:a="http://schemas.openxmlformats.org/drawingml/2006/main" w="9525">
+            <a:solidFill>
+              <a:srgbClr val="D9DEE7"/>
+            </a:solidFill>
+            <a:prstDash val="solid"/>
+          </a:ln>
+        </p:spPr>
+      </p:sp>
+      <p:sp>
+        <p:nvSpPr>
+          <p:cNvPr id="54" name="">
+            <a:extLst xmlns:a="http://schemas.openxmlformats.org/drawingml/2006/main">
+              <a:ext uri="{FF2B5EF4-FFF2-40B4-BE49-F238E27FC236}">
+                <a16:creationId xmlns:a16="http://schemas.microsoft.com/office/drawing/2014/main" id="{3E80B032-5A76-4C13-AA3D-2FEEC86F8EE0}"/>
+              </a:ext>
+            </a:extLst>
+          </p:cNvPr>
+          <p:cNvSpPr>
+            <a:spLocks xmlns:a="http://schemas.openxmlformats.org/drawingml/2006/main" noGrp="1"/>
+          </p:cNvSpPr>
+          <p:nvPr/>
+        </p:nvSpPr>
+        <p:spPr>
+          <a:xfrm xmlns:a="http://schemas.openxmlformats.org/drawingml/2006/main">
+            <a:off x="762000" y="4724400"/>
+            <a:ext cx="1381125" cy="228600"/>
+          </a:xfrm>
+          <a:prstGeom xmlns:a="http://schemas.openxmlformats.org/drawingml/2006/main" prst="rect">
+            <a:avLst/>
+          </a:prstGeom>
+          <a:solidFill xmlns:a="http://schemas.openxmlformats.org/drawingml/2006/main">
+            <a:srgbClr val="000000">
+              <a:alpha val="0"/>
+            </a:srgbClr>
+          </a:solidFill>
+          <a:ln xmlns:a="http://schemas.openxmlformats.org/drawingml/2006/main" w="0">
+            <a:solidFill>
+              <a:srgbClr val="000000">
+                <a:alpha val="0"/>
+              </a:srgbClr>
+            </a:solidFill>
+            <a:prstDash val="solid"/>
+          </a:ln>
+        </p:spPr>
+        <p:txBody>
+          <a:bodyPr xmlns:a="http://schemas.openxmlformats.org/drawingml/2006/main" lIns="0" tIns="0" rIns="0" bIns="0" anchor="t"/>
+          <a:lstStyle xmlns:a="http://schemas.openxmlformats.org/drawingml/2006/main"/>
+          <a:p xmlns:a="http://schemas.openxmlformats.org/drawingml/2006/main">
+            <a:pPr algn="l">
+              <a:defRPr sz="825" b="1">
+                <a:solidFill>
+                  <a:srgbClr val="111827"/>
+                </a:solidFill>
+                <a:latin typeface="Aptos"/>
+                <a:ea typeface="Aptos"/>
+                <a:cs typeface="Aptos"/>
+              </a:defRPr>
+            </a:pPr>
+            <a:r>
+              <a:rPr sz="825" b="1">
+                <a:solidFill>
+                  <a:srgbClr val="111827"/>
+                </a:solidFill>
+                <a:latin typeface="Aptos"/>
+                <a:ea typeface="Aptos"/>
+                <a:cs typeface="Aptos"/>
+              </a:rPr>
+              <a:t>SCFAM10-12</a:t>
+            </a:r>
+          </a:p>
+        </p:txBody>
+      </p:sp>
+      <p:sp>
+        <p:nvSpPr>
+          <p:cNvPr id="55" name="">
+            <a:extLst xmlns:a="http://schemas.openxmlformats.org/drawingml/2006/main">
+              <a:ext uri="{FF2B5EF4-FFF2-40B4-BE49-F238E27FC236}">
+                <a16:creationId xmlns:a16="http://schemas.microsoft.com/office/drawing/2014/main" id="{4BBF5F30-3A93-4ACD-94C9-E7E61AF8B18F}"/>
+              </a:ext>
+            </a:extLst>
+          </p:cNvPr>
+          <p:cNvSpPr>
+            <a:spLocks xmlns:a="http://schemas.openxmlformats.org/drawingml/2006/main" noGrp="1"/>
+          </p:cNvSpPr>
+          <p:nvPr/>
+        </p:nvSpPr>
+        <p:spPr>
+          <a:xfrm xmlns:a="http://schemas.openxmlformats.org/drawingml/2006/main">
+            <a:off x="2238375" y="4629150"/>
+            <a:ext cx="1571625" cy="419100"/>
+          </a:xfrm>
+          <a:prstGeom xmlns:a="http://schemas.openxmlformats.org/drawingml/2006/main" prst="rect">
+            <a:avLst/>
+          </a:prstGeom>
+          <a:solidFill xmlns:a="http://schemas.openxmlformats.org/drawingml/2006/main">
+            <a:srgbClr val="FFFFFF"/>
+          </a:solidFill>
+          <a:ln xmlns:a="http://schemas.openxmlformats.org/drawingml/2006/main" w="9525">
+            <a:solidFill>
+              <a:srgbClr val="D9DEE7"/>
+            </a:solidFill>
+            <a:prstDash val="solid"/>
+          </a:ln>
+        </p:spPr>
+      </p:sp>
+      <p:sp>
+        <p:nvSpPr>
+          <p:cNvPr id="56" name="">
+            <a:extLst xmlns:a="http://schemas.openxmlformats.org/drawingml/2006/main">
+              <a:ext uri="{FF2B5EF4-FFF2-40B4-BE49-F238E27FC236}">
+                <a16:creationId xmlns:a16="http://schemas.microsoft.com/office/drawing/2014/main" id="{CEE3AB9F-2C9F-4201-8E91-909E2E0ADBBB}"/>
+              </a:ext>
+            </a:extLst>
+          </p:cNvPr>
+          <p:cNvSpPr>
+            <a:spLocks xmlns:a="http://schemas.openxmlformats.org/drawingml/2006/main" noGrp="1"/>
+          </p:cNvSpPr>
+          <p:nvPr/>
+        </p:nvSpPr>
+        <p:spPr>
+          <a:xfrm xmlns:a="http://schemas.openxmlformats.org/drawingml/2006/main">
+            <a:off x="2333625" y="4724400"/>
+            <a:ext cx="1381125" cy="228600"/>
+          </a:xfrm>
+          <a:prstGeom xmlns:a="http://schemas.openxmlformats.org/drawingml/2006/main" prst="rect">
+            <a:avLst/>
+          </a:prstGeom>
+          <a:solidFill xmlns:a="http://schemas.openxmlformats.org/drawingml/2006/main">
+            <a:srgbClr val="000000">
+              <a:alpha val="0"/>
+            </a:srgbClr>
+          </a:solidFill>
+          <a:ln xmlns:a="http://schemas.openxmlformats.org/drawingml/2006/main" w="0">
+            <a:solidFill>
+              <a:srgbClr val="000000">
+                <a:alpha val="0"/>
+              </a:srgbClr>
+            </a:solidFill>
+            <a:prstDash val="solid"/>
+          </a:ln>
+        </p:spPr>
+        <p:txBody>
+          <a:bodyPr xmlns:a="http://schemas.openxmlformats.org/drawingml/2006/main" lIns="0" tIns="0" rIns="0" bIns="0" anchor="t"/>
+          <a:lstStyle xmlns:a="http://schemas.openxmlformats.org/drawingml/2006/main"/>
+          <a:p xmlns:a="http://schemas.openxmlformats.org/drawingml/2006/main">
+            <a:pPr algn="l">
+              <a:defRPr sz="825" b="0">
+                <a:solidFill>
+                  <a:srgbClr val="111827"/>
+                </a:solidFill>
+                <a:latin typeface="Aptos"/>
+                <a:ea typeface="Aptos"/>
+                <a:cs typeface="Aptos"/>
+              </a:defRPr>
+            </a:pPr>
+            <a:r>
+              <a:rPr sz="825" b="0">
+                <a:solidFill>
+                  <a:srgbClr val="111827"/>
+                </a:solidFill>
+                <a:latin typeface="Aptos"/>
+                <a:ea typeface="Aptos"/>
+                <a:cs typeface="Aptos"/>
+              </a:rPr>
+              <a:t>4-6</a:t>
+            </a:r>
+          </a:p>
+        </p:txBody>
+      </p:sp>
+      <p:sp>
+        <p:nvSpPr>
+          <p:cNvPr id="57" name="">
+            <a:extLst xmlns:a="http://schemas.openxmlformats.org/drawingml/2006/main">
+              <a:ext uri="{FF2B5EF4-FFF2-40B4-BE49-F238E27FC236}">
+                <a16:creationId xmlns:a16="http://schemas.microsoft.com/office/drawing/2014/main" id="{F396C9EA-4915-48BE-A206-AFD01C3CB78E}"/>
+              </a:ext>
+            </a:extLst>
+          </p:cNvPr>
+          <p:cNvSpPr>
+            <a:spLocks xmlns:a="http://schemas.openxmlformats.org/drawingml/2006/main" noGrp="1"/>
+          </p:cNvSpPr>
+          <p:nvPr/>
+        </p:nvSpPr>
+        <p:spPr>
+          <a:xfrm xmlns:a="http://schemas.openxmlformats.org/drawingml/2006/main">
+            <a:off x="3810000" y="4629150"/>
+            <a:ext cx="1619250" cy="419100"/>
+          </a:xfrm>
+          <a:prstGeom xmlns:a="http://schemas.openxmlformats.org/drawingml/2006/main" prst="rect">
+            <a:avLst/>
+          </a:prstGeom>
+          <a:solidFill xmlns:a="http://schemas.openxmlformats.org/drawingml/2006/main">
+            <a:srgbClr val="FFFFFF"/>
+          </a:solidFill>
+          <a:ln xmlns:a="http://schemas.openxmlformats.org/drawingml/2006/main" w="9525">
+            <a:solidFill>
+              <a:srgbClr val="D9DEE7"/>
+            </a:solidFill>
+            <a:prstDash val="solid"/>
+          </a:ln>
+        </p:spPr>
+      </p:sp>
+      <p:sp>
+        <p:nvSpPr>
+          <p:cNvPr id="58" name="">
+            <a:extLst xmlns:a="http://schemas.openxmlformats.org/drawingml/2006/main">
+              <a:ext uri="{FF2B5EF4-FFF2-40B4-BE49-F238E27FC236}">
+                <a16:creationId xmlns:a16="http://schemas.microsoft.com/office/drawing/2014/main" id="{055AB6AA-7EB5-4103-81A2-27DD52D252DA}"/>
+              </a:ext>
+            </a:extLst>
+          </p:cNvPr>
+          <p:cNvSpPr>
+            <a:spLocks xmlns:a="http://schemas.openxmlformats.org/drawingml/2006/main" noGrp="1"/>
+          </p:cNvSpPr>
+          <p:nvPr/>
+        </p:nvSpPr>
+        <p:spPr>
+          <a:xfrm xmlns:a="http://schemas.openxmlformats.org/drawingml/2006/main">
+            <a:off x="3905250" y="4724400"/>
+            <a:ext cx="1428750" cy="228600"/>
+          </a:xfrm>
+          <a:prstGeom xmlns:a="http://schemas.openxmlformats.org/drawingml/2006/main" prst="rect">
+            <a:avLst/>
+          </a:prstGeom>
+          <a:solidFill xmlns:a="http://schemas.openxmlformats.org/drawingml/2006/main">
+            <a:srgbClr val="000000">
+              <a:alpha val="0"/>
+            </a:srgbClr>
+          </a:solidFill>
+          <a:ln xmlns:a="http://schemas.openxmlformats.org/drawingml/2006/main" w="0">
+            <a:solidFill>
+              <a:srgbClr val="000000">
+                <a:alpha val="0"/>
+              </a:srgbClr>
+            </a:solidFill>
+            <a:prstDash val="solid"/>
+          </a:ln>
+        </p:spPr>
+        <p:txBody>
+          <a:bodyPr xmlns:a="http://schemas.openxmlformats.org/drawingml/2006/main" lIns="0" tIns="0" rIns="0" bIns="0" anchor="t"/>
+          <a:lstStyle xmlns:a="http://schemas.openxmlformats.org/drawingml/2006/main"/>
+          <a:p xmlns:a="http://schemas.openxmlformats.org/drawingml/2006/main">
+            <a:pPr algn="l">
+              <a:defRPr sz="825" b="0">
+                <a:solidFill>
+                  <a:srgbClr val="111827"/>
+                </a:solidFill>
+                <a:latin typeface="Aptos"/>
+                <a:ea typeface="Aptos"/>
+                <a:cs typeface="Aptos"/>
+              </a:defRPr>
+            </a:pPr>
+            <a:r>
+              <a:rPr sz="825" b="0">
+                <a:solidFill>
+                  <a:srgbClr val="111827"/>
+                </a:solidFill>
+                <a:latin typeface="Aptos"/>
+                <a:ea typeface="Aptos"/>
+                <a:cs typeface="Aptos"/>
+              </a:rPr>
+              <a:t>mixed</a:t>
+            </a:r>
+          </a:p>
+        </p:txBody>
+      </p:sp>
+      <p:sp>
+        <p:nvSpPr>
+          <p:cNvPr id="59" name="">
+            <a:extLst xmlns:a="http://schemas.openxmlformats.org/drawingml/2006/main">
+              <a:ext uri="{FF2B5EF4-FFF2-40B4-BE49-F238E27FC236}">
+                <a16:creationId xmlns:a16="http://schemas.microsoft.com/office/drawing/2014/main" id="{0A9EB538-0330-4219-B7E6-5D72C0664BBB}"/>
+              </a:ext>
+            </a:extLst>
+          </p:cNvPr>
+          <p:cNvSpPr>
+            <a:spLocks xmlns:a="http://schemas.openxmlformats.org/drawingml/2006/main" noGrp="1"/>
+          </p:cNvSpPr>
+          <p:nvPr/>
+        </p:nvSpPr>
+        <p:spPr>
+          <a:xfrm xmlns:a="http://schemas.openxmlformats.org/drawingml/2006/main">
+            <a:off x="5429250" y="4629150"/>
+            <a:ext cx="1571625" cy="419100"/>
+          </a:xfrm>
+          <a:prstGeom xmlns:a="http://schemas.openxmlformats.org/drawingml/2006/main" prst="rect">
+            <a:avLst/>
+          </a:prstGeom>
+          <a:solidFill xmlns:a="http://schemas.openxmlformats.org/drawingml/2006/main">
+            <a:srgbClr val="FFFFFF"/>
+          </a:solidFill>
+          <a:ln xmlns:a="http://schemas.openxmlformats.org/drawingml/2006/main" w="9525">
+            <a:solidFill>
+              <a:srgbClr val="D9DEE7"/>
+            </a:solidFill>
+            <a:prstDash val="solid"/>
+          </a:ln>
+        </p:spPr>
+      </p:sp>
+      <p:sp>
+        <p:nvSpPr>
+          <p:cNvPr id="60" name="">
+            <a:extLst xmlns:a="http://schemas.openxmlformats.org/drawingml/2006/main">
+              <a:ext uri="{FF2B5EF4-FFF2-40B4-BE49-F238E27FC236}">
+                <a16:creationId xmlns:a16="http://schemas.microsoft.com/office/drawing/2014/main" id="{148AD3C8-9889-4396-B419-039307739CD1}"/>
+              </a:ext>
+            </a:extLst>
+          </p:cNvPr>
+          <p:cNvSpPr>
+            <a:spLocks xmlns:a="http://schemas.openxmlformats.org/drawingml/2006/main" noGrp="1"/>
+          </p:cNvSpPr>
+          <p:nvPr/>
+        </p:nvSpPr>
+        <p:spPr>
+          <a:xfrm xmlns:a="http://schemas.openxmlformats.org/drawingml/2006/main">
+            <a:off x="5524500" y="4724400"/>
+            <a:ext cx="1381125" cy="228600"/>
+          </a:xfrm>
+          <a:prstGeom xmlns:a="http://schemas.openxmlformats.org/drawingml/2006/main" prst="rect">
+            <a:avLst/>
+          </a:prstGeom>
+          <a:solidFill xmlns:a="http://schemas.openxmlformats.org/drawingml/2006/main">
+            <a:srgbClr val="000000">
+              <a:alpha val="0"/>
+            </a:srgbClr>
+          </a:solidFill>
+          <a:ln xmlns:a="http://schemas.openxmlformats.org/drawingml/2006/main" w="0">
+            <a:solidFill>
+              <a:srgbClr val="000000">
+                <a:alpha val="0"/>
+              </a:srgbClr>
+            </a:solidFill>
+            <a:prstDash val="solid"/>
+          </a:ln>
+        </p:spPr>
+        <p:txBody>
+          <a:bodyPr xmlns:a="http://schemas.openxmlformats.org/drawingml/2006/main" lIns="0" tIns="0" rIns="0" bIns="0" anchor="t"/>
+          <a:lstStyle xmlns:a="http://schemas.openxmlformats.org/drawingml/2006/main"/>
+          <a:p xmlns:a="http://schemas.openxmlformats.org/drawingml/2006/main">
+            <a:pPr algn="l">
+              <a:defRPr sz="825" b="0">
+                <a:solidFill>
+                  <a:srgbClr val="111827"/>
+                </a:solidFill>
+                <a:latin typeface="Aptos"/>
+                <a:ea typeface="Aptos"/>
+                <a:cs typeface="Aptos"/>
+              </a:defRPr>
+            </a:pPr>
+            <a:r>
+              <a:rPr sz="825" b="0">
+                <a:solidFill>
+                  <a:srgbClr val="111827"/>
+                </a:solidFill>
+                <a:latin typeface="Aptos"/>
+                <a:ea typeface="Aptos"/>
+                <a:cs typeface="Aptos"/>
+              </a:rPr>
+              <a:t>0.20-0.90</a:t>
+            </a:r>
+          </a:p>
+        </p:txBody>
+      </p:sp>
+      <p:sp>
+        <p:nvSpPr>
+          <p:cNvPr id="61" name="">
+            <a:extLst xmlns:a="http://schemas.openxmlformats.org/drawingml/2006/main">
+              <a:ext uri="{FF2B5EF4-FFF2-40B4-BE49-F238E27FC236}">
+                <a16:creationId xmlns:a16="http://schemas.microsoft.com/office/drawing/2014/main" id="{C2D18A59-FA60-4692-B5E4-4B0C22956EFD}"/>
+              </a:ext>
+            </a:extLst>
+          </p:cNvPr>
+          <p:cNvSpPr>
+            <a:spLocks xmlns:a="http://schemas.openxmlformats.org/drawingml/2006/main" noGrp="1"/>
+          </p:cNvSpPr>
+          <p:nvPr/>
+        </p:nvSpPr>
+        <p:spPr>
+          <a:xfrm xmlns:a="http://schemas.openxmlformats.org/drawingml/2006/main">
+            <a:off x="7000875" y="4629150"/>
+            <a:ext cx="1666875" cy="419100"/>
+          </a:xfrm>
+          <a:prstGeom xmlns:a="http://schemas.openxmlformats.org/drawingml/2006/main" prst="rect">
+            <a:avLst/>
+          </a:prstGeom>
+          <a:solidFill xmlns:a="http://schemas.openxmlformats.org/drawingml/2006/main">
+            <a:srgbClr val="DCEAFE"/>
+          </a:solidFill>
+          <a:ln xmlns:a="http://schemas.openxmlformats.org/drawingml/2006/main" w="9525">
+            <a:solidFill>
+              <a:srgbClr val="D9DEE7"/>
+            </a:solidFill>
+            <a:prstDash val="solid"/>
+          </a:ln>
+        </p:spPr>
+      </p:sp>
+      <p:sp>
+        <p:nvSpPr>
+          <p:cNvPr id="62" name="">
+            <a:extLst xmlns:a="http://schemas.openxmlformats.org/drawingml/2006/main">
+              <a:ext uri="{FF2B5EF4-FFF2-40B4-BE49-F238E27FC236}">
+                <a16:creationId xmlns:a16="http://schemas.microsoft.com/office/drawing/2014/main" id="{DC068CE9-822F-4F7F-8E2B-B235154D9E23}"/>
+              </a:ext>
+            </a:extLst>
+          </p:cNvPr>
+          <p:cNvSpPr>
+            <a:spLocks xmlns:a="http://schemas.openxmlformats.org/drawingml/2006/main" noGrp="1"/>
+          </p:cNvSpPr>
+          <p:nvPr/>
+        </p:nvSpPr>
+        <p:spPr>
+          <a:xfrm xmlns:a="http://schemas.openxmlformats.org/drawingml/2006/main">
+            <a:off x="7096125" y="4724400"/>
+            <a:ext cx="1476375" cy="228600"/>
+          </a:xfrm>
+          <a:prstGeom xmlns:a="http://schemas.openxmlformats.org/drawingml/2006/main" prst="rect">
+            <a:avLst/>
+          </a:prstGeom>
+          <a:solidFill xmlns:a="http://schemas.openxmlformats.org/drawingml/2006/main">
+            <a:srgbClr val="000000">
+              <a:alpha val="0"/>
+            </a:srgbClr>
+          </a:solidFill>
+          <a:ln xmlns:a="http://schemas.openxmlformats.org/drawingml/2006/main" w="0">
+            <a:solidFill>
+              <a:srgbClr val="000000">
+                <a:alpha val="0"/>
+              </a:srgbClr>
+            </a:solidFill>
+            <a:prstDash val="solid"/>
+          </a:ln>
+        </p:spPr>
+        <p:txBody>
+          <a:bodyPr xmlns:a="http://schemas.openxmlformats.org/drawingml/2006/main" lIns="0" tIns="0" rIns="0" bIns="0" anchor="t"/>
+          <a:lstStyle xmlns:a="http://schemas.openxmlformats.org/drawingml/2006/main"/>
+          <a:p xmlns:a="http://schemas.openxmlformats.org/drawingml/2006/main">
+            <a:pPr algn="l">
+              <a:defRPr sz="825" b="0">
+                <a:solidFill>
+                  <a:srgbClr val="111827"/>
+                </a:solidFill>
+                <a:latin typeface="Aptos"/>
+                <a:ea typeface="Aptos"/>
+                <a:cs typeface="Aptos"/>
+              </a:defRPr>
+            </a:pPr>
+            <a:r>
+              <a:rPr sz="825" b="0">
+                <a:solidFill>
+                  <a:srgbClr val="111827"/>
+                </a:solidFill>
+                <a:latin typeface="Aptos"/>
+                <a:ea typeface="Aptos"/>
+                <a:cs typeface="Aptos"/>
+              </a:rPr>
+              <a:t>unseen test</a:t>
+            </a:r>
+          </a:p>
+        </p:txBody>
+      </p:sp>
+      <p:sp>
+        <p:nvSpPr>
+          <p:cNvPr id="63" name="">
+            <a:extLst xmlns:a="http://schemas.openxmlformats.org/drawingml/2006/main">
+              <a:ext uri="{FF2B5EF4-FFF2-40B4-BE49-F238E27FC236}">
+                <a16:creationId xmlns:a16="http://schemas.microsoft.com/office/drawing/2014/main" id="{9B456C2A-C948-4A77-89A3-6348FDD62CCB}"/>
+              </a:ext>
+            </a:extLst>
+          </p:cNvPr>
+          <p:cNvSpPr>
+            <a:spLocks xmlns:a="http://schemas.openxmlformats.org/drawingml/2006/main" noGrp="1"/>
+          </p:cNvSpPr>
+          <p:nvPr/>
+        </p:nvSpPr>
+        <p:spPr>
+          <a:xfrm xmlns:a="http://schemas.openxmlformats.org/drawingml/2006/main">
+            <a:off x="8667750" y="4629150"/>
+            <a:ext cx="2333625" cy="419100"/>
+          </a:xfrm>
+          <a:prstGeom xmlns:a="http://schemas.openxmlformats.org/drawingml/2006/main" prst="rect">
+            <a:avLst/>
+          </a:prstGeom>
+          <a:solidFill xmlns:a="http://schemas.openxmlformats.org/drawingml/2006/main">
+            <a:srgbClr val="FFFFFF"/>
+          </a:solidFill>
+          <a:ln xmlns:a="http://schemas.openxmlformats.org/drawingml/2006/main" w="9525">
+            <a:solidFill>
+              <a:srgbClr val="D9DEE7"/>
+            </a:solidFill>
+            <a:prstDash val="solid"/>
+          </a:ln>
+        </p:spPr>
+      </p:sp>
+      <p:sp>
+        <p:nvSpPr>
+          <p:cNvPr id="64" name="">
+            <a:extLst xmlns:a="http://schemas.openxmlformats.org/drawingml/2006/main">
+              <a:ext uri="{FF2B5EF4-FFF2-40B4-BE49-F238E27FC236}">
+                <a16:creationId xmlns:a16="http://schemas.microsoft.com/office/drawing/2014/main" id="{169F694B-8889-44D5-B7B9-2FD7EC00831A}"/>
+              </a:ext>
+            </a:extLst>
+          </p:cNvPr>
+          <p:cNvSpPr>
+            <a:spLocks xmlns:a="http://schemas.openxmlformats.org/drawingml/2006/main" noGrp="1"/>
+          </p:cNvSpPr>
+          <p:nvPr/>
+        </p:nvSpPr>
+        <p:spPr>
+          <a:xfrm xmlns:a="http://schemas.openxmlformats.org/drawingml/2006/main">
+            <a:off x="8763000" y="4724400"/>
+            <a:ext cx="2143125" cy="228600"/>
+          </a:xfrm>
+          <a:prstGeom xmlns:a="http://schemas.openxmlformats.org/drawingml/2006/main" prst="rect">
+            <a:avLst/>
+          </a:prstGeom>
+          <a:solidFill xmlns:a="http://schemas.openxmlformats.org/drawingml/2006/main">
+            <a:srgbClr val="000000">
+              <a:alpha val="0"/>
+            </a:srgbClr>
+          </a:solidFill>
+          <a:ln xmlns:a="http://schemas.openxmlformats.org/drawingml/2006/main" w="0">
+            <a:solidFill>
+              <a:srgbClr val="000000">
+                <a:alpha val="0"/>
+              </a:srgbClr>
+            </a:solidFill>
+            <a:prstDash val="solid"/>
+          </a:ln>
+        </p:spPr>
+        <p:txBody>
+          <a:bodyPr xmlns:a="http://schemas.openxmlformats.org/drawingml/2006/main" lIns="0" tIns="0" rIns="0" bIns="0" anchor="t"/>
+          <a:lstStyle xmlns:a="http://schemas.openxmlformats.org/drawingml/2006/main"/>
+          <a:p xmlns:a="http://schemas.openxmlformats.org/drawingml/2006/main">
+            <a:pPr algn="l">
+              <a:defRPr sz="825" b="0">
+                <a:solidFill>
+                  <a:srgbClr val="111827"/>
+                </a:solidFill>
+                <a:latin typeface="Aptos"/>
+                <a:ea typeface="Aptos"/>
+                <a:cs typeface="Aptos"/>
+              </a:defRPr>
+            </a:pPr>
+            <a:r>
+              <a:rPr sz="825" b="0">
+                <a:solidFill>
+                  <a:srgbClr val="111827"/>
+                </a:solidFill>
+                <a:latin typeface="Aptos"/>
+                <a:ea typeface="Aptos"/>
+                <a:cs typeface="Aptos"/>
+              </a:rPr>
+              <a:t>Tests hidden-family behavior</a:t>
+            </a:r>
+          </a:p>
+        </p:txBody>
+      </p:sp>
+      <p:sp>
+        <p:nvSpPr>
+          <p:cNvPr id="65" name="">
+            <a:extLst xmlns:a="http://schemas.openxmlformats.org/drawingml/2006/main">
+              <a:ext uri="{FF2B5EF4-FFF2-40B4-BE49-F238E27FC236}">
+                <a16:creationId xmlns:a16="http://schemas.microsoft.com/office/drawing/2014/main" id="{492D88E4-9116-4A01-8177-2901ABDB59F1}"/>
+              </a:ext>
+            </a:extLst>
+          </p:cNvPr>
+          <p:cNvSpPr>
+            <a:spLocks xmlns:a="http://schemas.openxmlformats.org/drawingml/2006/main" noGrp="1"/>
+          </p:cNvSpPr>
+          <p:nvPr/>
+        </p:nvSpPr>
+        <p:spPr>
+          <a:xfrm xmlns:a="http://schemas.openxmlformats.org/drawingml/2006/main">
+            <a:off x="1047750" y="5429250"/>
+            <a:ext cx="9334500" cy="552450"/>
+          </a:xfrm>
+          <a:prstGeom xmlns:a="http://schemas.openxmlformats.org/drawingml/2006/main" prst="rect">
+            <a:avLst/>
+          </a:prstGeom>
+          <a:solidFill xmlns:a="http://schemas.openxmlformats.org/drawingml/2006/main">
+            <a:srgbClr val="FFFFFF"/>
+          </a:solidFill>
+          <a:ln xmlns:a="http://schemas.openxmlformats.org/drawingml/2006/main" w="9525">
+            <a:solidFill>
+              <a:srgbClr val="D9DEE7"/>
+            </a:solidFill>
+            <a:prstDash val="solid"/>
+          </a:ln>
+        </p:spPr>
+      </p:sp>
+      <p:sp>
+        <p:nvSpPr>
+          <p:cNvPr id="66" name="">
+            <a:extLst xmlns:a="http://schemas.openxmlformats.org/drawingml/2006/main">
+              <a:ext uri="{FF2B5EF4-FFF2-40B4-BE49-F238E27FC236}">
+                <a16:creationId xmlns:a16="http://schemas.microsoft.com/office/drawing/2014/main" id="{6E7F1B65-409D-4425-927E-1441ED9A0202}"/>
+              </a:ext>
+            </a:extLst>
+          </p:cNvPr>
+          <p:cNvSpPr>
+            <a:spLocks xmlns:a="http://schemas.openxmlformats.org/drawingml/2006/main" noGrp="1"/>
+          </p:cNvSpPr>
+          <p:nvPr/>
+        </p:nvSpPr>
+        <p:spPr>
+          <a:xfrm xmlns:a="http://schemas.openxmlformats.org/drawingml/2006/main">
+            <a:off x="1333500" y="5610225"/>
+            <a:ext cx="8763000" cy="228600"/>
+          </a:xfrm>
+          <a:prstGeom xmlns:a="http://schemas.openxmlformats.org/drawingml/2006/main" prst="rect">
+            <a:avLst/>
+          </a:prstGeom>
+          <a:solidFill xmlns:a="http://schemas.openxmlformats.org/drawingml/2006/main">
+            <a:srgbClr val="000000">
+              <a:alpha val="0"/>
+            </a:srgbClr>
+          </a:solidFill>
+          <a:ln xmlns:a="http://schemas.openxmlformats.org/drawingml/2006/main" w="0">
+            <a:solidFill>
+              <a:srgbClr val="000000">
+                <a:alpha val="0"/>
+              </a:srgbClr>
+            </a:solidFill>
+            <a:prstDash val="solid"/>
+          </a:ln>
+        </p:spPr>
+        <p:txBody>
+          <a:bodyPr xmlns:a="http://schemas.openxmlformats.org/drawingml/2006/main" lIns="0" tIns="0" rIns="0" bIns="0" anchor="t"/>
+          <a:lstStyle xmlns:a="http://schemas.openxmlformats.org/drawingml/2006/main"/>
+          <a:p xmlns:a="http://schemas.openxmlformats.org/drawingml/2006/main">
+            <a:pPr algn="l">
+              <a:defRPr sz="1050" b="1">
+                <a:solidFill>
+                  <a:srgbClr val="111827"/>
+                </a:solidFill>
+                <a:latin typeface="Aptos"/>
+                <a:ea typeface="Aptos"/>
+                <a:cs typeface="Aptos"/>
+              </a:defRPr>
+            </a:pPr>
+            <a:r>
+              <a:rPr sz="1050" b="1">
+                <a:solidFill>
+                  <a:srgbClr val="111827"/>
+                </a:solidFill>
+                <a:latin typeface="Aptos"/>
+                <a:ea typeface="Aptos"/>
+                <a:cs typeface="Aptos"/>
+              </a:rPr>
+              <a:t>OOD claim: we keep the step vocabulary fixed, then vary structure, optional blocks, and route depth. The model must learn process order instead of memorizing one recipe.</a:t>
+            </a:r>
+          </a:p>
+        </p:txBody>
+      </p:sp>
+      <p:sp>
+        <p:nvSpPr>
+          <p:cNvPr id="67" name="">
+            <a:extLst xmlns:a="http://schemas.openxmlformats.org/drawingml/2006/main">
+              <a:ext uri="{FF2B5EF4-FFF2-40B4-BE49-F238E27FC236}">
+                <a16:creationId xmlns:a16="http://schemas.microsoft.com/office/drawing/2014/main" id="{79B18221-F111-443D-B321-B0F783A6DB42}"/>
+              </a:ext>
+            </a:extLst>
+          </p:cNvPr>
+          <p:cNvSpPr>
+            <a:spLocks xmlns:a="http://schemas.openxmlformats.org/drawingml/2006/main" noGrp="1"/>
+          </p:cNvSpPr>
+          <p:nvPr/>
+        </p:nvSpPr>
+        <p:spPr>
+          <a:xfrm xmlns:a="http://schemas.openxmlformats.org/drawingml/2006/main">
+            <a:off x="571500" y="6496050"/>
+            <a:ext cx="7239000" cy="190500"/>
+          </a:xfrm>
+          <a:prstGeom xmlns:a="http://schemas.openxmlformats.org/drawingml/2006/main" prst="rect">
+            <a:avLst/>
+          </a:prstGeom>
+          <a:solidFill xmlns:a="http://schemas.openxmlformats.org/drawingml/2006/main">
+            <a:srgbClr val="000000">
+              <a:alpha val="0"/>
+            </a:srgbClr>
+          </a:solidFill>
+          <a:ln xmlns:a="http://schemas.openxmlformats.org/drawingml/2006/main" w="0">
+            <a:solidFill>
+              <a:srgbClr val="000000">
+                <a:alpha val="0"/>
+              </a:srgbClr>
+            </a:solidFill>
+            <a:prstDash val="solid"/>
+          </a:ln>
+        </p:spPr>
+        <p:txBody>
+          <a:bodyPr xmlns:a="http://schemas.openxmlformats.org/drawingml/2006/main" lIns="0" tIns="0" rIns="0" bIns="0" anchor="t"/>
+          <a:lstStyle xmlns:a="http://schemas.openxmlformats.org/drawingml/2006/main"/>
+          <a:p xmlns:a="http://schemas.openxmlformats.org/drawingml/2006/main">
+            <a:pPr algn="l">
               <a:defRPr sz="750" b="0">
                 <a:solidFill>
                   <a:srgbClr val="7B8494"/>
@@ -7526,7 +9009,7 @@
     </p:spTree>
     <p:extLst>
       <p:ext uri="{BB962C8B-B14F-4D97-AF65-F5344CB8AC3E}">
-        <p14:creationId xmlns:p14="http://schemas.microsoft.com/office/powerpoint/2010/main" val="1226576218"/>
+        <p14:creationId xmlns:p14="http://schemas.microsoft.com/office/powerpoint/2010/main" val="190496228"/>
       </p:ext>
     </p:extLst>
   </p:cSld>
@@ -7550,7 +9033,7 @@
           <p:cNvPr id="1" name="">
             <a:extLst xmlns:a="http://schemas.openxmlformats.org/drawingml/2006/main">
               <a:ext uri="{FF2B5EF4-FFF2-40B4-BE49-F238E27FC236}">
-                <a16:creationId xmlns:a16="http://schemas.microsoft.com/office/drawing/2014/main" id="{0A079DE8-9857-4023-B776-2AA43F0FBC74}"/>
+                <a16:creationId xmlns:a16="http://schemas.microsoft.com/office/drawing/2014/main" id="{0B6B7DA0-C3AF-40A3-96B5-AF33EB395A9E}"/>
               </a:ext>
             </a:extLst>
           </p:cNvPr>
@@ -7585,7 +9068,7 @@
           <p:cNvPr id="2" name="">
             <a:extLst xmlns:a="http://schemas.openxmlformats.org/drawingml/2006/main">
               <a:ext uri="{FF2B5EF4-FFF2-40B4-BE49-F238E27FC236}">
-                <a16:creationId xmlns:a16="http://schemas.microsoft.com/office/drawing/2014/main" id="{B36A3A85-1115-40CF-BC50-D2DD7C2A1900}"/>
+                <a16:creationId xmlns:a16="http://schemas.microsoft.com/office/drawing/2014/main" id="{2016B1D1-A6A3-4061-B4A4-DBF0256429BD}"/>
               </a:ext>
             </a:extLst>
           </p:cNvPr>
@@ -7649,7 +9132,7 @@
           <p:cNvPr id="3" name="">
             <a:extLst xmlns:a="http://schemas.openxmlformats.org/drawingml/2006/main">
               <a:ext uri="{FF2B5EF4-FFF2-40B4-BE49-F238E27FC236}">
-                <a16:creationId xmlns:a16="http://schemas.microsoft.com/office/drawing/2014/main" id="{F9F90BD6-2F93-466F-A543-FC638BA18B96}"/>
+                <a16:creationId xmlns:a16="http://schemas.microsoft.com/office/drawing/2014/main" id="{241C3872-AC94-4F6F-82B1-23F7984C1AA1}"/>
               </a:ext>
             </a:extLst>
           </p:cNvPr>
@@ -7713,7 +9196,7 @@
           <p:cNvPr id="4" name="">
             <a:extLst xmlns:a="http://schemas.openxmlformats.org/drawingml/2006/main">
               <a:ext uri="{FF2B5EF4-FFF2-40B4-BE49-F238E27FC236}">
-                <a16:creationId xmlns:a16="http://schemas.microsoft.com/office/drawing/2014/main" id="{B2F6C626-4466-4B8B-B1DD-BBF671062511}"/>
+                <a16:creationId xmlns:a16="http://schemas.microsoft.com/office/drawing/2014/main" id="{59A23371-3EBC-4A00-93FB-19935D8C53EF}"/>
               </a:ext>
             </a:extLst>
           </p:cNvPr>
@@ -7746,7 +9229,7 @@
           <p:cNvPr id="5" name="">
             <a:extLst xmlns:a="http://schemas.openxmlformats.org/drawingml/2006/main">
               <a:ext uri="{FF2B5EF4-FFF2-40B4-BE49-F238E27FC236}">
-                <a16:creationId xmlns:a16="http://schemas.microsoft.com/office/drawing/2014/main" id="{BCF0B362-71C7-434E-80FF-6E22A8C781D6}"/>
+                <a16:creationId xmlns:a16="http://schemas.microsoft.com/office/drawing/2014/main" id="{C6492A54-665E-4C13-A711-A2D82C4EE019}"/>
               </a:ext>
             </a:extLst>
           </p:cNvPr>
@@ -7779,7 +9262,7 @@
           <p:cNvPr id="6" name="">
             <a:extLst xmlns:a="http://schemas.openxmlformats.org/drawingml/2006/main">
               <a:ext uri="{FF2B5EF4-FFF2-40B4-BE49-F238E27FC236}">
-                <a16:creationId xmlns:a16="http://schemas.microsoft.com/office/drawing/2014/main" id="{B1EE9BD1-B05B-4719-85C1-A83BE4412B1A}"/>
+                <a16:creationId xmlns:a16="http://schemas.microsoft.com/office/drawing/2014/main" id="{12C7BAFD-DE94-4674-932F-A0078A7301E2}"/>
               </a:ext>
             </a:extLst>
           </p:cNvPr>
@@ -7843,7 +9326,7 @@
           <p:cNvPr id="7" name="">
             <a:extLst xmlns:a="http://schemas.openxmlformats.org/drawingml/2006/main">
               <a:ext uri="{FF2B5EF4-FFF2-40B4-BE49-F238E27FC236}">
-                <a16:creationId xmlns:a16="http://schemas.microsoft.com/office/drawing/2014/main" id="{73F9DB77-956B-40B9-8988-9E60C101637E}"/>
+                <a16:creationId xmlns:a16="http://schemas.microsoft.com/office/drawing/2014/main" id="{4CD8B72C-DC2B-4E38-888C-6A63E6F7EECA}"/>
               </a:ext>
             </a:extLst>
           </p:cNvPr>
@@ -7876,7 +9359,7 @@
           <p:cNvPr id="8" name="">
             <a:extLst xmlns:a="http://schemas.openxmlformats.org/drawingml/2006/main">
               <a:ext uri="{FF2B5EF4-FFF2-40B4-BE49-F238E27FC236}">
-                <a16:creationId xmlns:a16="http://schemas.microsoft.com/office/drawing/2014/main" id="{34C74007-060B-401C-AFB9-082F00BA7F7E}"/>
+                <a16:creationId xmlns:a16="http://schemas.microsoft.com/office/drawing/2014/main" id="{D38A1836-12AA-4BAF-852D-DCC491E79850}"/>
               </a:ext>
             </a:extLst>
           </p:cNvPr>
@@ -7940,7 +9423,7 @@
           <p:cNvPr id="9" name="">
             <a:extLst xmlns:a="http://schemas.openxmlformats.org/drawingml/2006/main">
               <a:ext uri="{FF2B5EF4-FFF2-40B4-BE49-F238E27FC236}">
-                <a16:creationId xmlns:a16="http://schemas.microsoft.com/office/drawing/2014/main" id="{5F708452-E7AA-48BA-8B10-4D5629FC484E}"/>
+                <a16:creationId xmlns:a16="http://schemas.microsoft.com/office/drawing/2014/main" id="{F1E0B1BC-EAE6-4239-A926-3BFF5E08DD97}"/>
               </a:ext>
             </a:extLst>
           </p:cNvPr>
@@ -8004,7 +9487,7 @@
           <p:cNvPr id="10" name="">
             <a:extLst xmlns:a="http://schemas.openxmlformats.org/drawingml/2006/main">
               <a:ext uri="{FF2B5EF4-FFF2-40B4-BE49-F238E27FC236}">
-                <a16:creationId xmlns:a16="http://schemas.microsoft.com/office/drawing/2014/main" id="{6EB12A80-65D0-4CA2-AF93-E4E60ACDCE9A}"/>
+                <a16:creationId xmlns:a16="http://schemas.microsoft.com/office/drawing/2014/main" id="{756269B0-BC3B-4AA4-9FFE-05BC463A6ABE}"/>
               </a:ext>
             </a:extLst>
           </p:cNvPr>
@@ -8037,7 +9520,7 @@
           <p:cNvPr id="11" name="">
             <a:extLst xmlns:a="http://schemas.openxmlformats.org/drawingml/2006/main">
               <a:ext uri="{FF2B5EF4-FFF2-40B4-BE49-F238E27FC236}">
-                <a16:creationId xmlns:a16="http://schemas.microsoft.com/office/drawing/2014/main" id="{3C96ED63-F261-4E0A-BEE7-56AE50F8346C}"/>
+                <a16:creationId xmlns:a16="http://schemas.microsoft.com/office/drawing/2014/main" id="{79C63570-9F80-48C4-9A9A-620FC91CCBA2}"/>
               </a:ext>
             </a:extLst>
           </p:cNvPr>
@@ -8070,7 +9553,7 @@
           <p:cNvPr id="12" name="">
             <a:extLst xmlns:a="http://schemas.openxmlformats.org/drawingml/2006/main">
               <a:ext uri="{FF2B5EF4-FFF2-40B4-BE49-F238E27FC236}">
-                <a16:creationId xmlns:a16="http://schemas.microsoft.com/office/drawing/2014/main" id="{F0B38E4A-4B1A-4CCB-A1D3-1C5CDD925D63}"/>
+                <a16:creationId xmlns:a16="http://schemas.microsoft.com/office/drawing/2014/main" id="{BF35A8B2-8162-4343-B27E-68B57729B7B6}"/>
               </a:ext>
             </a:extLst>
           </p:cNvPr>
@@ -8103,7 +9586,7 @@
           <p:cNvPr id="13" name="">
             <a:extLst xmlns:a="http://schemas.openxmlformats.org/drawingml/2006/main">
               <a:ext uri="{FF2B5EF4-FFF2-40B4-BE49-F238E27FC236}">
-                <a16:creationId xmlns:a16="http://schemas.microsoft.com/office/drawing/2014/main" id="{4E8F856E-2752-4CDB-ABF4-C5911FC476CE}"/>
+                <a16:creationId xmlns:a16="http://schemas.microsoft.com/office/drawing/2014/main" id="{2B39A5C2-02A5-4FA6-95A4-3697E73D19F8}"/>
               </a:ext>
             </a:extLst>
           </p:cNvPr>
@@ -8136,7 +9619,7 @@
           <p:cNvPr id="14" name="">
             <a:extLst xmlns:a="http://schemas.openxmlformats.org/drawingml/2006/main">
               <a:ext uri="{FF2B5EF4-FFF2-40B4-BE49-F238E27FC236}">
-                <a16:creationId xmlns:a16="http://schemas.microsoft.com/office/drawing/2014/main" id="{5D68CD71-E555-406E-B80A-CEA74A5CE770}"/>
+                <a16:creationId xmlns:a16="http://schemas.microsoft.com/office/drawing/2014/main" id="{8F6192E9-26DD-49E1-8E6D-232C505D73A7}"/>
               </a:ext>
             </a:extLst>
           </p:cNvPr>
@@ -8200,7 +9683,7 @@
           <p:cNvPr id="15" name="">
             <a:extLst xmlns:a="http://schemas.openxmlformats.org/drawingml/2006/main">
               <a:ext uri="{FF2B5EF4-FFF2-40B4-BE49-F238E27FC236}">
-                <a16:creationId xmlns:a16="http://schemas.microsoft.com/office/drawing/2014/main" id="{1B227FA0-017C-4D3D-8A68-DDEC5C2B65AA}"/>
+                <a16:creationId xmlns:a16="http://schemas.microsoft.com/office/drawing/2014/main" id="{744DDA48-40F0-4CE0-BF21-9609E54667AF}"/>
               </a:ext>
             </a:extLst>
           </p:cNvPr>
@@ -8264,7 +9747,7 @@
           <p:cNvPr id="16" name="">
             <a:extLst xmlns:a="http://schemas.openxmlformats.org/drawingml/2006/main">
               <a:ext uri="{FF2B5EF4-FFF2-40B4-BE49-F238E27FC236}">
-                <a16:creationId xmlns:a16="http://schemas.microsoft.com/office/drawing/2014/main" id="{3D528F95-AB4A-49FD-AE34-AFF231B6093D}"/>
+                <a16:creationId xmlns:a16="http://schemas.microsoft.com/office/drawing/2014/main" id="{EA6CC599-4D77-44FB-9603-133502CF48F9}"/>
               </a:ext>
             </a:extLst>
           </p:cNvPr>
@@ -8328,7 +9811,7 @@
           <p:cNvPr id="17" name="">
             <a:extLst xmlns:a="http://schemas.openxmlformats.org/drawingml/2006/main">
               <a:ext uri="{FF2B5EF4-FFF2-40B4-BE49-F238E27FC236}">
-                <a16:creationId xmlns:a16="http://schemas.microsoft.com/office/drawing/2014/main" id="{6D207405-0904-4579-8E28-3095F7109242}"/>
+                <a16:creationId xmlns:a16="http://schemas.microsoft.com/office/drawing/2014/main" id="{FF0D9473-7AC7-4CB4-92F2-6B771EF45941}"/>
               </a:ext>
             </a:extLst>
           </p:cNvPr>
@@ -8361,7 +9844,7 @@
           <p:cNvPr id="18" name="">
             <a:extLst xmlns:a="http://schemas.openxmlformats.org/drawingml/2006/main">
               <a:ext uri="{FF2B5EF4-FFF2-40B4-BE49-F238E27FC236}">
-                <a16:creationId xmlns:a16="http://schemas.microsoft.com/office/drawing/2014/main" id="{AC766D94-46FE-464E-B626-EC622C3238AA}"/>
+                <a16:creationId xmlns:a16="http://schemas.microsoft.com/office/drawing/2014/main" id="{2BAC15F4-ECE2-4863-9799-EB69482EF452}"/>
               </a:ext>
             </a:extLst>
           </p:cNvPr>
@@ -8394,7 +9877,7 @@
           <p:cNvPr id="19" name="">
             <a:extLst xmlns:a="http://schemas.openxmlformats.org/drawingml/2006/main">
               <a:ext uri="{FF2B5EF4-FFF2-40B4-BE49-F238E27FC236}">
-                <a16:creationId xmlns:a16="http://schemas.microsoft.com/office/drawing/2014/main" id="{34CA3DE0-B6FF-42A7-BA57-728ACE12E097}"/>
+                <a16:creationId xmlns:a16="http://schemas.microsoft.com/office/drawing/2014/main" id="{00351BC1-1D03-4AA0-BEDE-07F4C8AD4AED}"/>
               </a:ext>
             </a:extLst>
           </p:cNvPr>
@@ -8427,7 +9910,7 @@
           <p:cNvPr id="20" name="">
             <a:extLst xmlns:a="http://schemas.openxmlformats.org/drawingml/2006/main">
               <a:ext uri="{FF2B5EF4-FFF2-40B4-BE49-F238E27FC236}">
-                <a16:creationId xmlns:a16="http://schemas.microsoft.com/office/drawing/2014/main" id="{2A3CFAE1-B746-4B0A-BC55-33068C9B6DDA}"/>
+                <a16:creationId xmlns:a16="http://schemas.microsoft.com/office/drawing/2014/main" id="{02D0FA49-C408-4CDA-AE98-73C5F7F8F002}"/>
               </a:ext>
             </a:extLst>
           </p:cNvPr>
@@ -8460,7 +9943,7 @@
           <p:cNvPr id="21" name="">
             <a:extLst xmlns:a="http://schemas.openxmlformats.org/drawingml/2006/main">
               <a:ext uri="{FF2B5EF4-FFF2-40B4-BE49-F238E27FC236}">
-                <a16:creationId xmlns:a16="http://schemas.microsoft.com/office/drawing/2014/main" id="{9B149D10-07E1-483F-91D1-9B1BB74A7F30}"/>
+                <a16:creationId xmlns:a16="http://schemas.microsoft.com/office/drawing/2014/main" id="{6FFA15BA-18D4-4DA8-AE31-7C86C8B62010}"/>
               </a:ext>
             </a:extLst>
           </p:cNvPr>
@@ -8524,7 +10007,7 @@
           <p:cNvPr id="22" name="">
             <a:extLst xmlns:a="http://schemas.openxmlformats.org/drawingml/2006/main">
               <a:ext uri="{FF2B5EF4-FFF2-40B4-BE49-F238E27FC236}">
-                <a16:creationId xmlns:a16="http://schemas.microsoft.com/office/drawing/2014/main" id="{683B374B-8038-4205-939E-2A3453A5286F}"/>
+                <a16:creationId xmlns:a16="http://schemas.microsoft.com/office/drawing/2014/main" id="{11B95C8E-92EF-4003-8188-E20C3898513F}"/>
               </a:ext>
             </a:extLst>
           </p:cNvPr>
@@ -8588,7 +10071,7 @@
           <p:cNvPr id="23" name="">
             <a:extLst xmlns:a="http://schemas.openxmlformats.org/drawingml/2006/main">
               <a:ext uri="{FF2B5EF4-FFF2-40B4-BE49-F238E27FC236}">
-                <a16:creationId xmlns:a16="http://schemas.microsoft.com/office/drawing/2014/main" id="{39A3FC8D-D6F8-4A96-B94A-24912AACF451}"/>
+                <a16:creationId xmlns:a16="http://schemas.microsoft.com/office/drawing/2014/main" id="{0D5E49D0-F0A7-424C-9EFD-8A7E166FCCB9}"/>
               </a:ext>
             </a:extLst>
           </p:cNvPr>
@@ -8652,7 +10135,7 @@
           <p:cNvPr id="24" name="">
             <a:extLst xmlns:a="http://schemas.openxmlformats.org/drawingml/2006/main">
               <a:ext uri="{FF2B5EF4-FFF2-40B4-BE49-F238E27FC236}">
-                <a16:creationId xmlns:a16="http://schemas.microsoft.com/office/drawing/2014/main" id="{48ACE9BC-A254-4C2C-BAA9-84A7E4C6C447}"/>
+                <a16:creationId xmlns:a16="http://schemas.microsoft.com/office/drawing/2014/main" id="{A0BFC7D8-116F-4A89-A16F-A8A9609229B5}"/>
               </a:ext>
             </a:extLst>
           </p:cNvPr>
@@ -8685,7 +10168,7 @@
           <p:cNvPr id="25" name="">
             <a:extLst xmlns:a="http://schemas.openxmlformats.org/drawingml/2006/main">
               <a:ext uri="{FF2B5EF4-FFF2-40B4-BE49-F238E27FC236}">
-                <a16:creationId xmlns:a16="http://schemas.microsoft.com/office/drawing/2014/main" id="{68A21CFC-F4CE-4EA4-818E-02FADBCAFF82}"/>
+                <a16:creationId xmlns:a16="http://schemas.microsoft.com/office/drawing/2014/main" id="{AE5F4698-1994-449D-9FE5-DA343EAA1786}"/>
               </a:ext>
             </a:extLst>
           </p:cNvPr>
@@ -8718,7 +10201,7 @@
           <p:cNvPr id="26" name="">
             <a:extLst xmlns:a="http://schemas.openxmlformats.org/drawingml/2006/main">
               <a:ext uri="{FF2B5EF4-FFF2-40B4-BE49-F238E27FC236}">
-                <a16:creationId xmlns:a16="http://schemas.microsoft.com/office/drawing/2014/main" id="{43F845AA-57D9-40BC-A9AA-5DC31F608BAE}"/>
+                <a16:creationId xmlns:a16="http://schemas.microsoft.com/office/drawing/2014/main" id="{E81725A8-56F4-4348-AE64-4BB0433C4FB0}"/>
               </a:ext>
             </a:extLst>
           </p:cNvPr>
@@ -8751,7 +10234,7 @@
           <p:cNvPr id="27" name="">
             <a:extLst xmlns:a="http://schemas.openxmlformats.org/drawingml/2006/main">
               <a:ext uri="{FF2B5EF4-FFF2-40B4-BE49-F238E27FC236}">
-                <a16:creationId xmlns:a16="http://schemas.microsoft.com/office/drawing/2014/main" id="{12050884-07D4-4C0F-A752-D9B2F7F29544}"/>
+                <a16:creationId xmlns:a16="http://schemas.microsoft.com/office/drawing/2014/main" id="{B4E1F789-B806-4BDA-854F-6E2101C2B24A}"/>
               </a:ext>
             </a:extLst>
           </p:cNvPr>
@@ -8784,7 +10267,7 @@
           <p:cNvPr id="28" name="">
             <a:extLst xmlns:a="http://schemas.openxmlformats.org/drawingml/2006/main">
               <a:ext uri="{FF2B5EF4-FFF2-40B4-BE49-F238E27FC236}">
-                <a16:creationId xmlns:a16="http://schemas.microsoft.com/office/drawing/2014/main" id="{6C53C538-34BD-409D-961F-0943621ECB58}"/>
+                <a16:creationId xmlns:a16="http://schemas.microsoft.com/office/drawing/2014/main" id="{DE59666C-6C4B-40EF-BD01-54B171AD16F1}"/>
               </a:ext>
             </a:extLst>
           </p:cNvPr>
@@ -8848,7 +10331,7 @@
           <p:cNvPr id="29" name="">
             <a:extLst xmlns:a="http://schemas.openxmlformats.org/drawingml/2006/main">
               <a:ext uri="{FF2B5EF4-FFF2-40B4-BE49-F238E27FC236}">
-                <a16:creationId xmlns:a16="http://schemas.microsoft.com/office/drawing/2014/main" id="{CBCE0E2A-AEE0-4F5D-B5F1-5D7DEED36258}"/>
+                <a16:creationId xmlns:a16="http://schemas.microsoft.com/office/drawing/2014/main" id="{9C70BA3C-94D6-44D6-9E44-B91C714C918B}"/>
               </a:ext>
             </a:extLst>
           </p:cNvPr>
@@ -8912,7 +10395,7 @@
           <p:cNvPr id="30" name="">
             <a:extLst xmlns:a="http://schemas.openxmlformats.org/drawingml/2006/main">
               <a:ext uri="{FF2B5EF4-FFF2-40B4-BE49-F238E27FC236}">
-                <a16:creationId xmlns:a16="http://schemas.microsoft.com/office/drawing/2014/main" id="{44B8469C-F86D-4AD2-BFA7-F17FB745A6AA}"/>
+                <a16:creationId xmlns:a16="http://schemas.microsoft.com/office/drawing/2014/main" id="{99BB9BA9-5710-475F-92BD-90F68FF2E57E}"/>
               </a:ext>
             </a:extLst>
           </p:cNvPr>
@@ -8976,7 +10459,7 @@
           <p:cNvPr id="31" name="">
             <a:extLst xmlns:a="http://schemas.openxmlformats.org/drawingml/2006/main">
               <a:ext uri="{FF2B5EF4-FFF2-40B4-BE49-F238E27FC236}">
-                <a16:creationId xmlns:a16="http://schemas.microsoft.com/office/drawing/2014/main" id="{5C60AE6B-6382-4045-BF71-CA8A3DC1ECA2}"/>
+                <a16:creationId xmlns:a16="http://schemas.microsoft.com/office/drawing/2014/main" id="{8D80E6D2-20B5-41C8-A2E1-4479832B8097}"/>
               </a:ext>
             </a:extLst>
           </p:cNvPr>
@@ -9009,7 +10492,7 @@
           <p:cNvPr id="32" name="">
             <a:extLst xmlns:a="http://schemas.openxmlformats.org/drawingml/2006/main">
               <a:ext uri="{FF2B5EF4-FFF2-40B4-BE49-F238E27FC236}">
-                <a16:creationId xmlns:a16="http://schemas.microsoft.com/office/drawing/2014/main" id="{788CEFAB-176D-4EAF-B4B1-B320B3EC2D4C}"/>
+                <a16:creationId xmlns:a16="http://schemas.microsoft.com/office/drawing/2014/main" id="{CA7CBE89-DD51-4C5C-93DE-5BDE883B713A}"/>
               </a:ext>
             </a:extLst>
           </p:cNvPr>
@@ -9042,7 +10525,7 @@
           <p:cNvPr id="33" name="">
             <a:extLst xmlns:a="http://schemas.openxmlformats.org/drawingml/2006/main">
               <a:ext uri="{FF2B5EF4-FFF2-40B4-BE49-F238E27FC236}">
-                <a16:creationId xmlns:a16="http://schemas.microsoft.com/office/drawing/2014/main" id="{EEA87BF6-E82C-457C-917D-5CC9795E5A4A}"/>
+                <a16:creationId xmlns:a16="http://schemas.microsoft.com/office/drawing/2014/main" id="{3F6C36F3-26BD-43ED-8916-7D76A6489708}"/>
               </a:ext>
             </a:extLst>
           </p:cNvPr>
@@ -9075,7 +10558,7 @@
           <p:cNvPr id="34" name="">
             <a:extLst xmlns:a="http://schemas.openxmlformats.org/drawingml/2006/main">
               <a:ext uri="{FF2B5EF4-FFF2-40B4-BE49-F238E27FC236}">
-                <a16:creationId xmlns:a16="http://schemas.microsoft.com/office/drawing/2014/main" id="{A751689F-FD17-49C0-B2E1-5BC3B9C74084}"/>
+                <a16:creationId xmlns:a16="http://schemas.microsoft.com/office/drawing/2014/main" id="{05DCC701-94E2-4D4E-B971-F23FFD8E0137}"/>
               </a:ext>
             </a:extLst>
           </p:cNvPr>
@@ -9108,7 +10591,7 @@
           <p:cNvPr id="35" name="">
             <a:extLst xmlns:a="http://schemas.openxmlformats.org/drawingml/2006/main">
               <a:ext uri="{FF2B5EF4-FFF2-40B4-BE49-F238E27FC236}">
-                <a16:creationId xmlns:a16="http://schemas.microsoft.com/office/drawing/2014/main" id="{0E251656-D3E5-496C-B5EC-327EB75D015C}"/>
+                <a16:creationId xmlns:a16="http://schemas.microsoft.com/office/drawing/2014/main" id="{4E500752-0E82-4B60-ADFC-FEDE4DDBF516}"/>
               </a:ext>
             </a:extLst>
           </p:cNvPr>
@@ -9172,7 +10655,7 @@
           <p:cNvPr id="36" name="">
             <a:extLst xmlns:a="http://schemas.openxmlformats.org/drawingml/2006/main">
               <a:ext uri="{FF2B5EF4-FFF2-40B4-BE49-F238E27FC236}">
-                <a16:creationId xmlns:a16="http://schemas.microsoft.com/office/drawing/2014/main" id="{76D0598D-5972-458F-935B-147DED4E07D0}"/>
+                <a16:creationId xmlns:a16="http://schemas.microsoft.com/office/drawing/2014/main" id="{E1022D87-27E2-43D5-AAC2-21956EAFF170}"/>
               </a:ext>
             </a:extLst>
           </p:cNvPr>
@@ -9236,7 +10719,7 @@
           <p:cNvPr id="37" name="">
             <a:extLst xmlns:a="http://schemas.openxmlformats.org/drawingml/2006/main">
               <a:ext uri="{FF2B5EF4-FFF2-40B4-BE49-F238E27FC236}">
-                <a16:creationId xmlns:a16="http://schemas.microsoft.com/office/drawing/2014/main" id="{00C1ACE6-6854-4156-9D2E-541FA010FF00}"/>
+                <a16:creationId xmlns:a16="http://schemas.microsoft.com/office/drawing/2014/main" id="{E8075590-F00C-49A9-B1AB-ABF0E1B52CF6}"/>
               </a:ext>
             </a:extLst>
           </p:cNvPr>
@@ -9269,7 +10752,7 @@
           <p:cNvPr id="38" name="">
             <a:extLst xmlns:a="http://schemas.openxmlformats.org/drawingml/2006/main">
               <a:ext uri="{FF2B5EF4-FFF2-40B4-BE49-F238E27FC236}">
-                <a16:creationId xmlns:a16="http://schemas.microsoft.com/office/drawing/2014/main" id="{58EF5823-462C-434F-AD0D-85D10915D769}"/>
+                <a16:creationId xmlns:a16="http://schemas.microsoft.com/office/drawing/2014/main" id="{93532D59-4564-4346-BAF3-99413DC472D7}"/>
               </a:ext>
             </a:extLst>
           </p:cNvPr>
@@ -9333,7 +10816,7 @@
           <p:cNvPr id="39" name="">
             <a:extLst xmlns:a="http://schemas.openxmlformats.org/drawingml/2006/main">
               <a:ext uri="{FF2B5EF4-FFF2-40B4-BE49-F238E27FC236}">
-                <a16:creationId xmlns:a16="http://schemas.microsoft.com/office/drawing/2014/main" id="{AD0B8E61-B875-4BA0-9FAF-FE05F2643A10}"/>
+                <a16:creationId xmlns:a16="http://schemas.microsoft.com/office/drawing/2014/main" id="{8A9E18F6-7942-4C7A-9587-F5FD1B5699F9}"/>
               </a:ext>
             </a:extLst>
           </p:cNvPr>
@@ -9397,7 +10880,7 @@
           <p:cNvPr id="40" name="">
             <a:extLst xmlns:a="http://schemas.openxmlformats.org/drawingml/2006/main">
               <a:ext uri="{FF2B5EF4-FFF2-40B4-BE49-F238E27FC236}">
-                <a16:creationId xmlns:a16="http://schemas.microsoft.com/office/drawing/2014/main" id="{73FF3F89-5FA4-4899-ABA1-2DBE8437F214}"/>
+                <a16:creationId xmlns:a16="http://schemas.microsoft.com/office/drawing/2014/main" id="{BB2F80A7-EA0A-4AEB-9E4F-D726D59D7FF9}"/>
               </a:ext>
             </a:extLst>
           </p:cNvPr>
@@ -9430,7 +10913,7 @@
           <p:cNvPr id="41" name="">
             <a:extLst xmlns:a="http://schemas.openxmlformats.org/drawingml/2006/main">
               <a:ext uri="{FF2B5EF4-FFF2-40B4-BE49-F238E27FC236}">
-                <a16:creationId xmlns:a16="http://schemas.microsoft.com/office/drawing/2014/main" id="{994126F4-2769-452A-A4D2-7D59B612A50B}"/>
+                <a16:creationId xmlns:a16="http://schemas.microsoft.com/office/drawing/2014/main" id="{93E0BE12-36D5-403F-B4DF-6EE13D1A9436}"/>
               </a:ext>
             </a:extLst>
           </p:cNvPr>
@@ -9494,7 +10977,7 @@
           <p:cNvPr id="42" name="">
             <a:extLst xmlns:a="http://schemas.openxmlformats.org/drawingml/2006/main">
               <a:ext uri="{FF2B5EF4-FFF2-40B4-BE49-F238E27FC236}">
-                <a16:creationId xmlns:a16="http://schemas.microsoft.com/office/drawing/2014/main" id="{4C92026F-CB00-46F1-993A-64C229049C0C}"/>
+                <a16:creationId xmlns:a16="http://schemas.microsoft.com/office/drawing/2014/main" id="{6B6DE48B-AC9A-43F5-AE95-FBA97707CF93}"/>
               </a:ext>
             </a:extLst>
           </p:cNvPr>
@@ -9556,7 +11039,7 @@
     </p:spTree>
     <p:extLst>
       <p:ext uri="{BB962C8B-B14F-4D97-AF65-F5344CB8AC3E}">
-        <p14:creationId xmlns:p14="http://schemas.microsoft.com/office/powerpoint/2010/main" val="440865377"/>
+        <p14:creationId xmlns:p14="http://schemas.microsoft.com/office/powerpoint/2010/main" val="1240843394"/>
       </p:ext>
     </p:extLst>
   </p:cSld>
@@ -9580,7 +11063,7 @@
           <p:cNvPr id="1" name="">
             <a:extLst xmlns:a="http://schemas.openxmlformats.org/drawingml/2006/main">
               <a:ext uri="{FF2B5EF4-FFF2-40B4-BE49-F238E27FC236}">
-                <a16:creationId xmlns:a16="http://schemas.microsoft.com/office/drawing/2014/main" id="{375E9374-511C-4B5F-9AEC-344F217739CE}"/>
+                <a16:creationId xmlns:a16="http://schemas.microsoft.com/office/drawing/2014/main" id="{6D08DC91-2BF0-4B19-9DF0-E43984A3760F}"/>
               </a:ext>
             </a:extLst>
           </p:cNvPr>
@@ -9615,7 +11098,7 @@
           <p:cNvPr id="2" name="">
             <a:extLst xmlns:a="http://schemas.openxmlformats.org/drawingml/2006/main">
               <a:ext uri="{FF2B5EF4-FFF2-40B4-BE49-F238E27FC236}">
-                <a16:creationId xmlns:a16="http://schemas.microsoft.com/office/drawing/2014/main" id="{A3A9C96E-B8BF-4452-85C7-9442F279C31C}"/>
+                <a16:creationId xmlns:a16="http://schemas.microsoft.com/office/drawing/2014/main" id="{DE7D979F-6D62-408F-8975-580DBB8258E9}"/>
               </a:ext>
             </a:extLst>
           </p:cNvPr>
@@ -9679,7 +11162,7 @@
           <p:cNvPr id="3" name="">
             <a:extLst xmlns:a="http://schemas.openxmlformats.org/drawingml/2006/main">
               <a:ext uri="{FF2B5EF4-FFF2-40B4-BE49-F238E27FC236}">
-                <a16:creationId xmlns:a16="http://schemas.microsoft.com/office/drawing/2014/main" id="{8EF222F3-57AB-4C7F-B792-AAE1AA4C8A5E}"/>
+                <a16:creationId xmlns:a16="http://schemas.microsoft.com/office/drawing/2014/main" id="{23AB972E-A122-4104-8C4E-C8CDCC817A17}"/>
               </a:ext>
             </a:extLst>
           </p:cNvPr>
@@ -9743,7 +11226,7 @@
           <p:cNvPr id="4" name="">
             <a:extLst xmlns:a="http://schemas.openxmlformats.org/drawingml/2006/main">
               <a:ext uri="{FF2B5EF4-FFF2-40B4-BE49-F238E27FC236}">
-                <a16:creationId xmlns:a16="http://schemas.microsoft.com/office/drawing/2014/main" id="{536AC1EA-9027-46F0-9470-5BD82444575D}"/>
+                <a16:creationId xmlns:a16="http://schemas.microsoft.com/office/drawing/2014/main" id="{C9833ED1-3157-4F1A-A32D-1E737EDFBA10}"/>
               </a:ext>
             </a:extLst>
           </p:cNvPr>
@@ -9776,7 +11259,7 @@
           <p:cNvPr id="5" name="">
             <a:extLst xmlns:a="http://schemas.openxmlformats.org/drawingml/2006/main">
               <a:ext uri="{FF2B5EF4-FFF2-40B4-BE49-F238E27FC236}">
-                <a16:creationId xmlns:a16="http://schemas.microsoft.com/office/drawing/2014/main" id="{94933C08-2AFB-4DBB-8DCD-5D1AB55EA1EE}"/>
+                <a16:creationId xmlns:a16="http://schemas.microsoft.com/office/drawing/2014/main" id="{E0ADF57A-FED7-43D6-9A71-E57E1F7ED856}"/>
               </a:ext>
             </a:extLst>
           </p:cNvPr>
@@ -9809,7 +11292,7 @@
           <p:cNvPr id="6" name="">
             <a:extLst xmlns:a="http://schemas.openxmlformats.org/drawingml/2006/main">
               <a:ext uri="{FF2B5EF4-FFF2-40B4-BE49-F238E27FC236}">
-                <a16:creationId xmlns:a16="http://schemas.microsoft.com/office/drawing/2014/main" id="{8306F2DA-58FA-4C1C-9A39-09004FE791A9}"/>
+                <a16:creationId xmlns:a16="http://schemas.microsoft.com/office/drawing/2014/main" id="{A4DDDD20-DFB7-4653-A838-30FB34D25A0C}"/>
               </a:ext>
             </a:extLst>
           </p:cNvPr>
@@ -9873,7 +11356,7 @@
           <p:cNvPr id="7" name="">
             <a:extLst xmlns:a="http://schemas.openxmlformats.org/drawingml/2006/main">
               <a:ext uri="{FF2B5EF4-FFF2-40B4-BE49-F238E27FC236}">
-                <a16:creationId xmlns:a16="http://schemas.microsoft.com/office/drawing/2014/main" id="{10847A06-3910-4BA8-BF72-F9503DF7AF8C}"/>
+                <a16:creationId xmlns:a16="http://schemas.microsoft.com/office/drawing/2014/main" id="{EDED0CD5-3649-4A1D-B0CD-E14FAB482E7C}"/>
               </a:ext>
             </a:extLst>
           </p:cNvPr>
@@ -9906,7 +11389,7 @@
           <p:cNvPr id="8" name="">
             <a:extLst xmlns:a="http://schemas.openxmlformats.org/drawingml/2006/main">
               <a:ext uri="{FF2B5EF4-FFF2-40B4-BE49-F238E27FC236}">
-                <a16:creationId xmlns:a16="http://schemas.microsoft.com/office/drawing/2014/main" id="{34E82504-DC55-4484-B6DB-E56DB7F29BCA}"/>
+                <a16:creationId xmlns:a16="http://schemas.microsoft.com/office/drawing/2014/main" id="{8FC65D6C-EB65-4D99-AB89-D4DCA761E975}"/>
               </a:ext>
             </a:extLst>
           </p:cNvPr>
@@ -9993,7 +11476,7 @@
           <p:cNvPr id="9" name="">
             <a:extLst xmlns:a="http://schemas.openxmlformats.org/drawingml/2006/main">
               <a:ext uri="{FF2B5EF4-FFF2-40B4-BE49-F238E27FC236}">
-                <a16:creationId xmlns:a16="http://schemas.microsoft.com/office/drawing/2014/main" id="{CAFBE8E4-469B-48A7-8F86-130B170405BE}"/>
+                <a16:creationId xmlns:a16="http://schemas.microsoft.com/office/drawing/2014/main" id="{331923E0-45AE-4095-B80F-6CB80791845B}"/>
               </a:ext>
             </a:extLst>
           </p:cNvPr>
@@ -10026,7 +11509,7 @@
           <p:cNvPr id="10" name="">
             <a:extLst xmlns:a="http://schemas.openxmlformats.org/drawingml/2006/main">
               <a:ext uri="{FF2B5EF4-FFF2-40B4-BE49-F238E27FC236}">
-                <a16:creationId xmlns:a16="http://schemas.microsoft.com/office/drawing/2014/main" id="{43E3E157-4B5E-4768-8344-8D99E60DBFDA}"/>
+                <a16:creationId xmlns:a16="http://schemas.microsoft.com/office/drawing/2014/main" id="{7437EA97-DBB8-4240-99E5-BF55D3894191}"/>
               </a:ext>
             </a:extLst>
           </p:cNvPr>
@@ -10090,7 +11573,7 @@
           <p:cNvPr id="11" name="">
             <a:extLst xmlns:a="http://schemas.openxmlformats.org/drawingml/2006/main">
               <a:ext uri="{FF2B5EF4-FFF2-40B4-BE49-F238E27FC236}">
-                <a16:creationId xmlns:a16="http://schemas.microsoft.com/office/drawing/2014/main" id="{F861D445-CCB4-4E2A-B3FF-D4698DFFC9A7}"/>
+                <a16:creationId xmlns:a16="http://schemas.microsoft.com/office/drawing/2014/main" id="{66E5F09A-0332-41DB-AF11-C0A1A598C636}"/>
               </a:ext>
             </a:extLst>
           </p:cNvPr>
@@ -10246,7 +11729,7 @@
           <p:cNvPr id="12" name="">
             <a:extLst xmlns:a="http://schemas.openxmlformats.org/drawingml/2006/main">
               <a:ext uri="{FF2B5EF4-FFF2-40B4-BE49-F238E27FC236}">
-                <a16:creationId xmlns:a16="http://schemas.microsoft.com/office/drawing/2014/main" id="{13393884-D672-434F-B5D3-0398B7E033E9}"/>
+                <a16:creationId xmlns:a16="http://schemas.microsoft.com/office/drawing/2014/main" id="{253A50EE-A52B-451A-877A-584542D0678C}"/>
               </a:ext>
             </a:extLst>
           </p:cNvPr>
@@ -10279,7 +11762,7 @@
           <p:cNvPr id="13" name="">
             <a:extLst xmlns:a="http://schemas.openxmlformats.org/drawingml/2006/main">
               <a:ext uri="{FF2B5EF4-FFF2-40B4-BE49-F238E27FC236}">
-                <a16:creationId xmlns:a16="http://schemas.microsoft.com/office/drawing/2014/main" id="{181671F7-26DA-413F-8017-AEB9E6726668}"/>
+                <a16:creationId xmlns:a16="http://schemas.microsoft.com/office/drawing/2014/main" id="{6DD14609-3844-43FE-9752-7F46E5E6ADE0}"/>
               </a:ext>
             </a:extLst>
           </p:cNvPr>
@@ -10343,7 +11826,7 @@
           <p:cNvPr id="14" name="">
             <a:extLst xmlns:a="http://schemas.openxmlformats.org/drawingml/2006/main">
               <a:ext uri="{FF2B5EF4-FFF2-40B4-BE49-F238E27FC236}">
-                <a16:creationId xmlns:a16="http://schemas.microsoft.com/office/drawing/2014/main" id="{736B31C9-2D8A-4561-9B9E-0F9608CB9E2F}"/>
+                <a16:creationId xmlns:a16="http://schemas.microsoft.com/office/drawing/2014/main" id="{117C1864-9D53-4D0D-9CA8-EC318038F741}"/>
               </a:ext>
             </a:extLst>
           </p:cNvPr>
@@ -10499,7 +11982,7 @@
           <p:cNvPr id="15" name="">
             <a:extLst xmlns:a="http://schemas.openxmlformats.org/drawingml/2006/main">
               <a:ext uri="{FF2B5EF4-FFF2-40B4-BE49-F238E27FC236}">
-                <a16:creationId xmlns:a16="http://schemas.microsoft.com/office/drawing/2014/main" id="{CE1886BE-3A32-4196-9A3D-520216674075}"/>
+                <a16:creationId xmlns:a16="http://schemas.microsoft.com/office/drawing/2014/main" id="{CDDE1D8E-C608-4BBE-A6EF-165A943C4C33}"/>
               </a:ext>
             </a:extLst>
           </p:cNvPr>
@@ -10532,7 +12015,7 @@
           <p:cNvPr id="16" name="">
             <a:extLst xmlns:a="http://schemas.openxmlformats.org/drawingml/2006/main">
               <a:ext uri="{FF2B5EF4-FFF2-40B4-BE49-F238E27FC236}">
-                <a16:creationId xmlns:a16="http://schemas.microsoft.com/office/drawing/2014/main" id="{77BABC06-7822-49D8-A66D-DB841DF462D2}"/>
+                <a16:creationId xmlns:a16="http://schemas.microsoft.com/office/drawing/2014/main" id="{DAAC501C-FCE6-453D-98E1-D90AB20D46B7}"/>
               </a:ext>
             </a:extLst>
           </p:cNvPr>
@@ -10596,7 +12079,7 @@
           <p:cNvPr id="17" name="">
             <a:extLst xmlns:a="http://schemas.openxmlformats.org/drawingml/2006/main">
               <a:ext uri="{FF2B5EF4-FFF2-40B4-BE49-F238E27FC236}">
-                <a16:creationId xmlns:a16="http://schemas.microsoft.com/office/drawing/2014/main" id="{3890092D-62D1-4859-A6BA-6D758471B910}"/>
+                <a16:creationId xmlns:a16="http://schemas.microsoft.com/office/drawing/2014/main" id="{4388B885-8B60-41FD-9EC0-50D5317180AE}"/>
               </a:ext>
             </a:extLst>
           </p:cNvPr>
@@ -10658,7 +12141,7 @@
     </p:spTree>
     <p:extLst>
       <p:ext uri="{BB962C8B-B14F-4D97-AF65-F5344CB8AC3E}">
-        <p14:creationId xmlns:p14="http://schemas.microsoft.com/office/powerpoint/2010/main" val="1421536783"/>
+        <p14:creationId xmlns:p14="http://schemas.microsoft.com/office/powerpoint/2010/main" val="761882847"/>
       </p:ext>
     </p:extLst>
   </p:cSld>
@@ -10682,7 +12165,7 @@
           <p:cNvPr id="1" name="">
             <a:extLst xmlns:a="http://schemas.openxmlformats.org/drawingml/2006/main">
               <a:ext uri="{FF2B5EF4-FFF2-40B4-BE49-F238E27FC236}">
-                <a16:creationId xmlns:a16="http://schemas.microsoft.com/office/drawing/2014/main" id="{C0EBED29-2230-4B98-A528-C4D04D6C8A94}"/>
+                <a16:creationId xmlns:a16="http://schemas.microsoft.com/office/drawing/2014/main" id="{88D19603-754E-4C78-B1D8-9FEA0C588A62}"/>
               </a:ext>
             </a:extLst>
           </p:cNvPr>
@@ -10717,7 +12200,7 @@
           <p:cNvPr id="2" name="">
             <a:extLst xmlns:a="http://schemas.openxmlformats.org/drawingml/2006/main">
               <a:ext uri="{FF2B5EF4-FFF2-40B4-BE49-F238E27FC236}">
-                <a16:creationId xmlns:a16="http://schemas.microsoft.com/office/drawing/2014/main" id="{712232D4-F3C7-4317-857E-B61A1321A0B3}"/>
+                <a16:creationId xmlns:a16="http://schemas.microsoft.com/office/drawing/2014/main" id="{4EEA8D8F-E559-4BD5-9B1A-05F64DB96DC1}"/>
               </a:ext>
             </a:extLst>
           </p:cNvPr>
@@ -10781,7 +12264,7 @@
           <p:cNvPr id="3" name="">
             <a:extLst xmlns:a="http://schemas.openxmlformats.org/drawingml/2006/main">
               <a:ext uri="{FF2B5EF4-FFF2-40B4-BE49-F238E27FC236}">
-                <a16:creationId xmlns:a16="http://schemas.microsoft.com/office/drawing/2014/main" id="{C5DB9640-D9AB-4338-A4E9-A032C2FF17F8}"/>
+                <a16:creationId xmlns:a16="http://schemas.microsoft.com/office/drawing/2014/main" id="{36033A11-566D-44EA-BC27-67918AD8B218}"/>
               </a:ext>
             </a:extLst>
           </p:cNvPr>
@@ -10845,7 +12328,7 @@
           <p:cNvPr id="4" name="">
             <a:extLst xmlns:a="http://schemas.openxmlformats.org/drawingml/2006/main">
               <a:ext uri="{FF2B5EF4-FFF2-40B4-BE49-F238E27FC236}">
-                <a16:creationId xmlns:a16="http://schemas.microsoft.com/office/drawing/2014/main" id="{2CF34126-FCDE-48E7-94C0-56E340E76C32}"/>
+                <a16:creationId xmlns:a16="http://schemas.microsoft.com/office/drawing/2014/main" id="{D3BACCA9-3686-4569-A208-70937A2753E9}"/>
               </a:ext>
             </a:extLst>
           </p:cNvPr>
@@ -10878,7 +12361,7 @@
           <p:cNvPr id="5" name="">
             <a:extLst xmlns:a="http://schemas.openxmlformats.org/drawingml/2006/main">
               <a:ext uri="{FF2B5EF4-FFF2-40B4-BE49-F238E27FC236}">
-                <a16:creationId xmlns:a16="http://schemas.microsoft.com/office/drawing/2014/main" id="{2F0D4C68-BB59-4300-9F30-889C1693D4C5}"/>
+                <a16:creationId xmlns:a16="http://schemas.microsoft.com/office/drawing/2014/main" id="{E3731277-BDD6-4819-8477-D3B3AFC2C29C}"/>
               </a:ext>
             </a:extLst>
           </p:cNvPr>
@@ -10911,7 +12394,7 @@
           <p:cNvPr id="6" name="">
             <a:extLst xmlns:a="http://schemas.openxmlformats.org/drawingml/2006/main">
               <a:ext uri="{FF2B5EF4-FFF2-40B4-BE49-F238E27FC236}">
-                <a16:creationId xmlns:a16="http://schemas.microsoft.com/office/drawing/2014/main" id="{4E48E038-6D3A-4647-86F0-637364207BCA}"/>
+                <a16:creationId xmlns:a16="http://schemas.microsoft.com/office/drawing/2014/main" id="{CAFADBC5-11C8-4D96-82E5-A87E885A50CE}"/>
               </a:ext>
             </a:extLst>
           </p:cNvPr>
@@ -11021,7 +12504,7 @@
           <p:cNvPr id="7" name="">
             <a:extLst xmlns:a="http://schemas.openxmlformats.org/drawingml/2006/main">
               <a:ext uri="{FF2B5EF4-FFF2-40B4-BE49-F238E27FC236}">
-                <a16:creationId xmlns:a16="http://schemas.microsoft.com/office/drawing/2014/main" id="{2F1FBB51-E378-46BB-B836-F2ED509262C9}"/>
+                <a16:creationId xmlns:a16="http://schemas.microsoft.com/office/drawing/2014/main" id="{8C445FE2-CCB7-49A8-A911-799AEC9C9BAE}"/>
               </a:ext>
             </a:extLst>
           </p:cNvPr>
@@ -11054,7 +12537,7 @@
           <p:cNvPr id="8" name="">
             <a:extLst xmlns:a="http://schemas.openxmlformats.org/drawingml/2006/main">
               <a:ext uri="{FF2B5EF4-FFF2-40B4-BE49-F238E27FC236}">
-                <a16:creationId xmlns:a16="http://schemas.microsoft.com/office/drawing/2014/main" id="{6BC3A5B8-5031-459A-B1B1-6B75D00C0087}"/>
+                <a16:creationId xmlns:a16="http://schemas.microsoft.com/office/drawing/2014/main" id="{58F12FD9-0654-4D47-871F-B7B056CB1C4A}"/>
               </a:ext>
             </a:extLst>
           </p:cNvPr>
@@ -11087,7 +12570,7 @@
           <p:cNvPr id="9" name="">
             <a:extLst xmlns:a="http://schemas.openxmlformats.org/drawingml/2006/main">
               <a:ext uri="{FF2B5EF4-FFF2-40B4-BE49-F238E27FC236}">
-                <a16:creationId xmlns:a16="http://schemas.microsoft.com/office/drawing/2014/main" id="{7BDB2B87-E0E7-4FBB-A56D-7AACD4C4F6EA}"/>
+                <a16:creationId xmlns:a16="http://schemas.microsoft.com/office/drawing/2014/main" id="{B2970D52-6B2B-4CF9-BC08-E8C713A5E689}"/>
               </a:ext>
             </a:extLst>
           </p:cNvPr>
@@ -11120,7 +12603,7 @@
           <p:cNvPr id="10" name="">
             <a:extLst xmlns:a="http://schemas.openxmlformats.org/drawingml/2006/main">
               <a:ext uri="{FF2B5EF4-FFF2-40B4-BE49-F238E27FC236}">
-                <a16:creationId xmlns:a16="http://schemas.microsoft.com/office/drawing/2014/main" id="{252D5FDB-B745-4AD4-BE6B-DF803A234C9C}"/>
+                <a16:creationId xmlns:a16="http://schemas.microsoft.com/office/drawing/2014/main" id="{24311D0C-121E-47E6-B9C9-8C12B35F027B}"/>
               </a:ext>
             </a:extLst>
           </p:cNvPr>
@@ -11253,7 +12736,7 @@
           <p:cNvPr id="11" name="">
             <a:extLst xmlns:a="http://schemas.openxmlformats.org/drawingml/2006/main">
               <a:ext uri="{FF2B5EF4-FFF2-40B4-BE49-F238E27FC236}">
-                <a16:creationId xmlns:a16="http://schemas.microsoft.com/office/drawing/2014/main" id="{4D8E38E4-EF31-4D55-AA66-010800615E0B}"/>
+                <a16:creationId xmlns:a16="http://schemas.microsoft.com/office/drawing/2014/main" id="{02F80314-4C4B-42BB-9947-BD6528EA81EA}"/>
               </a:ext>
             </a:extLst>
           </p:cNvPr>
@@ -11286,7 +12769,7 @@
           <p:cNvPr id="12" name="">
             <a:extLst xmlns:a="http://schemas.openxmlformats.org/drawingml/2006/main">
               <a:ext uri="{FF2B5EF4-FFF2-40B4-BE49-F238E27FC236}">
-                <a16:creationId xmlns:a16="http://schemas.microsoft.com/office/drawing/2014/main" id="{152FE2DF-5431-40B6-9886-03A7798339D4}"/>
+                <a16:creationId xmlns:a16="http://schemas.microsoft.com/office/drawing/2014/main" id="{8E0BB28A-7EF2-4747-BABF-E0FDFF1CCBA7}"/>
               </a:ext>
             </a:extLst>
           </p:cNvPr>
@@ -11319,7 +12802,7 @@
           <p:cNvPr id="13" name="">
             <a:extLst xmlns:a="http://schemas.openxmlformats.org/drawingml/2006/main">
               <a:ext uri="{FF2B5EF4-FFF2-40B4-BE49-F238E27FC236}">
-                <a16:creationId xmlns:a16="http://schemas.microsoft.com/office/drawing/2014/main" id="{59048B90-7133-4645-8AC9-3444DCB3728D}"/>
+                <a16:creationId xmlns:a16="http://schemas.microsoft.com/office/drawing/2014/main" id="{722356A0-CFAB-453F-9E33-0CAD4DB79D79}"/>
               </a:ext>
             </a:extLst>
           </p:cNvPr>
@@ -11352,7 +12835,7 @@
           <p:cNvPr id="14" name="">
             <a:extLst xmlns:a="http://schemas.openxmlformats.org/drawingml/2006/main">
               <a:ext uri="{FF2B5EF4-FFF2-40B4-BE49-F238E27FC236}">
-                <a16:creationId xmlns:a16="http://schemas.microsoft.com/office/drawing/2014/main" id="{6D4C1175-AB7B-4054-A70D-8B66B0F8017B}"/>
+                <a16:creationId xmlns:a16="http://schemas.microsoft.com/office/drawing/2014/main" id="{188AC1F8-A598-4E1A-997D-22A0655FC9C2}"/>
               </a:ext>
             </a:extLst>
           </p:cNvPr>
@@ -11462,7 +12945,7 @@
           <p:cNvPr id="15" name="">
             <a:extLst xmlns:a="http://schemas.openxmlformats.org/drawingml/2006/main">
               <a:ext uri="{FF2B5EF4-FFF2-40B4-BE49-F238E27FC236}">
-                <a16:creationId xmlns:a16="http://schemas.microsoft.com/office/drawing/2014/main" id="{E6C0B731-5C60-4FFA-B1EC-8E60405B75F6}"/>
+                <a16:creationId xmlns:a16="http://schemas.microsoft.com/office/drawing/2014/main" id="{7039DB42-8E3A-49AD-A937-4AAD53DA305F}"/>
               </a:ext>
             </a:extLst>
           </p:cNvPr>
@@ -11495,7 +12978,7 @@
           <p:cNvPr id="16" name="">
             <a:extLst xmlns:a="http://schemas.openxmlformats.org/drawingml/2006/main">
               <a:ext uri="{FF2B5EF4-FFF2-40B4-BE49-F238E27FC236}">
-                <a16:creationId xmlns:a16="http://schemas.microsoft.com/office/drawing/2014/main" id="{134A8A8B-4EB9-46EC-8298-169068AE5634}"/>
+                <a16:creationId xmlns:a16="http://schemas.microsoft.com/office/drawing/2014/main" id="{5A66BC47-26E4-4448-9B5C-08C73C4CC5C9}"/>
               </a:ext>
             </a:extLst>
           </p:cNvPr>
@@ -11559,7 +13042,7 @@
           <p:cNvPr id="17" name="">
             <a:extLst xmlns:a="http://schemas.openxmlformats.org/drawingml/2006/main">
               <a:ext uri="{FF2B5EF4-FFF2-40B4-BE49-F238E27FC236}">
-                <a16:creationId xmlns:a16="http://schemas.microsoft.com/office/drawing/2014/main" id="{7E6D080C-DBAF-4B0D-9B00-FFF01616CDFF}"/>
+                <a16:creationId xmlns:a16="http://schemas.microsoft.com/office/drawing/2014/main" id="{F39A27EA-86D9-4382-8B28-700DAFA6BCFA}"/>
               </a:ext>
             </a:extLst>
           </p:cNvPr>
@@ -11592,7 +13075,7 @@
           <p:cNvPr id="18" name="">
             <a:extLst xmlns:a="http://schemas.openxmlformats.org/drawingml/2006/main">
               <a:ext uri="{FF2B5EF4-FFF2-40B4-BE49-F238E27FC236}">
-                <a16:creationId xmlns:a16="http://schemas.microsoft.com/office/drawing/2014/main" id="{9DD82BF1-4EF4-4944-9E09-08F1E4E1385F}"/>
+                <a16:creationId xmlns:a16="http://schemas.microsoft.com/office/drawing/2014/main" id="{B84CCE42-77E2-4073-BFC7-9D97D5588054}"/>
               </a:ext>
             </a:extLst>
           </p:cNvPr>
@@ -11656,7 +13139,7 @@
           <p:cNvPr id="19" name="">
             <a:extLst xmlns:a="http://schemas.openxmlformats.org/drawingml/2006/main">
               <a:ext uri="{FF2B5EF4-FFF2-40B4-BE49-F238E27FC236}">
-                <a16:creationId xmlns:a16="http://schemas.microsoft.com/office/drawing/2014/main" id="{0FDFB87A-175B-4155-8E43-357C4566A061}"/>
+                <a16:creationId xmlns:a16="http://schemas.microsoft.com/office/drawing/2014/main" id="{E4A7194F-965D-4566-82B7-7457E9C3BC40}"/>
               </a:ext>
             </a:extLst>
           </p:cNvPr>
@@ -11689,7 +13172,7 @@
           <p:cNvPr id="20" name="">
             <a:extLst xmlns:a="http://schemas.openxmlformats.org/drawingml/2006/main">
               <a:ext uri="{FF2B5EF4-FFF2-40B4-BE49-F238E27FC236}">
-                <a16:creationId xmlns:a16="http://schemas.microsoft.com/office/drawing/2014/main" id="{FC7BBDEB-8C4D-4E71-ACF8-9E9A4C6BEDB0}"/>
+                <a16:creationId xmlns:a16="http://schemas.microsoft.com/office/drawing/2014/main" id="{DF7BF708-1663-465A-8F24-AF5061457BBE}"/>
               </a:ext>
             </a:extLst>
           </p:cNvPr>
@@ -11753,7 +13236,7 @@
           <p:cNvPr id="21" name="">
             <a:extLst xmlns:a="http://schemas.openxmlformats.org/drawingml/2006/main">
               <a:ext uri="{FF2B5EF4-FFF2-40B4-BE49-F238E27FC236}">
-                <a16:creationId xmlns:a16="http://schemas.microsoft.com/office/drawing/2014/main" id="{07239CFF-D095-4029-9154-A3D564CEBAF4}"/>
+                <a16:creationId xmlns:a16="http://schemas.microsoft.com/office/drawing/2014/main" id="{C2F2D283-5169-4698-B313-D473E1105A27}"/>
               </a:ext>
             </a:extLst>
           </p:cNvPr>
@@ -11786,7 +13269,7 @@
           <p:cNvPr id="22" name="">
             <a:extLst xmlns:a="http://schemas.openxmlformats.org/drawingml/2006/main">
               <a:ext uri="{FF2B5EF4-FFF2-40B4-BE49-F238E27FC236}">
-                <a16:creationId xmlns:a16="http://schemas.microsoft.com/office/drawing/2014/main" id="{E46DB0F8-F469-480C-8877-5C3EEA4E517A}"/>
+                <a16:creationId xmlns:a16="http://schemas.microsoft.com/office/drawing/2014/main" id="{F7536F54-F915-4CEC-887D-76D37CC4F8AC}"/>
               </a:ext>
             </a:extLst>
           </p:cNvPr>
@@ -11850,7 +13333,7 @@
           <p:cNvPr id="23" name="">
             <a:extLst xmlns:a="http://schemas.openxmlformats.org/drawingml/2006/main">
               <a:ext uri="{FF2B5EF4-FFF2-40B4-BE49-F238E27FC236}">
-                <a16:creationId xmlns:a16="http://schemas.microsoft.com/office/drawing/2014/main" id="{74FC428B-58B4-48F4-910E-4F2D2484F043}"/>
+                <a16:creationId xmlns:a16="http://schemas.microsoft.com/office/drawing/2014/main" id="{C55033EB-2C95-4B97-A249-7A7B4D9190E9}"/>
               </a:ext>
             </a:extLst>
           </p:cNvPr>
@@ -11883,7 +13366,7 @@
           <p:cNvPr id="24" name="">
             <a:extLst xmlns:a="http://schemas.openxmlformats.org/drawingml/2006/main">
               <a:ext uri="{FF2B5EF4-FFF2-40B4-BE49-F238E27FC236}">
-                <a16:creationId xmlns:a16="http://schemas.microsoft.com/office/drawing/2014/main" id="{88AEE0E4-8397-412D-AFB7-6737A10B17FE}"/>
+                <a16:creationId xmlns:a16="http://schemas.microsoft.com/office/drawing/2014/main" id="{CD87B4A2-5FDA-4EBD-A7A9-F674AFD2E44F}"/>
               </a:ext>
             </a:extLst>
           </p:cNvPr>
@@ -11947,7 +13430,7 @@
           <p:cNvPr id="25" name="">
             <a:extLst xmlns:a="http://schemas.openxmlformats.org/drawingml/2006/main">
               <a:ext uri="{FF2B5EF4-FFF2-40B4-BE49-F238E27FC236}">
-                <a16:creationId xmlns:a16="http://schemas.microsoft.com/office/drawing/2014/main" id="{AB3CF6A9-3EB6-4A8F-86BF-D15B842E49A6}"/>
+                <a16:creationId xmlns:a16="http://schemas.microsoft.com/office/drawing/2014/main" id="{8B27B918-E8BE-43E1-9C30-1AC276C00FD8}"/>
               </a:ext>
             </a:extLst>
           </p:cNvPr>
@@ -11980,7 +13463,7 @@
           <p:cNvPr id="26" name="">
             <a:extLst xmlns:a="http://schemas.openxmlformats.org/drawingml/2006/main">
               <a:ext uri="{FF2B5EF4-FFF2-40B4-BE49-F238E27FC236}">
-                <a16:creationId xmlns:a16="http://schemas.microsoft.com/office/drawing/2014/main" id="{18C80A1B-ABA4-477D-B91D-062E270783F7}"/>
+                <a16:creationId xmlns:a16="http://schemas.microsoft.com/office/drawing/2014/main" id="{00F58958-E1BB-4C1A-A22A-779A12E86C2C}"/>
               </a:ext>
             </a:extLst>
           </p:cNvPr>
@@ -12044,7 +13527,7 @@
           <p:cNvPr id="27" name="">
             <a:extLst xmlns:a="http://schemas.openxmlformats.org/drawingml/2006/main">
               <a:ext uri="{FF2B5EF4-FFF2-40B4-BE49-F238E27FC236}">
-                <a16:creationId xmlns:a16="http://schemas.microsoft.com/office/drawing/2014/main" id="{085A5DBF-01C4-4402-B900-768281384191}"/>
+                <a16:creationId xmlns:a16="http://schemas.microsoft.com/office/drawing/2014/main" id="{783971AE-F647-4878-BC2B-925226F4EC69}"/>
               </a:ext>
             </a:extLst>
           </p:cNvPr>
@@ -12106,7 +13589,7 @@
     </p:spTree>
     <p:extLst>
       <p:ext uri="{BB962C8B-B14F-4D97-AF65-F5344CB8AC3E}">
-        <p14:creationId xmlns:p14="http://schemas.microsoft.com/office/powerpoint/2010/main" val="1551158308"/>
+        <p14:creationId xmlns:p14="http://schemas.microsoft.com/office/powerpoint/2010/main" val="1160026434"/>
       </p:ext>
     </p:extLst>
   </p:cSld>
@@ -12130,7 +13613,7 @@
           <p:cNvPr id="1" name="">
             <a:extLst xmlns:a="http://schemas.openxmlformats.org/drawingml/2006/main">
               <a:ext uri="{FF2B5EF4-FFF2-40B4-BE49-F238E27FC236}">
-                <a16:creationId xmlns:a16="http://schemas.microsoft.com/office/drawing/2014/main" id="{AE0BFB2F-F13F-4B1C-8607-E587E8811BB4}"/>
+                <a16:creationId xmlns:a16="http://schemas.microsoft.com/office/drawing/2014/main" id="{BC9FE0FA-E873-4573-9B0C-B8D68A39B502}"/>
               </a:ext>
             </a:extLst>
           </p:cNvPr>
@@ -12165,7 +13648,7 @@
           <p:cNvPr id="2" name="">
             <a:extLst xmlns:a="http://schemas.openxmlformats.org/drawingml/2006/main">
               <a:ext uri="{FF2B5EF4-FFF2-40B4-BE49-F238E27FC236}">
-                <a16:creationId xmlns:a16="http://schemas.microsoft.com/office/drawing/2014/main" id="{30BF2FFF-88CF-4875-B6F7-DBDCD8AEA85A}"/>
+                <a16:creationId xmlns:a16="http://schemas.microsoft.com/office/drawing/2014/main" id="{E21E167B-9E34-4E1D-9380-0A0AC4D78D9C}"/>
               </a:ext>
             </a:extLst>
           </p:cNvPr>
@@ -12229,7 +13712,7 @@
           <p:cNvPr id="3" name="">
             <a:extLst xmlns:a="http://schemas.openxmlformats.org/drawingml/2006/main">
               <a:ext uri="{FF2B5EF4-FFF2-40B4-BE49-F238E27FC236}">
-                <a16:creationId xmlns:a16="http://schemas.microsoft.com/office/drawing/2014/main" id="{95A9F5F4-396F-487C-85D5-A268450B683A}"/>
+                <a16:creationId xmlns:a16="http://schemas.microsoft.com/office/drawing/2014/main" id="{6058057E-ED8D-4875-B6C6-EDFC7B326DBA}"/>
               </a:ext>
             </a:extLst>
           </p:cNvPr>
@@ -12293,7 +13776,7 @@
           <p:cNvPr id="4" name="">
             <a:extLst xmlns:a="http://schemas.openxmlformats.org/drawingml/2006/main">
               <a:ext uri="{FF2B5EF4-FFF2-40B4-BE49-F238E27FC236}">
-                <a16:creationId xmlns:a16="http://schemas.microsoft.com/office/drawing/2014/main" id="{1E56D466-7A8F-444D-8DE7-DA7A08A0D699}"/>
+                <a16:creationId xmlns:a16="http://schemas.microsoft.com/office/drawing/2014/main" id="{1652D949-8528-4496-9DDE-29276E2D1E9C}"/>
               </a:ext>
             </a:extLst>
           </p:cNvPr>
@@ -12326,7 +13809,7 @@
           <p:cNvPr id="5" name="">
             <a:extLst xmlns:a="http://schemas.openxmlformats.org/drawingml/2006/main">
               <a:ext uri="{FF2B5EF4-FFF2-40B4-BE49-F238E27FC236}">
-                <a16:creationId xmlns:a16="http://schemas.microsoft.com/office/drawing/2014/main" id="{A3F012CB-81FC-4F71-8CF9-9E260E5BDE56}"/>
+                <a16:creationId xmlns:a16="http://schemas.microsoft.com/office/drawing/2014/main" id="{1BA1D61D-389D-4894-8EF0-57869947F481}"/>
               </a:ext>
             </a:extLst>
           </p:cNvPr>
@@ -12359,7 +13842,7 @@
           <p:cNvPr id="6" name="">
             <a:extLst xmlns:a="http://schemas.openxmlformats.org/drawingml/2006/main">
               <a:ext uri="{FF2B5EF4-FFF2-40B4-BE49-F238E27FC236}">
-                <a16:creationId xmlns:a16="http://schemas.microsoft.com/office/drawing/2014/main" id="{17AF69E7-F081-406B-96DB-0D3FE4DCE8D9}"/>
+                <a16:creationId xmlns:a16="http://schemas.microsoft.com/office/drawing/2014/main" id="{3778F791-63F5-4B0A-A31D-ECC451D86051}"/>
               </a:ext>
             </a:extLst>
           </p:cNvPr>
@@ -12423,7 +13906,7 @@
           <p:cNvPr id="7" name="">
             <a:extLst xmlns:a="http://schemas.openxmlformats.org/drawingml/2006/main">
               <a:ext uri="{FF2B5EF4-FFF2-40B4-BE49-F238E27FC236}">
-                <a16:creationId xmlns:a16="http://schemas.microsoft.com/office/drawing/2014/main" id="{522B1803-10D8-4CDC-A714-26EEAE8A9BEC}"/>
+                <a16:creationId xmlns:a16="http://schemas.microsoft.com/office/drawing/2014/main" id="{97716B45-204C-4E4B-854F-116E98A7E8E6}"/>
               </a:ext>
             </a:extLst>
           </p:cNvPr>
@@ -12487,7 +13970,7 @@
           <p:cNvPr id="8" name="">
             <a:extLst xmlns:a="http://schemas.openxmlformats.org/drawingml/2006/main">
               <a:ext uri="{FF2B5EF4-FFF2-40B4-BE49-F238E27FC236}">
-                <a16:creationId xmlns:a16="http://schemas.microsoft.com/office/drawing/2014/main" id="{6574FE81-2539-49E2-8B97-370F46C5A6CB}"/>
+                <a16:creationId xmlns:a16="http://schemas.microsoft.com/office/drawing/2014/main" id="{B528CA90-DF54-4C27-A2A7-A491EA5E0D0F}"/>
               </a:ext>
             </a:extLst>
           </p:cNvPr>
@@ -12551,7 +14034,7 @@
           <p:cNvPr id="9" name="">
             <a:extLst xmlns:a="http://schemas.openxmlformats.org/drawingml/2006/main">
               <a:ext uri="{FF2B5EF4-FFF2-40B4-BE49-F238E27FC236}">
-                <a16:creationId xmlns:a16="http://schemas.microsoft.com/office/drawing/2014/main" id="{C6C1684D-7DCD-4A67-99C4-D08D5027878D}"/>
+                <a16:creationId xmlns:a16="http://schemas.microsoft.com/office/drawing/2014/main" id="{1887620A-897D-4CF0-BD6B-6E016750D06F}"/>
               </a:ext>
             </a:extLst>
           </p:cNvPr>
@@ -12584,7 +14067,7 @@
           <p:cNvPr id="10" name="">
             <a:extLst xmlns:a="http://schemas.openxmlformats.org/drawingml/2006/main">
               <a:ext uri="{FF2B5EF4-FFF2-40B4-BE49-F238E27FC236}">
-                <a16:creationId xmlns:a16="http://schemas.microsoft.com/office/drawing/2014/main" id="{F6070477-EC14-4056-AD32-CCD09C2E2E78}"/>
+                <a16:creationId xmlns:a16="http://schemas.microsoft.com/office/drawing/2014/main" id="{70F9A3A0-8F3C-42C6-A6DA-4C1D22D01310}"/>
               </a:ext>
             </a:extLst>
           </p:cNvPr>
@@ -12648,7 +14131,7 @@
           <p:cNvPr id="11" name="">
             <a:extLst xmlns:a="http://schemas.openxmlformats.org/drawingml/2006/main">
               <a:ext uri="{FF2B5EF4-FFF2-40B4-BE49-F238E27FC236}">
-                <a16:creationId xmlns:a16="http://schemas.microsoft.com/office/drawing/2014/main" id="{8B9A175F-4A3D-4976-A8DC-9E9410DF5692}"/>
+                <a16:creationId xmlns:a16="http://schemas.microsoft.com/office/drawing/2014/main" id="{866C6E66-B306-4AA8-B3C0-2911DFD61743}"/>
               </a:ext>
             </a:extLst>
           </p:cNvPr>
@@ -12712,7 +14195,7 @@
           <p:cNvPr id="12" name="">
             <a:extLst xmlns:a="http://schemas.openxmlformats.org/drawingml/2006/main">
               <a:ext uri="{FF2B5EF4-FFF2-40B4-BE49-F238E27FC236}">
-                <a16:creationId xmlns:a16="http://schemas.microsoft.com/office/drawing/2014/main" id="{67F25065-6DE6-4249-899F-F51DBEC62EF5}"/>
+                <a16:creationId xmlns:a16="http://schemas.microsoft.com/office/drawing/2014/main" id="{D0114D51-BA11-4346-9A6E-E2D8DB421038}"/>
               </a:ext>
             </a:extLst>
           </p:cNvPr>
@@ -12776,7 +14259,7 @@
           <p:cNvPr id="13" name="">
             <a:extLst xmlns:a="http://schemas.openxmlformats.org/drawingml/2006/main">
               <a:ext uri="{FF2B5EF4-FFF2-40B4-BE49-F238E27FC236}">
-                <a16:creationId xmlns:a16="http://schemas.microsoft.com/office/drawing/2014/main" id="{18A7DD4C-24AA-4C9B-B884-361F09CF672B}"/>
+                <a16:creationId xmlns:a16="http://schemas.microsoft.com/office/drawing/2014/main" id="{BEA38EF2-4242-4AF2-83F3-0B32549F03BC}"/>
               </a:ext>
             </a:extLst>
           </p:cNvPr>
@@ -12809,7 +14292,7 @@
           <p:cNvPr id="14" name="">
             <a:extLst xmlns:a="http://schemas.openxmlformats.org/drawingml/2006/main">
               <a:ext uri="{FF2B5EF4-FFF2-40B4-BE49-F238E27FC236}">
-                <a16:creationId xmlns:a16="http://schemas.microsoft.com/office/drawing/2014/main" id="{04842196-656E-4499-BC14-086665146AE1}"/>
+                <a16:creationId xmlns:a16="http://schemas.microsoft.com/office/drawing/2014/main" id="{09318A38-45B1-40B9-9126-04F29583827F}"/>
               </a:ext>
             </a:extLst>
           </p:cNvPr>
@@ -12873,7 +14356,7 @@
           <p:cNvPr id="15" name="">
             <a:extLst xmlns:a="http://schemas.openxmlformats.org/drawingml/2006/main">
               <a:ext uri="{FF2B5EF4-FFF2-40B4-BE49-F238E27FC236}">
-                <a16:creationId xmlns:a16="http://schemas.microsoft.com/office/drawing/2014/main" id="{998A3CEF-F8E9-412C-8450-4CE7C87C91D8}"/>
+                <a16:creationId xmlns:a16="http://schemas.microsoft.com/office/drawing/2014/main" id="{E721CB16-7598-478B-8C67-4E36D46C1392}"/>
               </a:ext>
             </a:extLst>
           </p:cNvPr>
@@ -12937,7 +14420,7 @@
           <p:cNvPr id="16" name="">
             <a:extLst xmlns:a="http://schemas.openxmlformats.org/drawingml/2006/main">
               <a:ext uri="{FF2B5EF4-FFF2-40B4-BE49-F238E27FC236}">
-                <a16:creationId xmlns:a16="http://schemas.microsoft.com/office/drawing/2014/main" id="{6B7D315D-4B69-49E1-92B3-8B935D6BBA37}"/>
+                <a16:creationId xmlns:a16="http://schemas.microsoft.com/office/drawing/2014/main" id="{5DE1554A-7EF5-42B8-AC83-E569AFABE896}"/>
               </a:ext>
             </a:extLst>
           </p:cNvPr>
@@ -13001,7 +14484,7 @@
           <p:cNvPr id="17" name="">
             <a:extLst xmlns:a="http://schemas.openxmlformats.org/drawingml/2006/main">
               <a:ext uri="{FF2B5EF4-FFF2-40B4-BE49-F238E27FC236}">
-                <a16:creationId xmlns:a16="http://schemas.microsoft.com/office/drawing/2014/main" id="{2CE81A41-838F-4833-B12E-CE17A4F546F2}"/>
+                <a16:creationId xmlns:a16="http://schemas.microsoft.com/office/drawing/2014/main" id="{C4C1850D-3B0A-41E4-B1F1-CF64BA7B9CF9}"/>
               </a:ext>
             </a:extLst>
           </p:cNvPr>
@@ -13034,7 +14517,7 @@
           <p:cNvPr id="18" name="">
             <a:extLst xmlns:a="http://schemas.openxmlformats.org/drawingml/2006/main">
               <a:ext uri="{FF2B5EF4-FFF2-40B4-BE49-F238E27FC236}">
-                <a16:creationId xmlns:a16="http://schemas.microsoft.com/office/drawing/2014/main" id="{0336D920-CF24-47C9-85A8-C60B575F8434}"/>
+                <a16:creationId xmlns:a16="http://schemas.microsoft.com/office/drawing/2014/main" id="{1CABA7E1-2FE8-4A33-BEB3-FB7481220117}"/>
               </a:ext>
             </a:extLst>
           </p:cNvPr>
@@ -13098,7 +14581,7 @@
           <p:cNvPr id="19" name="">
             <a:extLst xmlns:a="http://schemas.openxmlformats.org/drawingml/2006/main">
               <a:ext uri="{FF2B5EF4-FFF2-40B4-BE49-F238E27FC236}">
-                <a16:creationId xmlns:a16="http://schemas.microsoft.com/office/drawing/2014/main" id="{BA7A63D5-E49A-4799-AE0C-1715F1A175B4}"/>
+                <a16:creationId xmlns:a16="http://schemas.microsoft.com/office/drawing/2014/main" id="{5FCA1981-80F4-47E9-A631-14A9FA8DD347}"/>
               </a:ext>
             </a:extLst>
           </p:cNvPr>
@@ -13162,7 +14645,7 @@
           <p:cNvPr id="20" name="">
             <a:extLst xmlns:a="http://schemas.openxmlformats.org/drawingml/2006/main">
               <a:ext uri="{FF2B5EF4-FFF2-40B4-BE49-F238E27FC236}">
-                <a16:creationId xmlns:a16="http://schemas.microsoft.com/office/drawing/2014/main" id="{53F2E27C-0E82-4D3C-A3D9-6F5538C1594D}"/>
+                <a16:creationId xmlns:a16="http://schemas.microsoft.com/office/drawing/2014/main" id="{2CB9D198-97FF-4E0E-8803-FCAF06538D0D}"/>
               </a:ext>
             </a:extLst>
           </p:cNvPr>
@@ -13226,7 +14709,7 @@
           <p:cNvPr id="21" name="">
             <a:extLst xmlns:a="http://schemas.openxmlformats.org/drawingml/2006/main">
               <a:ext uri="{FF2B5EF4-FFF2-40B4-BE49-F238E27FC236}">
-                <a16:creationId xmlns:a16="http://schemas.microsoft.com/office/drawing/2014/main" id="{86455D39-AA91-4104-B472-8C0A33B879B6}"/>
+                <a16:creationId xmlns:a16="http://schemas.microsoft.com/office/drawing/2014/main" id="{D80B34D6-E34E-4AF7-A08B-599AACC6F216}"/>
               </a:ext>
             </a:extLst>
           </p:cNvPr>
@@ -13259,7 +14742,7 @@
           <p:cNvPr id="22" name="">
             <a:extLst xmlns:a="http://schemas.openxmlformats.org/drawingml/2006/main">
               <a:ext uri="{FF2B5EF4-FFF2-40B4-BE49-F238E27FC236}">
-                <a16:creationId xmlns:a16="http://schemas.microsoft.com/office/drawing/2014/main" id="{52A547E0-3024-4845-AE2C-29025270E287}"/>
+                <a16:creationId xmlns:a16="http://schemas.microsoft.com/office/drawing/2014/main" id="{E61D2D31-A63A-44AD-909A-695A8D956D47}"/>
               </a:ext>
             </a:extLst>
           </p:cNvPr>
@@ -13323,7 +14806,7 @@
           <p:cNvPr id="23" name="">
             <a:extLst xmlns:a="http://schemas.openxmlformats.org/drawingml/2006/main">
               <a:ext uri="{FF2B5EF4-FFF2-40B4-BE49-F238E27FC236}">
-                <a16:creationId xmlns:a16="http://schemas.microsoft.com/office/drawing/2014/main" id="{ED46F04B-A531-4357-A86F-B10896BD3BC3}"/>
+                <a16:creationId xmlns:a16="http://schemas.microsoft.com/office/drawing/2014/main" id="{28B424DC-C4AE-40B0-8E65-F472BCFB2070}"/>
               </a:ext>
             </a:extLst>
           </p:cNvPr>
@@ -13387,7 +14870,7 @@
           <p:cNvPr id="24" name="">
             <a:extLst xmlns:a="http://schemas.openxmlformats.org/drawingml/2006/main">
               <a:ext uri="{FF2B5EF4-FFF2-40B4-BE49-F238E27FC236}">
-                <a16:creationId xmlns:a16="http://schemas.microsoft.com/office/drawing/2014/main" id="{90FCB34A-D2E5-48ED-AEDA-6F693AB33971}"/>
+                <a16:creationId xmlns:a16="http://schemas.microsoft.com/office/drawing/2014/main" id="{1210AD43-EED7-4E3B-AC8A-87D32CDACC9E}"/>
               </a:ext>
             </a:extLst>
           </p:cNvPr>
@@ -13449,7 +14932,7 @@
     </p:spTree>
     <p:extLst>
       <p:ext uri="{BB962C8B-B14F-4D97-AF65-F5344CB8AC3E}">
-        <p14:creationId xmlns:p14="http://schemas.microsoft.com/office/powerpoint/2010/main" val="1671912150"/>
+        <p14:creationId xmlns:p14="http://schemas.microsoft.com/office/powerpoint/2010/main" val="278858737"/>
       </p:ext>
     </p:extLst>
   </p:cSld>
